--- a/en/slides/13-Computer_Architecture-Sequential_Machines.pptx
+++ b/en/slides/13-Computer_Architecture-Sequential_Machines.pptx
@@ -126,19 +126,19 @@
   <p:extLst>
     <p:ext uri="{521415D9-36F7-43E2-AB2F-B90AF26B5E84}">
       <p14:sectionLst xmlns:p14="http://schemas.microsoft.com/office/powerpoint/2010/main">
-        <p14:section name="Opening" id="{5b77660d-37de-5d81-1cf3-0df2b8722258}">
+        <p14:section name="Opening" id="{6e069c56-f527-8306-4732-055a642540a3}">
           <p14:sldIdLst>
             <p14:sldId id="256"/>
             <p14:sldId id="257"/>
           </p14:sldIdLst>
         </p14:section>
-        <p14:section name="Time and state" id="{7392ce15-34df-c82a-cd4d-3339dfc2354f}">
+        <p14:section name="Time and state" id="{8efa21a8-df3e-0968-684c-a83abfe0ec47}">
           <p14:sldIdLst>
             <p14:sldId id="258"/>
             <p14:sldId id="259"/>
           </p14:sldIdLst>
         </p14:section>
-        <p14:section name="Finite-state machines" id="{b1b3e82b-ee2f-9c7c-75e0-25dc3470988a}">
+        <p14:section name="Finite-state machines" id="{36c782ff-9e16-3ff5-d600-03e7d05bce81}">
           <p14:sldIdLst>
             <p14:sldId id="260"/>
             <p14:sldId id="261"/>
@@ -146,22 +146,22 @@
             <p14:sldId id="263"/>
           </p14:sldIdLst>
         </p14:section>
-        <p14:section name="Latches" id="{18e6e3d8-9154-be4c-d55b-26b08b7eb252}">
+        <p14:section name="Latches" id="{93e7f4bf-00fb-1348-eb6a-8429bc1583c8}">
           <p14:sldIdLst>
             <p14:sldId id="264"/>
             <p14:sldId id="265"/>
             <p14:sldId id="266"/>
             <p14:sldId id="267"/>
+            <p14:sldId id="268"/>
           </p14:sldIdLst>
         </p14:section>
-        <p14:section name="Flip-flops" id="{5b436044-a048-4dc6-bb34-93d0c422ab29}">
+        <p14:section name="Flip-flops" id="{457d8237-dcad-1695-d018-0580b1f77a19}">
           <p14:sldIdLst>
-            <p14:sldId id="268"/>
             <p14:sldId id="269"/>
             <p14:sldId id="270"/>
           </p14:sldIdLst>
         </p14:section>
-        <p14:section name="Back to the machine" id="{ceb91705-8c87-f18e-a4d5-06705a5ff809}">
+        <p14:section name="Back to the machine" id="{06e07fd4-2782-4061-47d8-22181cc6a82b}">
           <p14:sldIdLst>
             <p14:sldId id="271"/>
             <p14:sldId id="272"/>
@@ -752,8 +752,8 @@
           <a:p>
             <a:r>
               <a:rPr lang="en-US" dirty="0"/>
-              <a:t>In an asynchronous circuit the outputs may change whenever an input changes. In a synchronous one the clock decides when. To make the SR latch synchronous, S and R pass through two AND gates together with the clock. When the clock is 0 both gates give 0 and the latch cannot change; when the clock is 1 it behaves like the plain latch. The clock decides when the inputs are listened to.
-For the lecturer: Latch sincroni e asincroni. A simulator is suggested in the original deck: de-iitr.vlabs.ac.in/exp/truth-tables-flip-flops.</a:t>
+              <a:t>With S and R both at 1, both NOR gates output 0, so Q and its complement are no longer complementary. Worse: if the two inputs then return to 0 together, the gates race against each other, and the final state depends on which is faster. The result is unpredictable, and the latch may even oscillate. Whoever uses an SR latch must guarantee that S and R are never 1 together. The JK and D elements were invented to remove this problem at the root.
+For the lecturer: The conclusions of the original deck swapped set and reset on one slide: set gives Q = 1, reset gives Q = 0.</a:t>
             </a:r>
             <a:endParaRPr lang="en-US" dirty="0"/>
           </a:p>
@@ -841,8 +841,8 @@
           <a:p>
             <a:r>
               <a:rPr lang="en-US" dirty="0"/>
-              <a:t>Two improvements of the latch. In the JK latch the outputs are fed back to the input gates, so that the internal set and reset can never be 1 together; the combination J = K = 1, instead of being forbidden, inverts the output: it toggles. The D latch has a single input: D goes to set and its negation to reset, so the output simply takes the value of D while the clock is active. D stands for delay, or data.
-For the lecturer: JK: the outputs are fed back to the input gates, S = J . Q' and R = K . Q; since Q and Q' are complementary, S and R can never both be 1. D: a single input goes to S and, through an inverter, to R, so only the cases S = 0, R = 1 and S = 1, R = 0 are possible.</a:t>
+              <a:t>In an asynchronous circuit the outputs may change whenever an input changes. In a synchronous one the clock decides when. To make the SR latch synchronous, S and R pass through two AND gates together with the clock. When the clock is 0 both gates give 0 and the latch cannot change; when the clock is 1 it behaves like the plain latch. The clock decides when the inputs are listened to.
+For the lecturer: Latch sincroni e asincroni. A simulator is suggested in the original deck: de-iitr.vlabs.ac.in/exp/truth-tables-flip-flops.</a:t>
             </a:r>
             <a:endParaRPr lang="en-US" dirty="0"/>
           </a:p>
@@ -930,8 +930,8 @@
           <a:p>
             <a:r>
               <a:rPr lang="en-US" dirty="0"/>
-              <a:t>The master-slave flip-flop is made of two latches in series, controlled by opposite levels of the clock. When the clock is 0 the master is open and follows the input, while the slave is closed. When the clock passes to 1 the master closes, keeping what it had, and the slave opens and shows it. The two are never transparent together, so the input can never run straight through to the output. The effect is that the output changes only at the rising edge: the flip-flop is edge-triggered.
-For the lecturer: Flip-flop master-slave. The original deck showed the JK version, built from two clocked JK latches; the D version is the one used in the registers of a processor.</a:t>
+              <a:t>Two improvements of the latch. In the JK latch the outputs are fed back to the input gates, so that the internal set and reset can never be 1 together; the combination J = K = 1, instead of being forbidden, inverts the output: it toggles. The D latch has a single input: D goes to set and its negation to reset, so the output simply takes the value of D while the clock is active. D stands for delay, or data.
+For the lecturer: JK: the outputs are fed back to the input gates, S = J . Q' and R = K . Q; since Q and Q' are complementary, S and R can never both be 1. D: a single input goes to S and, through an inverter, to R, so only the cases S = 0, R = 1 and S = 1, R = 0 are possible.</a:t>
             </a:r>
             <a:endParaRPr lang="en-US" dirty="0"/>
           </a:p>
@@ -1019,8 +1019,8 @@
           <a:p>
             <a:r>
               <a:rPr lang="en-US" dirty="0"/>
-              <a:t>The difference, seen on the waveforms. The clock and the input D are the same for both. The output of the latch follows D for the whole high phase of the clock: it changes in the middle of a phase. The output of the flip-flop changes only at the rising edges, taking the value that D has at that instant; short pulses of D between two edges are ignored. The flip-flop's output is steady for a whole period, which is exactly what a state register needs.
-For the lecturer: Level-triggered versus edge-triggered. The waveforms are computed, not drawn by hand: the latch output changes in the middle of a high phase, the flip-flop output only at rising edges.</a:t>
+              <a:t>The master-slave flip-flop is made of two latches in series, controlled by opposite levels of the clock. When the clock is 0 the master is open and follows the input, while the slave is closed. When the clock passes to 1 the master closes, keeping what it had, and the slave opens and shows it. The two are never transparent together, so the input can never run straight through to the output. The effect is that the output changes only at the rising edge: the flip-flop is edge-triggered.
+For the lecturer: Flip-flop master-slave. The original deck showed the JK version, built from two clocked JK latches; the D version is the one used in the registers of a processor.</a:t>
             </a:r>
             <a:endParaRPr lang="en-US" dirty="0"/>
           </a:p>
@@ -1108,8 +1108,8 @@
           <a:p>
             <a:r>
               <a:rPr lang="en-US" dirty="0"/>
-              <a:t>A summary of the memory elements. The column next state gives the rule in compact form, where Q+ is the state after the change; the last column says when the change can happen: at any time for the plain latch, during the active level for clocked latches, on the edge for flip-flops. The T flip-flop, which toggles when T is 1, is a JK with its two inputs joined. Keep in mind the row of the D flip-flop: it is the memory element of today's processors.
-For the lecturer: Q+ is the next state (tabella caratteristica). A T flip-flop is a JK with J = K = T. The D flip-flop is the standard memory element of today's processors.</a:t>
+              <a:t>The difference, seen on the waveforms. The clock and the input D are the same for both. The output of the latch follows D for the whole high phase of the clock: it changes in the middle of a phase. The output of the flip-flop changes only at the rising edges, taking the value that D has at that instant; short pulses of D between two edges are ignored. The flip-flop's output is steady for a whole period, which is exactly what a state register needs.
+For the lecturer: Level-triggered versus edge-triggered. The waveforms are computed, not drawn by hand: the latch output changes in the middle of a high phase, the flip-flop output only at rising edges.</a:t>
             </a:r>
             <a:endParaRPr lang="en-US" dirty="0"/>
           </a:p>
@@ -3298,7 +3298,63 @@
       </p:sp>
       <p:sp>
         <p:nvSpPr>
-          <p:cNvPr id="12" name="Shape 10"/>
+          <p:cNvPr id="12" name="Text 10"/>
+          <p:cNvSpPr txBox="1"/>
+          <p:nvPr/>
+        </p:nvSpPr>
+        <p:spPr>
+          <a:xfrm>
+            <a:off x="4693615" y="566928"/>
+            <a:ext cx="6949440" cy="640080"/>
+          </a:xfrm>
+          <a:prstGeom prst="rect">
+            <a:avLst/>
+          </a:prstGeom>
+          <a:noFill/>
+          <a:ln/>
+        </p:spPr>
+        <p:txBody>
+          <a:bodyPr wrap="square" lIns="0" tIns="0" rIns="0" bIns="0" rtlCol="0" anchor="t"/>
+          <a:lstStyle/>
+          <a:p>
+            <a:pPr algn="r" indent="0" marL="0">
+              <a:buNone/>
+            </a:pPr>
+            <a:r>
+              <a:rPr lang="en-US" sz="1300" dirty="0">
+                <a:solidFill>
+                  <a:srgbClr val="CFE3EA"/>
+                </a:solidFill>
+                <a:latin typeface="Calibri" pitchFamily="34" charset="0"/>
+                <a:ea typeface="Calibri" pitchFamily="34" charset="-122"/>
+                <a:cs typeface="Calibri" pitchFamily="34" charset="-120"/>
+              </a:rPr>
+              <a:t>Lecture deck. The listings, the complete program and how to test it are in the code deck:</a:t>
+            </a:r>
+            <a:endParaRPr lang="en-US" sz="1300" dirty="0"/>
+          </a:p>
+          <a:p>
+            <a:pPr algn="r" indent="0" marL="0">
+              <a:buNone/>
+            </a:pPr>
+            <a:r>
+              <a:rPr lang="en-US" sz="1300" dirty="0">
+                <a:solidFill>
+                  <a:srgbClr val="CFE3EA"/>
+                </a:solidFill>
+                <a:latin typeface="Calibri" pitchFamily="34" charset="0"/>
+                <a:ea typeface="Calibri" pitchFamily="34" charset="-122"/>
+                <a:cs typeface="Calibri" pitchFamily="34" charset="-120"/>
+              </a:rPr>
+              <a:t>13-Computer_Architecture-Sequential_Machines-Code.pptx</a:t>
+            </a:r>
+            <a:endParaRPr lang="en-US" sz="1300" dirty="0"/>
+          </a:p>
+        </p:txBody>
+      </p:sp>
+      <p:sp>
+        <p:nvSpPr>
+          <p:cNvPr id="13" name="Shape 11"/>
           <p:cNvSpPr/>
           <p:nvPr/>
         </p:nvSpPr>
@@ -3325,7 +3381,7 @@
       </p:sp>
       <p:pic>
         <p:nvPicPr>
-          <p:cNvPr id="13" name="Image 0" descr="/Users/raffaelemontella/devel/riscv-prg32/computer-architecture-with-prg32/tools/assets/game_pacman.png">    </p:cNvPr>
+          <p:cNvPr id="14" name="Image 0" descr="/Users/raffaelemontella/devel/riscv-prg32/computer-architecture-with-prg32/tools/assets/game_pacman.png">    </p:cNvPr>
           <p:cNvPicPr>
             <a:picLocks noChangeAspect="1"/>
           </p:cNvPicPr>
@@ -3821,7 +3877,7 @@
                 <a:ea typeface="Cambria" pitchFamily="34" charset="-122"/>
                 <a:cs typeface="Cambria" pitchFamily="34" charset="-120"/>
               </a:rPr>
-              <a:t>Synchronous latches: adding a clock</a:t>
+              <a:t>Why S = R = 1 is not allowed</a:t>
             </a:r>
             <a:endParaRPr lang="en-US" sz="3200" dirty="0"/>
           </a:p>
@@ -3830,96 +3886,6 @@
       <p:sp>
         <p:nvSpPr>
           <p:cNvPr id="3" name="Shape 1"/>
-          <p:cNvSpPr/>
-          <p:nvPr/>
-        </p:nvSpPr>
-        <p:spPr>
-          <a:xfrm>
-            <a:off x="6492240" y="1417320"/>
-            <a:ext cx="5150815" cy="4754880"/>
-          </a:xfrm>
-          <a:prstGeom prst="roundRect">
-            <a:avLst>
-              <a:gd name="adj" fmla="val 1538"/>
-            </a:avLst>
-          </a:prstGeom>
-          <a:solidFill>
-            <a:srgbClr val="EEF2F4"/>
-          </a:solidFill>
-          <a:ln w="12700">
-            <a:solidFill>
-              <a:srgbClr val="EEF2F4"/>
-            </a:solidFill>
-            <a:prstDash val="solid"/>
-          </a:ln>
-        </p:spPr>
-      </p:sp>
-      <p:pic>
-        <p:nvPicPr>
-          <p:cNvPr id="5" name="Image 0" descr="preencoded.png">    </p:cNvPr>
-          <p:cNvPicPr>
-            <a:picLocks noChangeAspect="1"/>
-          </p:cNvPicPr>
-          <p:nvPr/>
-        </p:nvPicPr>
-        <p:blipFill>
-          <a:blip r:embed="rId1"/>
-          <a:stretch>
-            <a:fillRect/>
-          </a:stretch>
-        </p:blipFill>
-        <p:spPr>
-          <a:xfrm>
-            <a:off x="6629400" y="2370572"/>
-            <a:ext cx="4876495" cy="2208296"/>
-          </a:xfrm>
-          <a:prstGeom prst="rect">
-            <a:avLst/>
-          </a:prstGeom>
-        </p:spPr>
-      </p:pic>
-      <p:sp>
-        <p:nvSpPr>
-          <p:cNvPr id="6" name="Text 2"/>
-          <p:cNvSpPr txBox="1"/>
-          <p:nvPr/>
-        </p:nvSpPr>
-        <p:spPr>
-          <a:xfrm>
-            <a:off x="6629400" y="5349240"/>
-            <a:ext cx="4876495" cy="640080"/>
-          </a:xfrm>
-          <a:prstGeom prst="rect">
-            <a:avLst/>
-          </a:prstGeom>
-          <a:noFill/>
-          <a:ln/>
-        </p:spPr>
-        <p:txBody>
-          <a:bodyPr wrap="square" lIns="0" tIns="0" rIns="0" bIns="0" rtlCol="0" anchor="ctr"/>
-          <a:lstStyle/>
-          <a:p>
-            <a:pPr algn="ctr" indent="0" marL="0">
-              <a:buNone/>
-            </a:pPr>
-            <a:r>
-              <a:rPr lang="en-US" sz="1350" i="1" dirty="0">
-                <a:solidFill>
-                  <a:srgbClr val="5B6B78"/>
-                </a:solidFill>
-                <a:latin typeface="Calibri" pitchFamily="34" charset="0"/>
-                <a:ea typeface="Calibri" pitchFamily="34" charset="-122"/>
-                <a:cs typeface="Calibri" pitchFamily="34" charset="-120"/>
-              </a:rPr>
-              <a:t>A clocked SR latch: the excitation inputs pass through two AND gates controlled by CK</a:t>
-            </a:r>
-            <a:endParaRPr lang="en-US" sz="1350" dirty="0"/>
-          </a:p>
-        </p:txBody>
-      </p:sp>
-      <p:sp>
-        <p:nvSpPr>
-          <p:cNvPr id="7" name="Shape 3"/>
           <p:cNvSpPr/>
           <p:nvPr/>
         </p:nvSpPr>
@@ -3944,14 +3910,14 @@
       </p:sp>
       <p:sp>
         <p:nvSpPr>
-          <p:cNvPr id="8" name="Text 4"/>
+          <p:cNvPr id="4" name="Text 2"/>
           <p:cNvSpPr txBox="1"/>
           <p:nvPr/>
         </p:nvSpPr>
         <p:spPr>
           <a:xfrm>
             <a:off x="932688" y="1417320"/>
-            <a:ext cx="5285232" cy="681736"/>
+            <a:ext cx="6565392" cy="681736"/>
           </a:xfrm>
           <a:prstGeom prst="rect">
             <a:avLst/>
@@ -3978,7 +3944,7 @@
                 <a:ea typeface="Calibri" pitchFamily="34" charset="-122"/>
                 <a:cs typeface="Calibri" pitchFamily="34" charset="-120"/>
               </a:rPr>
-              <a:t>Asynchronous systems: the outputs can change whenever an input changes</a:t>
+              <a:t>With both inputs at 1 both NOR gates output 0: Q and Q' are no longer complementary</a:t>
             </a:r>
             <a:endParaRPr lang="en-US" sz="2200" dirty="0"/>
           </a:p>
@@ -3986,13 +3952,13 @@
       </p:sp>
       <p:sp>
         <p:nvSpPr>
-          <p:cNvPr id="9" name="Shape 5"/>
+          <p:cNvPr id="5" name="Shape 3"/>
           <p:cNvSpPr/>
           <p:nvPr/>
         </p:nvSpPr>
         <p:spPr>
           <a:xfrm>
-            <a:off x="548640" y="2350939"/>
+            <a:off x="548640" y="2371598"/>
             <a:ext cx="146304" cy="146304"/>
           </a:xfrm>
           <a:prstGeom prst="rect">
@@ -4011,14 +3977,14 @@
       </p:sp>
       <p:sp>
         <p:nvSpPr>
-          <p:cNvPr id="10" name="Text 6"/>
+          <p:cNvPr id="6" name="Text 4"/>
           <p:cNvSpPr txBox="1"/>
           <p:nvPr/>
         </p:nvSpPr>
         <p:spPr>
           <a:xfrm>
-            <a:off x="932688" y="2244513"/>
-            <a:ext cx="5285232" cy="1022604"/>
+            <a:off x="932688" y="2265172"/>
+            <a:ext cx="6565392" cy="1022604"/>
           </a:xfrm>
           <a:prstGeom prst="rect">
             <a:avLst/>
@@ -4045,7 +4011,7 @@
                 <a:ea typeface="Calibri" pitchFamily="34" charset="-122"/>
                 <a:cs typeface="Calibri" pitchFamily="34" charset="-120"/>
               </a:rPr>
-              <a:t>Synchronous systems: the instant at which the outputs can change is decided by the clock</a:t>
+              <a:t>If S and R then return to 0 together, the two gates race: the final state depends on which is faster</a:t>
             </a:r>
             <a:endParaRPr lang="en-US" sz="2200" dirty="0"/>
           </a:p>
@@ -4053,13 +4019,13 @@
       </p:sp>
       <p:sp>
         <p:nvSpPr>
-          <p:cNvPr id="11" name="Shape 7"/>
+          <p:cNvPr id="7" name="Shape 5"/>
           <p:cNvSpPr/>
           <p:nvPr/>
         </p:nvSpPr>
         <p:spPr>
           <a:xfrm>
-            <a:off x="548640" y="3519001"/>
+            <a:off x="548640" y="3560318"/>
             <a:ext cx="146304" cy="146304"/>
           </a:xfrm>
           <a:prstGeom prst="rect">
@@ -4078,14 +4044,14 @@
       </p:sp>
       <p:sp>
         <p:nvSpPr>
-          <p:cNvPr id="12" name="Text 8"/>
+          <p:cNvPr id="8" name="Text 6"/>
           <p:cNvSpPr txBox="1"/>
           <p:nvPr/>
         </p:nvSpPr>
         <p:spPr>
           <a:xfrm>
-            <a:off x="932688" y="3412575"/>
-            <a:ext cx="5285232" cy="1932432"/>
+            <a:off x="932688" y="3453892"/>
+            <a:ext cx="6565392" cy="681736"/>
           </a:xfrm>
           <a:prstGeom prst="rect">
             <a:avLst/>
@@ -4112,61 +4078,21 @@
                 <a:ea typeface="Calibri" pitchFamily="34" charset="-122"/>
                 <a:cs typeface="Calibri" pitchFamily="34" charset="-120"/>
               </a:rPr>
-              <a:t>In a synchronous SR latch, S and R are ANDed with the clock</a:t>
+              <a:t>The output is unpredictable, and the latch may even oscillate</a:t>
             </a:r>
             <a:endParaRPr lang="en-US" sz="2200" dirty="0"/>
           </a:p>
-          <a:p>
-            <a:pPr indent="0" marL="0">
-              <a:spcAft>
-                <a:spcPts val="200"/>
-              </a:spcAft>
-              <a:buNone/>
-            </a:pPr>
-            <a:r>
-              <a:rPr lang="en-US" sz="1900" dirty="0">
-                <a:solidFill>
-                  <a:srgbClr val="5B6B78"/>
-                </a:solidFill>
-                <a:latin typeface="Calibri" pitchFamily="34" charset="0"/>
-                <a:ea typeface="Calibri" pitchFamily="34" charset="-122"/>
-                <a:cs typeface="Calibri" pitchFamily="34" charset="-120"/>
-              </a:rPr>
-              <a:t>– CK = 0: both AND gates output 0 and the latch cannot change state</a:t>
-            </a:r>
-            <a:endParaRPr lang="en-US" sz="2200" dirty="0"/>
-          </a:p>
-          <a:p>
-            <a:pPr indent="0" marL="0">
-              <a:spcAft>
-                <a:spcPts val="200"/>
-              </a:spcAft>
-              <a:buNone/>
-            </a:pPr>
-            <a:r>
-              <a:rPr lang="en-US" sz="1900" dirty="0">
-                <a:solidFill>
-                  <a:srgbClr val="5B6B78"/>
-                </a:solidFill>
-                <a:latin typeface="Calibri" pitchFamily="34" charset="0"/>
-                <a:ea typeface="Calibri" pitchFamily="34" charset="-122"/>
-                <a:cs typeface="Calibri" pitchFamily="34" charset="-120"/>
-              </a:rPr>
-              <a:t>– CK = 1: the latch is sensitive to S and R, exactly like the asynchronous one</a:t>
-            </a:r>
-            <a:endParaRPr lang="en-US" sz="2200" dirty="0"/>
-          </a:p>
-        </p:txBody>
-      </p:sp>
-      <p:sp>
-        <p:nvSpPr>
-          <p:cNvPr id="13" name="Shape 9"/>
+        </p:txBody>
+      </p:sp>
+      <p:sp>
+        <p:nvSpPr>
+          <p:cNvPr id="9" name="Shape 7"/>
           <p:cNvSpPr/>
           <p:nvPr/>
         </p:nvSpPr>
         <p:spPr>
           <a:xfrm>
-            <a:off x="548640" y="5596890"/>
+            <a:off x="548640" y="4408170"/>
             <a:ext cx="146304" cy="146304"/>
           </a:xfrm>
           <a:prstGeom prst="rect">
@@ -4185,14 +4111,14 @@
       </p:sp>
       <p:sp>
         <p:nvSpPr>
-          <p:cNvPr id="14" name="Text 10"/>
+          <p:cNvPr id="10" name="Text 8"/>
           <p:cNvSpPr txBox="1"/>
           <p:nvPr/>
         </p:nvSpPr>
         <p:spPr>
           <a:xfrm>
-            <a:off x="932688" y="5490464"/>
-            <a:ext cx="5285232" cy="681736"/>
+            <a:off x="932688" y="4301744"/>
+            <a:ext cx="6565392" cy="1022604"/>
           </a:xfrm>
           <a:prstGeom prst="rect">
             <a:avLst/>
@@ -4219,9 +4145,181 @@
                 <a:ea typeface="Calibri" pitchFamily="34" charset="-122"/>
                 <a:cs typeface="Calibri" pitchFamily="34" charset="-120"/>
               </a:rPr>
-              <a:t>The clock decides when the inputs are listened to</a:t>
+              <a:t>S and R are called excitation inputs; the designer must guarantee that they are never 1 together</a:t>
             </a:r>
             <a:endParaRPr lang="en-US" sz="2200" dirty="0"/>
+          </a:p>
+        </p:txBody>
+      </p:sp>
+      <p:sp>
+        <p:nvSpPr>
+          <p:cNvPr id="11" name="Shape 9"/>
+          <p:cNvSpPr/>
+          <p:nvPr/>
+        </p:nvSpPr>
+        <p:spPr>
+          <a:xfrm>
+            <a:off x="548640" y="5596890"/>
+            <a:ext cx="146304" cy="146304"/>
+          </a:xfrm>
+          <a:prstGeom prst="rect">
+            <a:avLst/>
+          </a:prstGeom>
+          <a:solidFill>
+            <a:srgbClr val="0E7C86"/>
+          </a:solidFill>
+          <a:ln w="12700">
+            <a:solidFill>
+              <a:srgbClr val="0E7C86"/>
+            </a:solidFill>
+            <a:prstDash val="solid"/>
+          </a:ln>
+        </p:spPr>
+      </p:sp>
+      <p:sp>
+        <p:nvSpPr>
+          <p:cNvPr id="12" name="Text 10"/>
+          <p:cNvSpPr txBox="1"/>
+          <p:nvPr/>
+        </p:nvSpPr>
+        <p:spPr>
+          <a:xfrm>
+            <a:off x="932688" y="5490464"/>
+            <a:ext cx="6565392" cy="681736"/>
+          </a:xfrm>
+          <a:prstGeom prst="rect">
+            <a:avLst/>
+          </a:prstGeom>
+          <a:noFill/>
+          <a:ln/>
+        </p:spPr>
+        <p:txBody>
+          <a:bodyPr wrap="square" lIns="0" tIns="0" rIns="0" bIns="0" rtlCol="0" anchor="t"/>
+          <a:lstStyle/>
+          <a:p>
+            <a:pPr indent="0" marL="0">
+              <a:spcAft>
+                <a:spcPts val="200"/>
+              </a:spcAft>
+              <a:buNone/>
+            </a:pPr>
+            <a:r>
+              <a:rPr lang="en-US" sz="2200" dirty="0">
+                <a:solidFill>
+                  <a:srgbClr val="1B2530"/>
+                </a:solidFill>
+                <a:latin typeface="Calibri" pitchFamily="34" charset="0"/>
+                <a:ea typeface="Calibri" pitchFamily="34" charset="-122"/>
+                <a:cs typeface="Calibri" pitchFamily="34" charset="-120"/>
+              </a:rPr>
+              <a:t>The JK and D elements exist to remove this problem</a:t>
+            </a:r>
+            <a:endParaRPr lang="en-US" sz="2200" dirty="0"/>
+          </a:p>
+        </p:txBody>
+      </p:sp>
+      <p:sp>
+        <p:nvSpPr>
+          <p:cNvPr id="13" name="Shape 11"/>
+          <p:cNvSpPr/>
+          <p:nvPr/>
+        </p:nvSpPr>
+        <p:spPr>
+          <a:xfrm>
+            <a:off x="7863840" y="1417320"/>
+            <a:ext cx="3779215" cy="4754880"/>
+          </a:xfrm>
+          <a:prstGeom prst="roundRect">
+            <a:avLst>
+              <a:gd name="adj" fmla="val 1936"/>
+            </a:avLst>
+          </a:prstGeom>
+          <a:solidFill>
+            <a:srgbClr val="1B2530"/>
+          </a:solidFill>
+          <a:ln w="12700">
+            <a:solidFill>
+              <a:srgbClr val="1B2530"/>
+            </a:solidFill>
+            <a:prstDash val="solid"/>
+          </a:ln>
+        </p:spPr>
+      </p:sp>
+      <p:sp>
+        <p:nvSpPr>
+          <p:cNvPr id="14" name="Text 12"/>
+          <p:cNvSpPr txBox="1"/>
+          <p:nvPr/>
+        </p:nvSpPr>
+        <p:spPr>
+          <a:xfrm>
+            <a:off x="8046720" y="2148840"/>
+            <a:ext cx="3413455" cy="1828800"/>
+          </a:xfrm>
+          <a:prstGeom prst="rect">
+            <a:avLst/>
+          </a:prstGeom>
+          <a:noFill/>
+          <a:ln/>
+        </p:spPr>
+        <p:txBody>
+          <a:bodyPr wrap="square" lIns="0" tIns="0" rIns="0" bIns="0" rtlCol="0" anchor="ctr"/>
+          <a:lstStyle/>
+          <a:p>
+            <a:pPr algn="ctr" indent="0" marL="0">
+              <a:buNone/>
+            </a:pPr>
+            <a:r>
+              <a:rPr lang="en-US" sz="5900" b="1" dirty="0">
+                <a:solidFill>
+                  <a:srgbClr val="FFFFFF"/>
+                </a:solidFill>
+                <a:latin typeface="Cambria" pitchFamily="34" charset="0"/>
+                <a:ea typeface="Cambria" pitchFamily="34" charset="-122"/>
+                <a:cs typeface="Cambria" pitchFamily="34" charset="-120"/>
+              </a:rPr>
+              <a:t>S . R = 0</a:t>
+            </a:r>
+            <a:endParaRPr lang="en-US" sz="5900" dirty="0"/>
+          </a:p>
+        </p:txBody>
+      </p:sp>
+      <p:sp>
+        <p:nvSpPr>
+          <p:cNvPr id="15" name="Text 13"/>
+          <p:cNvSpPr txBox="1"/>
+          <p:nvPr/>
+        </p:nvSpPr>
+        <p:spPr>
+          <a:xfrm>
+            <a:off x="8138160" y="4160520"/>
+            <a:ext cx="3230575" cy="1554480"/>
+          </a:xfrm>
+          <a:prstGeom prst="rect">
+            <a:avLst/>
+          </a:prstGeom>
+          <a:noFill/>
+          <a:ln/>
+        </p:spPr>
+        <p:txBody>
+          <a:bodyPr wrap="square" lIns="0" tIns="0" rIns="0" bIns="0" rtlCol="0" anchor="t"/>
+          <a:lstStyle/>
+          <a:p>
+            <a:pPr algn="ctr" indent="0" marL="0">
+              <a:buNone/>
+            </a:pPr>
+            <a:r>
+              <a:rPr lang="en-US" sz="1900" dirty="0">
+                <a:solidFill>
+                  <a:srgbClr val="CFE3EA"/>
+                </a:solidFill>
+                <a:latin typeface="Calibri" pitchFamily="34" charset="0"/>
+                <a:ea typeface="Calibri" pitchFamily="34" charset="-122"/>
+                <a:cs typeface="Calibri" pitchFamily="34" charset="-120"/>
+              </a:rPr>
+              <a:t>the condition every circuit that drives an SR latch must respect</a:t>
+            </a:r>
+            <a:endParaRPr lang="en-US" sz="1900" dirty="0"/>
           </a:p>
         </p:txBody>
       </p:sp>
@@ -4333,6 +4431,518 @@
                 <a:ea typeface="Cambria" pitchFamily="34" charset="-122"/>
                 <a:cs typeface="Cambria" pitchFamily="34" charset="-120"/>
               </a:rPr>
+              <a:t>Synchronous latches: adding a clock</a:t>
+            </a:r>
+            <a:endParaRPr lang="en-US" sz="3200" dirty="0"/>
+          </a:p>
+        </p:txBody>
+      </p:sp>
+      <p:sp>
+        <p:nvSpPr>
+          <p:cNvPr id="3" name="Shape 1"/>
+          <p:cNvSpPr/>
+          <p:nvPr/>
+        </p:nvSpPr>
+        <p:spPr>
+          <a:xfrm>
+            <a:off x="6492240" y="1417320"/>
+            <a:ext cx="5150815" cy="4754880"/>
+          </a:xfrm>
+          <a:prstGeom prst="roundRect">
+            <a:avLst>
+              <a:gd name="adj" fmla="val 1538"/>
+            </a:avLst>
+          </a:prstGeom>
+          <a:solidFill>
+            <a:srgbClr val="EEF2F4"/>
+          </a:solidFill>
+          <a:ln w="12700">
+            <a:solidFill>
+              <a:srgbClr val="EEF2F4"/>
+            </a:solidFill>
+            <a:prstDash val="solid"/>
+          </a:ln>
+        </p:spPr>
+      </p:sp>
+      <p:pic>
+        <p:nvPicPr>
+          <p:cNvPr id="5" name="Image 0" descr="preencoded.png">    </p:cNvPr>
+          <p:cNvPicPr>
+            <a:picLocks noChangeAspect="1"/>
+          </p:cNvPicPr>
+          <p:nvPr/>
+        </p:nvPicPr>
+        <p:blipFill>
+          <a:blip r:embed="rId1"/>
+          <a:stretch>
+            <a:fillRect/>
+          </a:stretch>
+        </p:blipFill>
+        <p:spPr>
+          <a:xfrm>
+            <a:off x="6629400" y="2370572"/>
+            <a:ext cx="4876495" cy="2208296"/>
+          </a:xfrm>
+          <a:prstGeom prst="rect">
+            <a:avLst/>
+          </a:prstGeom>
+        </p:spPr>
+      </p:pic>
+      <p:sp>
+        <p:nvSpPr>
+          <p:cNvPr id="6" name="Text 2"/>
+          <p:cNvSpPr txBox="1"/>
+          <p:nvPr/>
+        </p:nvSpPr>
+        <p:spPr>
+          <a:xfrm>
+            <a:off x="6629400" y="5349240"/>
+            <a:ext cx="4876495" cy="640080"/>
+          </a:xfrm>
+          <a:prstGeom prst="rect">
+            <a:avLst/>
+          </a:prstGeom>
+          <a:noFill/>
+          <a:ln/>
+        </p:spPr>
+        <p:txBody>
+          <a:bodyPr wrap="square" lIns="0" tIns="0" rIns="0" bIns="0" rtlCol="0" anchor="ctr"/>
+          <a:lstStyle/>
+          <a:p>
+            <a:pPr algn="ctr" indent="0" marL="0">
+              <a:buNone/>
+            </a:pPr>
+            <a:r>
+              <a:rPr lang="en-US" sz="1350" i="1" dirty="0">
+                <a:solidFill>
+                  <a:srgbClr val="5B6B78"/>
+                </a:solidFill>
+                <a:latin typeface="Calibri" pitchFamily="34" charset="0"/>
+                <a:ea typeface="Calibri" pitchFamily="34" charset="-122"/>
+                <a:cs typeface="Calibri" pitchFamily="34" charset="-120"/>
+              </a:rPr>
+              <a:t>A clocked SR latch: the excitation inputs pass through two AND gates controlled by CK</a:t>
+            </a:r>
+            <a:endParaRPr lang="en-US" sz="1350" dirty="0"/>
+          </a:p>
+        </p:txBody>
+      </p:sp>
+      <p:sp>
+        <p:nvSpPr>
+          <p:cNvPr id="7" name="Shape 3"/>
+          <p:cNvSpPr/>
+          <p:nvPr/>
+        </p:nvSpPr>
+        <p:spPr>
+          <a:xfrm>
+            <a:off x="548640" y="1523746"/>
+            <a:ext cx="146304" cy="146304"/>
+          </a:xfrm>
+          <a:prstGeom prst="rect">
+            <a:avLst/>
+          </a:prstGeom>
+          <a:solidFill>
+            <a:srgbClr val="0E7C86"/>
+          </a:solidFill>
+          <a:ln w="12700">
+            <a:solidFill>
+              <a:srgbClr val="0E7C86"/>
+            </a:solidFill>
+            <a:prstDash val="solid"/>
+          </a:ln>
+        </p:spPr>
+      </p:sp>
+      <p:sp>
+        <p:nvSpPr>
+          <p:cNvPr id="8" name="Text 4"/>
+          <p:cNvSpPr txBox="1"/>
+          <p:nvPr/>
+        </p:nvSpPr>
+        <p:spPr>
+          <a:xfrm>
+            <a:off x="932688" y="1417320"/>
+            <a:ext cx="5285232" cy="681736"/>
+          </a:xfrm>
+          <a:prstGeom prst="rect">
+            <a:avLst/>
+          </a:prstGeom>
+          <a:noFill/>
+          <a:ln/>
+        </p:spPr>
+        <p:txBody>
+          <a:bodyPr wrap="square" lIns="0" tIns="0" rIns="0" bIns="0" rtlCol="0" anchor="t"/>
+          <a:lstStyle/>
+          <a:p>
+            <a:pPr indent="0" marL="0">
+              <a:spcAft>
+                <a:spcPts val="200"/>
+              </a:spcAft>
+              <a:buNone/>
+            </a:pPr>
+            <a:r>
+              <a:rPr lang="en-US" sz="2200" dirty="0">
+                <a:solidFill>
+                  <a:srgbClr val="1B2530"/>
+                </a:solidFill>
+                <a:latin typeface="Calibri" pitchFamily="34" charset="0"/>
+                <a:ea typeface="Calibri" pitchFamily="34" charset="-122"/>
+                <a:cs typeface="Calibri" pitchFamily="34" charset="-120"/>
+              </a:rPr>
+              <a:t>Asynchronous systems: the outputs can change whenever an input changes</a:t>
+            </a:r>
+            <a:endParaRPr lang="en-US" sz="2200" dirty="0"/>
+          </a:p>
+        </p:txBody>
+      </p:sp>
+      <p:sp>
+        <p:nvSpPr>
+          <p:cNvPr id="9" name="Shape 5"/>
+          <p:cNvSpPr/>
+          <p:nvPr/>
+        </p:nvSpPr>
+        <p:spPr>
+          <a:xfrm>
+            <a:off x="548640" y="2350939"/>
+            <a:ext cx="146304" cy="146304"/>
+          </a:xfrm>
+          <a:prstGeom prst="rect">
+            <a:avLst/>
+          </a:prstGeom>
+          <a:solidFill>
+            <a:srgbClr val="C7791B"/>
+          </a:solidFill>
+          <a:ln w="12700">
+            <a:solidFill>
+              <a:srgbClr val="C7791B"/>
+            </a:solidFill>
+            <a:prstDash val="solid"/>
+          </a:ln>
+        </p:spPr>
+      </p:sp>
+      <p:sp>
+        <p:nvSpPr>
+          <p:cNvPr id="10" name="Text 6"/>
+          <p:cNvSpPr txBox="1"/>
+          <p:nvPr/>
+        </p:nvSpPr>
+        <p:spPr>
+          <a:xfrm>
+            <a:off x="932688" y="2244513"/>
+            <a:ext cx="5285232" cy="1022604"/>
+          </a:xfrm>
+          <a:prstGeom prst="rect">
+            <a:avLst/>
+          </a:prstGeom>
+          <a:noFill/>
+          <a:ln/>
+        </p:spPr>
+        <p:txBody>
+          <a:bodyPr wrap="square" lIns="0" tIns="0" rIns="0" bIns="0" rtlCol="0" anchor="t"/>
+          <a:lstStyle/>
+          <a:p>
+            <a:pPr indent="0" marL="0">
+              <a:spcAft>
+                <a:spcPts val="200"/>
+              </a:spcAft>
+              <a:buNone/>
+            </a:pPr>
+            <a:r>
+              <a:rPr lang="en-US" sz="2200" dirty="0">
+                <a:solidFill>
+                  <a:srgbClr val="1B2530"/>
+                </a:solidFill>
+                <a:latin typeface="Calibri" pitchFamily="34" charset="0"/>
+                <a:ea typeface="Calibri" pitchFamily="34" charset="-122"/>
+                <a:cs typeface="Calibri" pitchFamily="34" charset="-120"/>
+              </a:rPr>
+              <a:t>Synchronous systems: the instant at which the outputs can change is decided by the clock</a:t>
+            </a:r>
+            <a:endParaRPr lang="en-US" sz="2200" dirty="0"/>
+          </a:p>
+        </p:txBody>
+      </p:sp>
+      <p:sp>
+        <p:nvSpPr>
+          <p:cNvPr id="11" name="Shape 7"/>
+          <p:cNvSpPr/>
+          <p:nvPr/>
+        </p:nvSpPr>
+        <p:spPr>
+          <a:xfrm>
+            <a:off x="548640" y="3519001"/>
+            <a:ext cx="146304" cy="146304"/>
+          </a:xfrm>
+          <a:prstGeom prst="rect">
+            <a:avLst/>
+          </a:prstGeom>
+          <a:solidFill>
+            <a:srgbClr val="0E7C86"/>
+          </a:solidFill>
+          <a:ln w="12700">
+            <a:solidFill>
+              <a:srgbClr val="0E7C86"/>
+            </a:solidFill>
+            <a:prstDash val="solid"/>
+          </a:ln>
+        </p:spPr>
+      </p:sp>
+      <p:sp>
+        <p:nvSpPr>
+          <p:cNvPr id="12" name="Text 8"/>
+          <p:cNvSpPr txBox="1"/>
+          <p:nvPr/>
+        </p:nvSpPr>
+        <p:spPr>
+          <a:xfrm>
+            <a:off x="932688" y="3412575"/>
+            <a:ext cx="5285232" cy="1932432"/>
+          </a:xfrm>
+          <a:prstGeom prst="rect">
+            <a:avLst/>
+          </a:prstGeom>
+          <a:noFill/>
+          <a:ln/>
+        </p:spPr>
+        <p:txBody>
+          <a:bodyPr wrap="square" lIns="0" tIns="0" rIns="0" bIns="0" rtlCol="0" anchor="t"/>
+          <a:lstStyle/>
+          <a:p>
+            <a:pPr indent="0" marL="0">
+              <a:spcAft>
+                <a:spcPts val="200"/>
+              </a:spcAft>
+              <a:buNone/>
+            </a:pPr>
+            <a:r>
+              <a:rPr lang="en-US" sz="2200" dirty="0">
+                <a:solidFill>
+                  <a:srgbClr val="1B2530"/>
+                </a:solidFill>
+                <a:latin typeface="Calibri" pitchFamily="34" charset="0"/>
+                <a:ea typeface="Calibri" pitchFamily="34" charset="-122"/>
+                <a:cs typeface="Calibri" pitchFamily="34" charset="-120"/>
+              </a:rPr>
+              <a:t>In a synchronous SR latch, S and R are ANDed with the clock</a:t>
+            </a:r>
+            <a:endParaRPr lang="en-US" sz="2200" dirty="0"/>
+          </a:p>
+          <a:p>
+            <a:pPr indent="0" marL="0">
+              <a:spcAft>
+                <a:spcPts val="200"/>
+              </a:spcAft>
+              <a:buNone/>
+            </a:pPr>
+            <a:r>
+              <a:rPr lang="en-US" sz="1900" dirty="0">
+                <a:solidFill>
+                  <a:srgbClr val="5B6B78"/>
+                </a:solidFill>
+                <a:latin typeface="Calibri" pitchFamily="34" charset="0"/>
+                <a:ea typeface="Calibri" pitchFamily="34" charset="-122"/>
+                <a:cs typeface="Calibri" pitchFamily="34" charset="-120"/>
+              </a:rPr>
+              <a:t>– CK = 0: both AND gates output 0 and the latch cannot change state</a:t>
+            </a:r>
+            <a:endParaRPr lang="en-US" sz="2200" dirty="0"/>
+          </a:p>
+          <a:p>
+            <a:pPr indent="0" marL="0">
+              <a:spcAft>
+                <a:spcPts val="200"/>
+              </a:spcAft>
+              <a:buNone/>
+            </a:pPr>
+            <a:r>
+              <a:rPr lang="en-US" sz="1900" dirty="0">
+                <a:solidFill>
+                  <a:srgbClr val="5B6B78"/>
+                </a:solidFill>
+                <a:latin typeface="Calibri" pitchFamily="34" charset="0"/>
+                <a:ea typeface="Calibri" pitchFamily="34" charset="-122"/>
+                <a:cs typeface="Calibri" pitchFamily="34" charset="-120"/>
+              </a:rPr>
+              <a:t>– CK = 1: the latch is sensitive to S and R, exactly like the asynchronous one</a:t>
+            </a:r>
+            <a:endParaRPr lang="en-US" sz="2200" dirty="0"/>
+          </a:p>
+        </p:txBody>
+      </p:sp>
+      <p:sp>
+        <p:nvSpPr>
+          <p:cNvPr id="13" name="Shape 9"/>
+          <p:cNvSpPr/>
+          <p:nvPr/>
+        </p:nvSpPr>
+        <p:spPr>
+          <a:xfrm>
+            <a:off x="548640" y="5596890"/>
+            <a:ext cx="146304" cy="146304"/>
+          </a:xfrm>
+          <a:prstGeom prst="rect">
+            <a:avLst/>
+          </a:prstGeom>
+          <a:solidFill>
+            <a:srgbClr val="C7791B"/>
+          </a:solidFill>
+          <a:ln w="12700">
+            <a:solidFill>
+              <a:srgbClr val="C7791B"/>
+            </a:solidFill>
+            <a:prstDash val="solid"/>
+          </a:ln>
+        </p:spPr>
+      </p:sp>
+      <p:sp>
+        <p:nvSpPr>
+          <p:cNvPr id="14" name="Text 10"/>
+          <p:cNvSpPr txBox="1"/>
+          <p:nvPr/>
+        </p:nvSpPr>
+        <p:spPr>
+          <a:xfrm>
+            <a:off x="932688" y="5490464"/>
+            <a:ext cx="5285232" cy="681736"/>
+          </a:xfrm>
+          <a:prstGeom prst="rect">
+            <a:avLst/>
+          </a:prstGeom>
+          <a:noFill/>
+          <a:ln/>
+        </p:spPr>
+        <p:txBody>
+          <a:bodyPr wrap="square" lIns="0" tIns="0" rIns="0" bIns="0" rtlCol="0" anchor="t"/>
+          <a:lstStyle/>
+          <a:p>
+            <a:pPr indent="0" marL="0">
+              <a:spcAft>
+                <a:spcPts val="200"/>
+              </a:spcAft>
+              <a:buNone/>
+            </a:pPr>
+            <a:r>
+              <a:rPr lang="en-US" sz="2200" dirty="0">
+                <a:solidFill>
+                  <a:srgbClr val="1B2530"/>
+                </a:solidFill>
+                <a:latin typeface="Calibri" pitchFamily="34" charset="0"/>
+                <a:ea typeface="Calibri" pitchFamily="34" charset="-122"/>
+                <a:cs typeface="Calibri" pitchFamily="34" charset="-120"/>
+              </a:rPr>
+              <a:t>The clock decides when the inputs are listened to</a:t>
+            </a:r>
+            <a:endParaRPr lang="en-US" sz="2200" dirty="0"/>
+          </a:p>
+        </p:txBody>
+      </p:sp>
+      <p:sp>
+        <p:nvSpPr>
+          <p:cNvPr id="25" name="Slide Number Placeholder 0"/>
+          <p:cNvSpPr>
+            <a:spLocks noGrp="1"/>
+          </p:cNvSpPr>
+          <p:nvPr>
+            <p:ph type="sldNum" sz="quarter" idx="4294967295"/>
+          </p:nvPr>
+        </p:nvSpPr>
+        <p:spPr>
+          <a:xfrm>
+            <a:off x="11002975" y="6419088"/>
+            <a:ext cx="640080" cy="274320"/>
+          </a:xfrm>
+          <a:prstGeom prst="rect">
+            <a:avLst/>
+          </a:prstGeom>
+          <a:extLst>
+            <a:ext uri="{C572A759-6A51-4108-AA02-DFA0A04FC94B}">
+              <ma14:wrappingTextBoxFlag xmlns:ma14="http://schemas.microsoft.com/office/mac/drawingml/2011/main" val="0"/>
+            </a:ext>
+          </a:extLst>
+        </p:spPr>
+        <p:txBody>
+          <a:bodyPr/>
+          <a:lstStyle>
+            <a:lvl1pPr>
+              <a:defRPr sz="1000">
+                <a:solidFill>
+                  <a:srgbClr val="5B6B78"/>
+                </a:solidFill>
+                <a:latin typeface="Calibri"/>
+                <a:ea typeface="Calibri"/>
+                <a:cs typeface="Calibri"/>
+              </a:defRPr>
+            </a:lvl1pPr>
+          </a:lstStyle>
+          <a:p>
+            <a:pPr algn="r"/>
+            <a:fld id="{F7021451-1387-4CA6-816F-3879F97B5CBC}" type="slidenum">
+              <a:rPr b="0" lang="en-US"/>
+              <a:t>12</a:t>
+            </a:fld>
+            <a:endParaRPr lang="en-US"/>
+          </a:p>
+        </p:txBody>
+      </p:sp>
+    </p:spTree>
+  </p:cSld>
+  <p:clrMapOvr>
+    <a:masterClrMapping/>
+  </p:clrMapOvr>
+</p:sld>
+</file>
+
+<file path=ppt/slides/slide13.xml><?xml version="1.0" encoding="utf-8"?>
+<p:sld xmlns:a="http://schemas.openxmlformats.org/drawingml/2006/main" xmlns:r="http://schemas.openxmlformats.org/officeDocument/2006/relationships" xmlns:p="http://schemas.openxmlformats.org/presentationml/2006/main">
+  <p:cSld name="Slide 13">
+    <p:spTree>
+      <p:nvGrpSpPr>
+        <p:cNvPr id="1" name=""/>
+        <p:cNvGrpSpPr/>
+        <p:nvPr/>
+      </p:nvGrpSpPr>
+      <p:grpSpPr>
+        <a:xfrm>
+          <a:off x="0" y="0"/>
+          <a:ext cx="0" cy="0"/>
+          <a:chOff x="0" y="0"/>
+          <a:chExt cx="0" cy="0"/>
+        </a:xfrm>
+      </p:grpSpPr>
+      <p:sp>
+        <p:nvSpPr>
+          <p:cNvPr id="2" name="Text 1"/>
+          <p:cNvSpPr/>
+          <p:nvPr>
+            <p:ph idx="101" type="title" hasCustomPrompt="1"/>
+          </p:nvPr>
+        </p:nvSpPr>
+        <p:spPr>
+          <a:xfrm>
+            <a:off x="548640" y="365760"/>
+            <a:ext cx="11094415" cy="868680"/>
+          </a:xfrm>
+          <a:prstGeom prst="rect">
+            <a:avLst/>
+          </a:prstGeom>
+          <a:noFill/>
+          <a:ln/>
+        </p:spPr>
+        <p:txBody>
+          <a:bodyPr wrap="square" lIns="0" tIns="0" rIns="0" bIns="0" rtlCol="0" anchor="ctr"/>
+          <a:lstStyle/>
+          <a:p>
+            <a:pPr algn="l" indent="0" marL="0">
+              <a:buNone/>
+            </a:pPr>
+            <a:r>
+              <a:rPr lang="en-US" sz="3200" b="1" dirty="0">
+                <a:solidFill>
+                  <a:srgbClr val="2E4A62"/>
+                </a:solidFill>
+                <a:latin typeface="Cambria" pitchFamily="34" charset="0"/>
+                <a:ea typeface="Cambria" pitchFamily="34" charset="-122"/>
+                <a:cs typeface="Cambria" pitchFamily="34" charset="-120"/>
+              </a:rPr>
               <a:t>The JK and D latches</a:t>
             </a:r>
             <a:endParaRPr lang="en-US" sz="3200" dirty="0"/>
@@ -4341,7 +4951,7 @@
       </p:sp>
       <p:graphicFrame>
         <p:nvGraphicFramePr>
-          <p:cNvPr id="13" name="Table 0"/>
+          <p:cNvPr id="14" name="Table 0"/>
           <p:cNvGraphicFramePr>
             <a:graphicFrameLocks noGrp="1"/>
           </p:cNvGraphicFramePr>
@@ -5778,1021 +6388,6 @@
             <a:pPr algn="r"/>
             <a:fld id="{F7021451-1387-4CA6-816F-3879F97B5CBC}" type="slidenum">
               <a:rPr b="0" lang="en-US"/>
-              <a:t>12</a:t>
-            </a:fld>
-            <a:endParaRPr lang="en-US"/>
-          </a:p>
-        </p:txBody>
-      </p:sp>
-    </p:spTree>
-  </p:cSld>
-  <p:clrMapOvr>
-    <a:masterClrMapping/>
-  </p:clrMapOvr>
-</p:sld>
-</file>
-
-<file path=ppt/slides/slide13.xml><?xml version="1.0" encoding="utf-8"?>
-<p:sld xmlns:a="http://schemas.openxmlformats.org/drawingml/2006/main" xmlns:r="http://schemas.openxmlformats.org/officeDocument/2006/relationships" xmlns:p="http://schemas.openxmlformats.org/presentationml/2006/main">
-  <p:cSld name="Slide 13">
-    <p:spTree>
-      <p:nvGrpSpPr>
-        <p:cNvPr id="1" name=""/>
-        <p:cNvGrpSpPr/>
-        <p:nvPr/>
-      </p:nvGrpSpPr>
-      <p:grpSpPr>
-        <a:xfrm>
-          <a:off x="0" y="0"/>
-          <a:ext cx="0" cy="0"/>
-          <a:chOff x="0" y="0"/>
-          <a:chExt cx="0" cy="0"/>
-        </a:xfrm>
-      </p:grpSpPr>
-      <p:sp>
-        <p:nvSpPr>
-          <p:cNvPr id="2" name="Text 1"/>
-          <p:cNvSpPr/>
-          <p:nvPr>
-            <p:ph idx="101" type="title" hasCustomPrompt="1"/>
-          </p:nvPr>
-        </p:nvSpPr>
-        <p:spPr>
-          <a:xfrm>
-            <a:off x="548640" y="365760"/>
-            <a:ext cx="11094415" cy="868680"/>
-          </a:xfrm>
-          <a:prstGeom prst="rect">
-            <a:avLst/>
-          </a:prstGeom>
-          <a:noFill/>
-          <a:ln/>
-        </p:spPr>
-        <p:txBody>
-          <a:bodyPr wrap="square" lIns="0" tIns="0" rIns="0" bIns="0" rtlCol="0" anchor="ctr"/>
-          <a:lstStyle/>
-          <a:p>
-            <a:pPr algn="l" indent="0" marL="0">
-              <a:buNone/>
-            </a:pPr>
-            <a:r>
-              <a:rPr lang="en-US" sz="3200" b="1" dirty="0">
-                <a:solidFill>
-                  <a:srgbClr val="2E4A62"/>
-                </a:solidFill>
-                <a:latin typeface="Cambria" pitchFamily="34" charset="0"/>
-                <a:ea typeface="Cambria" pitchFamily="34" charset="-122"/>
-                <a:cs typeface="Cambria" pitchFamily="34" charset="-120"/>
-              </a:rPr>
-              <a:t>The master-slave flip-flop</a:t>
-            </a:r>
-            <a:endParaRPr lang="en-US" sz="3200" dirty="0"/>
-          </a:p>
-        </p:txBody>
-      </p:sp>
-      <p:sp>
-        <p:nvSpPr>
-          <p:cNvPr id="3" name="Text 1"/>
-          <p:cNvSpPr txBox="1"/>
-          <p:nvPr/>
-        </p:nvSpPr>
-        <p:spPr>
-          <a:xfrm>
-            <a:off x="1371600" y="1874520"/>
-            <a:ext cx="2011680" cy="1463040"/>
-          </a:xfrm>
-          <a:prstGeom prst="roundRect">
-            <a:avLst>
-              <a:gd name="adj" fmla="val 3750"/>
-            </a:avLst>
-          </a:prstGeom>
-          <a:solidFill>
-            <a:srgbClr val="0E7C86"/>
-          </a:solidFill>
-          <a:ln>
-            <a:solidFill>
-              <a:srgbClr val="0E7C86"/>
-            </a:solidFill>
-          </a:ln>
-        </p:spPr>
-        <p:txBody>
-          <a:bodyPr wrap="square" lIns="38100" tIns="38100" rIns="38100" bIns="38100" rtlCol="0" anchor="ctr"/>
-          <a:lstStyle/>
-          <a:p>
-            <a:pPr algn="ctr" indent="0" marL="0">
-              <a:buNone/>
-            </a:pPr>
-            <a:r>
-              <a:rPr lang="en-US" sz="1500" b="1" dirty="0">
-                <a:solidFill>
-                  <a:srgbClr val="FFFFFF"/>
-                </a:solidFill>
-                <a:latin typeface="Calibri" pitchFamily="34" charset="0"/>
-                <a:ea typeface="Calibri" pitchFamily="34" charset="-122"/>
-                <a:cs typeface="Calibri" pitchFamily="34" charset="-120"/>
-              </a:rPr>
-              <a:t>MASTER</a:t>
-            </a:r>
-            <a:endParaRPr lang="en-US" sz="1500" dirty="0"/>
-          </a:p>
-          <a:p>
-            <a:pPr algn="ctr" indent="0" marL="0">
-              <a:buNone/>
-            </a:pPr>
-            <a:r>
-              <a:rPr lang="en-US" sz="1500" b="1" dirty="0">
-                <a:solidFill>
-                  <a:srgbClr val="FFFFFF"/>
-                </a:solidFill>
-                <a:latin typeface="Calibri" pitchFamily="34" charset="0"/>
-                <a:ea typeface="Calibri" pitchFamily="34" charset="-122"/>
-                <a:cs typeface="Calibri" pitchFamily="34" charset="-120"/>
-              </a:rPr>
-              <a:t>D latch</a:t>
-            </a:r>
-            <a:endParaRPr lang="en-US" sz="1500" dirty="0"/>
-          </a:p>
-          <a:p>
-            <a:pPr algn="ctr" indent="0" marL="0">
-              <a:buNone/>
-            </a:pPr>
-            <a:r>
-              <a:rPr lang="en-US" sz="1500" b="1" dirty="0">
-                <a:solidFill>
-                  <a:srgbClr val="FFFFFF"/>
-                </a:solidFill>
-                <a:latin typeface="Calibri" pitchFamily="34" charset="0"/>
-                <a:ea typeface="Calibri" pitchFamily="34" charset="-122"/>
-                <a:cs typeface="Calibri" pitchFamily="34" charset="-120"/>
-              </a:rPr>
-              <a:t>active when CK = 0</a:t>
-            </a:r>
-            <a:endParaRPr lang="en-US" sz="1500" dirty="0"/>
-          </a:p>
-        </p:txBody>
-      </p:sp>
-      <p:sp>
-        <p:nvSpPr>
-          <p:cNvPr id="4" name="Text 2"/>
-          <p:cNvSpPr txBox="1"/>
-          <p:nvPr/>
-        </p:nvSpPr>
-        <p:spPr>
-          <a:xfrm>
-            <a:off x="4389120" y="1874520"/>
-            <a:ext cx="2011680" cy="1463040"/>
-          </a:xfrm>
-          <a:prstGeom prst="roundRect">
-            <a:avLst>
-              <a:gd name="adj" fmla="val 3750"/>
-            </a:avLst>
-          </a:prstGeom>
-          <a:solidFill>
-            <a:srgbClr val="C7791B"/>
-          </a:solidFill>
-          <a:ln>
-            <a:solidFill>
-              <a:srgbClr val="C7791B"/>
-            </a:solidFill>
-          </a:ln>
-        </p:spPr>
-        <p:txBody>
-          <a:bodyPr wrap="square" lIns="38100" tIns="38100" rIns="38100" bIns="38100" rtlCol="0" anchor="ctr"/>
-          <a:lstStyle/>
-          <a:p>
-            <a:pPr algn="ctr" indent="0" marL="0">
-              <a:buNone/>
-            </a:pPr>
-            <a:r>
-              <a:rPr lang="en-US" sz="1500" b="1" dirty="0">
-                <a:solidFill>
-                  <a:srgbClr val="FFFFFF"/>
-                </a:solidFill>
-                <a:latin typeface="Calibri" pitchFamily="34" charset="0"/>
-                <a:ea typeface="Calibri" pitchFamily="34" charset="-122"/>
-                <a:cs typeface="Calibri" pitchFamily="34" charset="-120"/>
-              </a:rPr>
-              <a:t>SLAVE</a:t>
-            </a:r>
-            <a:endParaRPr lang="en-US" sz="1500" dirty="0"/>
-          </a:p>
-          <a:p>
-            <a:pPr algn="ctr" indent="0" marL="0">
-              <a:buNone/>
-            </a:pPr>
-            <a:r>
-              <a:rPr lang="en-US" sz="1500" b="1" dirty="0">
-                <a:solidFill>
-                  <a:srgbClr val="FFFFFF"/>
-                </a:solidFill>
-                <a:latin typeface="Calibri" pitchFamily="34" charset="0"/>
-                <a:ea typeface="Calibri" pitchFamily="34" charset="-122"/>
-                <a:cs typeface="Calibri" pitchFamily="34" charset="-120"/>
-              </a:rPr>
-              <a:t>D latch</a:t>
-            </a:r>
-            <a:endParaRPr lang="en-US" sz="1500" dirty="0"/>
-          </a:p>
-          <a:p>
-            <a:pPr algn="ctr" indent="0" marL="0">
-              <a:buNone/>
-            </a:pPr>
-            <a:r>
-              <a:rPr lang="en-US" sz="1500" b="1" dirty="0">
-                <a:solidFill>
-                  <a:srgbClr val="FFFFFF"/>
-                </a:solidFill>
-                <a:latin typeface="Calibri" pitchFamily="34" charset="0"/>
-                <a:ea typeface="Calibri" pitchFamily="34" charset="-122"/>
-                <a:cs typeface="Calibri" pitchFamily="34" charset="-120"/>
-              </a:rPr>
-              <a:t>active when CK = 1</a:t>
-            </a:r>
-            <a:endParaRPr lang="en-US" sz="1500" dirty="0"/>
-          </a:p>
-        </p:txBody>
-      </p:sp>
-      <p:sp>
-        <p:nvSpPr>
-          <p:cNvPr id="5" name="Shape 3"/>
-          <p:cNvSpPr/>
-          <p:nvPr/>
-        </p:nvSpPr>
-        <p:spPr>
-          <a:xfrm>
-            <a:off x="640080" y="2331720"/>
-            <a:ext cx="704088" cy="0"/>
-          </a:xfrm>
-          <a:prstGeom prst="line">
-            <a:avLst/>
-          </a:prstGeom>
-          <a:noFill/>
-          <a:ln w="28575">
-            <a:solidFill>
-              <a:srgbClr val="5B6B78"/>
-            </a:solidFill>
-            <a:prstDash val="solid"/>
-            <a:tailEnd type="triangle"/>
-          </a:ln>
-        </p:spPr>
-      </p:sp>
-      <p:sp>
-        <p:nvSpPr>
-          <p:cNvPr id="6" name="Text 4"/>
-          <p:cNvSpPr txBox="1"/>
-          <p:nvPr/>
-        </p:nvSpPr>
-        <p:spPr>
-          <a:xfrm>
-            <a:off x="640080" y="1965960"/>
-            <a:ext cx="457200" cy="274320"/>
-          </a:xfrm>
-          <a:prstGeom prst="rect">
-            <a:avLst/>
-          </a:prstGeom>
-          <a:noFill/>
-          <a:ln/>
-        </p:spPr>
-        <p:txBody>
-          <a:bodyPr wrap="square" lIns="0" tIns="0" rIns="0" bIns="0" rtlCol="0" anchor="t"/>
-          <a:lstStyle/>
-          <a:p>
-            <a:pPr indent="0" marL="0">
-              <a:buNone/>
-            </a:pPr>
-            <a:r>
-              <a:rPr lang="en-US" sz="1700" b="1" dirty="0">
-                <a:solidFill>
-                  <a:srgbClr val="1B2530"/>
-                </a:solidFill>
-                <a:latin typeface="Courier New" pitchFamily="34" charset="0"/>
-                <a:ea typeface="Courier New" pitchFamily="34" charset="-122"/>
-                <a:cs typeface="Courier New" pitchFamily="34" charset="-120"/>
-              </a:rPr>
-              <a:t>D</a:t>
-            </a:r>
-            <a:endParaRPr lang="en-US" sz="1700" dirty="0"/>
-          </a:p>
-        </p:txBody>
-      </p:sp>
-      <p:sp>
-        <p:nvSpPr>
-          <p:cNvPr id="7" name="Shape 5"/>
-          <p:cNvSpPr/>
-          <p:nvPr/>
-        </p:nvSpPr>
-        <p:spPr>
-          <a:xfrm>
-            <a:off x="3410712" y="2331720"/>
-            <a:ext cx="950976" cy="0"/>
-          </a:xfrm>
-          <a:prstGeom prst="line">
-            <a:avLst/>
-          </a:prstGeom>
-          <a:noFill/>
-          <a:ln w="28575">
-            <a:solidFill>
-              <a:srgbClr val="5B6B78"/>
-            </a:solidFill>
-            <a:prstDash val="solid"/>
-            <a:tailEnd type="triangle"/>
-          </a:ln>
-        </p:spPr>
-      </p:sp>
-      <p:sp>
-        <p:nvSpPr>
-          <p:cNvPr id="8" name="Text 6"/>
-          <p:cNvSpPr txBox="1"/>
-          <p:nvPr/>
-        </p:nvSpPr>
-        <p:spPr>
-          <a:xfrm>
-            <a:off x="3566160" y="1965960"/>
-            <a:ext cx="640080" cy="274320"/>
-          </a:xfrm>
-          <a:prstGeom prst="rect">
-            <a:avLst/>
-          </a:prstGeom>
-          <a:noFill/>
-          <a:ln/>
-        </p:spPr>
-        <p:txBody>
-          <a:bodyPr wrap="square" lIns="0" tIns="0" rIns="0" bIns="0" rtlCol="0" anchor="t"/>
-          <a:lstStyle/>
-          <a:p>
-            <a:pPr indent="0" marL="0">
-              <a:buNone/>
-            </a:pPr>
-            <a:r>
-              <a:rPr lang="en-US" sz="1500" b="1" dirty="0">
-                <a:solidFill>
-                  <a:srgbClr val="1B2530"/>
-                </a:solidFill>
-                <a:latin typeface="Courier New" pitchFamily="34" charset="0"/>
-                <a:ea typeface="Courier New" pitchFamily="34" charset="-122"/>
-                <a:cs typeface="Courier New" pitchFamily="34" charset="-120"/>
-              </a:rPr>
-              <a:t>Qm</a:t>
-            </a:r>
-            <a:endParaRPr lang="en-US" sz="1500" dirty="0"/>
-          </a:p>
-        </p:txBody>
-      </p:sp>
-      <p:sp>
-        <p:nvSpPr>
-          <p:cNvPr id="9" name="Shape 7"/>
-          <p:cNvSpPr/>
-          <p:nvPr/>
-        </p:nvSpPr>
-        <p:spPr>
-          <a:xfrm>
-            <a:off x="6428232" y="2331720"/>
-            <a:ext cx="658368" cy="0"/>
-          </a:xfrm>
-          <a:prstGeom prst="line">
-            <a:avLst/>
-          </a:prstGeom>
-          <a:noFill/>
-          <a:ln w="28575">
-            <a:solidFill>
-              <a:srgbClr val="5B6B78"/>
-            </a:solidFill>
-            <a:prstDash val="solid"/>
-            <a:tailEnd type="triangle"/>
-          </a:ln>
-        </p:spPr>
-      </p:sp>
-      <p:sp>
-        <p:nvSpPr>
-          <p:cNvPr id="10" name="Text 8"/>
-          <p:cNvSpPr txBox="1"/>
-          <p:nvPr/>
-        </p:nvSpPr>
-        <p:spPr>
-          <a:xfrm>
-            <a:off x="6629400" y="1965960"/>
-            <a:ext cx="457200" cy="274320"/>
-          </a:xfrm>
-          <a:prstGeom prst="rect">
-            <a:avLst/>
-          </a:prstGeom>
-          <a:noFill/>
-          <a:ln/>
-        </p:spPr>
-        <p:txBody>
-          <a:bodyPr wrap="square" lIns="0" tIns="0" rIns="0" bIns="0" rtlCol="0" anchor="t"/>
-          <a:lstStyle/>
-          <a:p>
-            <a:pPr indent="0" marL="0">
-              <a:buNone/>
-            </a:pPr>
-            <a:r>
-              <a:rPr lang="en-US" sz="1700" b="1" dirty="0">
-                <a:solidFill>
-                  <a:srgbClr val="1B2530"/>
-                </a:solidFill>
-                <a:latin typeface="Courier New" pitchFamily="34" charset="0"/>
-                <a:ea typeface="Courier New" pitchFamily="34" charset="-122"/>
-                <a:cs typeface="Courier New" pitchFamily="34" charset="-120"/>
-              </a:rPr>
-              <a:t>Q</a:t>
-            </a:r>
-            <a:endParaRPr lang="en-US" sz="1700" dirty="0"/>
-          </a:p>
-        </p:txBody>
-      </p:sp>
-      <p:sp>
-        <p:nvSpPr>
-          <p:cNvPr id="11" name="Shape 9"/>
-          <p:cNvSpPr/>
-          <p:nvPr/>
-        </p:nvSpPr>
-        <p:spPr>
-          <a:xfrm>
-            <a:off x="822960" y="4069080"/>
-            <a:ext cx="4572000" cy="0"/>
-          </a:xfrm>
-          <a:prstGeom prst="line">
-            <a:avLst/>
-          </a:prstGeom>
-          <a:noFill/>
-          <a:ln w="28575">
-            <a:solidFill>
-              <a:srgbClr val="B23A48"/>
-            </a:solidFill>
-            <a:prstDash val="solid"/>
-          </a:ln>
-        </p:spPr>
-      </p:sp>
-      <p:sp>
-        <p:nvSpPr>
-          <p:cNvPr id="12" name="Text 10"/>
-          <p:cNvSpPr txBox="1"/>
-          <p:nvPr/>
-        </p:nvSpPr>
-        <p:spPr>
-          <a:xfrm>
-            <a:off x="822960" y="4114800"/>
-            <a:ext cx="640080" cy="274320"/>
-          </a:xfrm>
-          <a:prstGeom prst="rect">
-            <a:avLst/>
-          </a:prstGeom>
-          <a:noFill/>
-          <a:ln/>
-        </p:spPr>
-        <p:txBody>
-          <a:bodyPr wrap="square" lIns="0" tIns="0" rIns="0" bIns="0" rtlCol="0" anchor="t"/>
-          <a:lstStyle/>
-          <a:p>
-            <a:pPr indent="0" marL="0">
-              <a:buNone/>
-            </a:pPr>
-            <a:r>
-              <a:rPr lang="en-US" sz="1500" b="1" dirty="0">
-                <a:solidFill>
-                  <a:srgbClr val="B23A48"/>
-                </a:solidFill>
-                <a:latin typeface="Courier New" pitchFamily="34" charset="0"/>
-                <a:ea typeface="Courier New" pitchFamily="34" charset="-122"/>
-                <a:cs typeface="Courier New" pitchFamily="34" charset="-120"/>
-              </a:rPr>
-              <a:t>CK</a:t>
-            </a:r>
-            <a:endParaRPr lang="en-US" sz="1500" dirty="0"/>
-          </a:p>
-        </p:txBody>
-      </p:sp>
-      <p:sp>
-        <p:nvSpPr>
-          <p:cNvPr id="13" name="Shape 11"/>
-          <p:cNvSpPr/>
-          <p:nvPr/>
-        </p:nvSpPr>
-        <p:spPr>
-          <a:xfrm flipV="1">
-            <a:off x="2377440" y="3364992"/>
-            <a:ext cx="0" cy="704088"/>
-          </a:xfrm>
-          <a:prstGeom prst="line">
-            <a:avLst/>
-          </a:prstGeom>
-          <a:noFill/>
-          <a:ln w="28575">
-            <a:solidFill>
-              <a:srgbClr val="B23A48"/>
-            </a:solidFill>
-            <a:prstDash val="solid"/>
-            <a:tailEnd type="triangle"/>
-          </a:ln>
-        </p:spPr>
-      </p:sp>
-      <p:sp>
-        <p:nvSpPr>
-          <p:cNvPr id="14" name="Shape 12"/>
-          <p:cNvSpPr/>
-          <p:nvPr/>
-        </p:nvSpPr>
-        <p:spPr>
-          <a:xfrm flipV="1">
-            <a:off x="5394960" y="3364992"/>
-            <a:ext cx="0" cy="704088"/>
-          </a:xfrm>
-          <a:prstGeom prst="line">
-            <a:avLst/>
-          </a:prstGeom>
-          <a:noFill/>
-          <a:ln w="28575">
-            <a:solidFill>
-              <a:srgbClr val="B23A48"/>
-            </a:solidFill>
-            <a:prstDash val="solid"/>
-            <a:tailEnd type="triangle"/>
-          </a:ln>
-        </p:spPr>
-      </p:sp>
-      <p:sp>
-        <p:nvSpPr>
-          <p:cNvPr id="15" name="Text 13"/>
-          <p:cNvSpPr txBox="1"/>
-          <p:nvPr/>
-        </p:nvSpPr>
-        <p:spPr>
-          <a:xfrm>
-            <a:off x="2468880" y="3520440"/>
-            <a:ext cx="1097280" cy="274320"/>
-          </a:xfrm>
-          <a:prstGeom prst="rect">
-            <a:avLst/>
-          </a:prstGeom>
-          <a:noFill/>
-          <a:ln/>
-        </p:spPr>
-        <p:txBody>
-          <a:bodyPr wrap="square" lIns="0" tIns="0" rIns="0" bIns="0" rtlCol="0" anchor="t"/>
-          <a:lstStyle/>
-          <a:p>
-            <a:pPr indent="0" marL="0">
-              <a:buNone/>
-            </a:pPr>
-            <a:r>
-              <a:rPr lang="en-US" sz="1250" i="1" dirty="0">
-                <a:solidFill>
-                  <a:srgbClr val="B23A48"/>
-                </a:solidFill>
-                <a:latin typeface="Calibri" pitchFamily="34" charset="0"/>
-                <a:ea typeface="Calibri" pitchFamily="34" charset="-122"/>
-                <a:cs typeface="Calibri" pitchFamily="34" charset="-120"/>
-              </a:rPr>
-              <a:t>inverted</a:t>
-            </a:r>
-            <a:endParaRPr lang="en-US" sz="1250" dirty="0"/>
-          </a:p>
-        </p:txBody>
-      </p:sp>
-      <p:sp>
-        <p:nvSpPr>
-          <p:cNvPr id="16" name="Shape 14"/>
-          <p:cNvSpPr/>
-          <p:nvPr/>
-        </p:nvSpPr>
-        <p:spPr>
-          <a:xfrm>
-            <a:off x="7589520" y="1492758"/>
-            <a:ext cx="146304" cy="146304"/>
-          </a:xfrm>
-          <a:prstGeom prst="rect">
-            <a:avLst/>
-          </a:prstGeom>
-          <a:solidFill>
-            <a:srgbClr val="0E7C86"/>
-          </a:solidFill>
-          <a:ln w="12700">
-            <a:solidFill>
-              <a:srgbClr val="0E7C86"/>
-            </a:solidFill>
-            <a:prstDash val="solid"/>
-          </a:ln>
-        </p:spPr>
-      </p:sp>
-      <p:sp>
-        <p:nvSpPr>
-          <p:cNvPr id="17" name="Text 15"/>
-          <p:cNvSpPr txBox="1"/>
-          <p:nvPr/>
-        </p:nvSpPr>
-        <p:spPr>
-          <a:xfrm>
-            <a:off x="7973568" y="1417320"/>
-            <a:ext cx="3669487" cy="836676"/>
-          </a:xfrm>
-          <a:prstGeom prst="rect">
-            <a:avLst/>
-          </a:prstGeom>
-          <a:noFill/>
-          <a:ln/>
-        </p:spPr>
-        <p:txBody>
-          <a:bodyPr wrap="square" lIns="0" tIns="0" rIns="0" bIns="0" rtlCol="0" anchor="t"/>
-          <a:lstStyle/>
-          <a:p>
-            <a:pPr indent="0" marL="0">
-              <a:spcAft>
-                <a:spcPts val="200"/>
-              </a:spcAft>
-              <a:buNone/>
-            </a:pPr>
-            <a:r>
-              <a:rPr lang="en-US" sz="1800" dirty="0">
-                <a:solidFill>
-                  <a:srgbClr val="1B2530"/>
-                </a:solidFill>
-                <a:latin typeface="Calibri" pitchFamily="34" charset="0"/>
-                <a:ea typeface="Calibri" pitchFamily="34" charset="-122"/>
-                <a:cs typeface="Calibri" pitchFamily="34" charset="-120"/>
-              </a:rPr>
-              <a:t>Two latches in series, controlled by opposite levels of the clock</a:t>
-            </a:r>
-            <a:endParaRPr lang="en-US" sz="1800" dirty="0"/>
-          </a:p>
-        </p:txBody>
-      </p:sp>
-      <p:sp>
-        <p:nvSpPr>
-          <p:cNvPr id="18" name="Shape 16"/>
-          <p:cNvSpPr/>
-          <p:nvPr/>
-        </p:nvSpPr>
-        <p:spPr>
-          <a:xfrm>
-            <a:off x="7589520" y="2472309"/>
-            <a:ext cx="146304" cy="146304"/>
-          </a:xfrm>
-          <a:prstGeom prst="rect">
-            <a:avLst/>
-          </a:prstGeom>
-          <a:solidFill>
-            <a:srgbClr val="C7791B"/>
-          </a:solidFill>
-          <a:ln w="12700">
-            <a:solidFill>
-              <a:srgbClr val="C7791B"/>
-            </a:solidFill>
-            <a:prstDash val="solid"/>
-          </a:ln>
-        </p:spPr>
-      </p:sp>
-      <p:sp>
-        <p:nvSpPr>
-          <p:cNvPr id="19" name="Text 17"/>
-          <p:cNvSpPr txBox="1"/>
-          <p:nvPr/>
-        </p:nvSpPr>
-        <p:spPr>
-          <a:xfrm>
-            <a:off x="7973568" y="2396871"/>
-            <a:ext cx="3669487" cy="557784"/>
-          </a:xfrm>
-          <a:prstGeom prst="rect">
-            <a:avLst/>
-          </a:prstGeom>
-          <a:noFill/>
-          <a:ln/>
-        </p:spPr>
-        <p:txBody>
-          <a:bodyPr wrap="square" lIns="0" tIns="0" rIns="0" bIns="0" rtlCol="0" anchor="t"/>
-          <a:lstStyle/>
-          <a:p>
-            <a:pPr indent="0" marL="0">
-              <a:spcAft>
-                <a:spcPts val="200"/>
-              </a:spcAft>
-              <a:buNone/>
-            </a:pPr>
-            <a:r>
-              <a:rPr lang="en-US" sz="1800" dirty="0">
-                <a:solidFill>
-                  <a:srgbClr val="1B2530"/>
-                </a:solidFill>
-                <a:latin typeface="Calibri" pitchFamily="34" charset="0"/>
-                <a:ea typeface="Calibri" pitchFamily="34" charset="-122"/>
-                <a:cs typeface="Calibri" pitchFamily="34" charset="-120"/>
-              </a:rPr>
-              <a:t>The master receives the inputs; the slave produces the outputs</a:t>
-            </a:r>
-            <a:endParaRPr lang="en-US" sz="1800" dirty="0"/>
-          </a:p>
-        </p:txBody>
-      </p:sp>
-      <p:sp>
-        <p:nvSpPr>
-          <p:cNvPr id="20" name="Shape 18"/>
-          <p:cNvSpPr/>
-          <p:nvPr/>
-        </p:nvSpPr>
-        <p:spPr>
-          <a:xfrm>
-            <a:off x="7589520" y="3172968"/>
-            <a:ext cx="146304" cy="146304"/>
-          </a:xfrm>
-          <a:prstGeom prst="rect">
-            <a:avLst/>
-          </a:prstGeom>
-          <a:solidFill>
-            <a:srgbClr val="0E7C86"/>
-          </a:solidFill>
-          <a:ln w="12700">
-            <a:solidFill>
-              <a:srgbClr val="0E7C86"/>
-            </a:solidFill>
-            <a:prstDash val="solid"/>
-          </a:ln>
-        </p:spPr>
-      </p:sp>
-      <p:sp>
-        <p:nvSpPr>
-          <p:cNvPr id="21" name="Text 19"/>
-          <p:cNvSpPr txBox="1"/>
-          <p:nvPr/>
-        </p:nvSpPr>
-        <p:spPr>
-          <a:xfrm>
-            <a:off x="7973568" y="3097530"/>
-            <a:ext cx="3669487" cy="1115568"/>
-          </a:xfrm>
-          <a:prstGeom prst="rect">
-            <a:avLst/>
-          </a:prstGeom>
-          <a:noFill/>
-          <a:ln/>
-        </p:spPr>
-        <p:txBody>
-          <a:bodyPr wrap="square" lIns="0" tIns="0" rIns="0" bIns="0" rtlCol="0" anchor="t"/>
-          <a:lstStyle/>
-          <a:p>
-            <a:pPr indent="0" marL="0">
-              <a:spcAft>
-                <a:spcPts val="200"/>
-              </a:spcAft>
-              <a:buNone/>
-            </a:pPr>
-            <a:r>
-              <a:rPr lang="en-US" sz="1800" dirty="0">
-                <a:solidFill>
-                  <a:srgbClr val="1B2530"/>
-                </a:solidFill>
-                <a:latin typeface="Calibri" pitchFamily="34" charset="0"/>
-                <a:ea typeface="Calibri" pitchFamily="34" charset="-122"/>
-                <a:cs typeface="Calibri" pitchFamily="34" charset="-120"/>
-              </a:rPr>
-              <a:t>They are never transparent at the same time: the input can never run straight through to the output</a:t>
-            </a:r>
-            <a:endParaRPr lang="en-US" sz="1800" dirty="0"/>
-          </a:p>
-        </p:txBody>
-      </p:sp>
-      <p:sp>
-        <p:nvSpPr>
-          <p:cNvPr id="22" name="Shape 20"/>
-          <p:cNvSpPr/>
-          <p:nvPr/>
-        </p:nvSpPr>
-        <p:spPr>
-          <a:xfrm>
-            <a:off x="7589520" y="4431411"/>
-            <a:ext cx="146304" cy="146304"/>
-          </a:xfrm>
-          <a:prstGeom prst="rect">
-            <a:avLst/>
-          </a:prstGeom>
-          <a:solidFill>
-            <a:srgbClr val="C7791B"/>
-          </a:solidFill>
-          <a:ln w="12700">
-            <a:solidFill>
-              <a:srgbClr val="C7791B"/>
-            </a:solidFill>
-            <a:prstDash val="solid"/>
-          </a:ln>
-        </p:spPr>
-      </p:sp>
-      <p:sp>
-        <p:nvSpPr>
-          <p:cNvPr id="23" name="Text 21"/>
-          <p:cNvSpPr txBox="1"/>
-          <p:nvPr/>
-        </p:nvSpPr>
-        <p:spPr>
-          <a:xfrm>
-            <a:off x="7973568" y="4355973"/>
-            <a:ext cx="3669487" cy="836676"/>
-          </a:xfrm>
-          <a:prstGeom prst="rect">
-            <a:avLst/>
-          </a:prstGeom>
-          <a:noFill/>
-          <a:ln/>
-        </p:spPr>
-        <p:txBody>
-          <a:bodyPr wrap="square" lIns="0" tIns="0" rIns="0" bIns="0" rtlCol="0" anchor="t"/>
-          <a:lstStyle/>
-          <a:p>
-            <a:pPr indent="0" marL="0">
-              <a:spcAft>
-                <a:spcPts val="200"/>
-              </a:spcAft>
-              <a:buNone/>
-            </a:pPr>
-            <a:r>
-              <a:rPr lang="en-US" sz="1800" dirty="0">
-                <a:solidFill>
-                  <a:srgbClr val="1B2530"/>
-                </a:solidFill>
-                <a:latin typeface="Calibri" pitchFamily="34" charset="0"/>
-                <a:ea typeface="Calibri" pitchFamily="34" charset="-122"/>
-                <a:cs typeface="Calibri" pitchFamily="34" charset="-120"/>
-              </a:rPr>
-              <a:t>The output changes only when the clock passes from 0 to 1: on the edge</a:t>
-            </a:r>
-            <a:endParaRPr lang="en-US" sz="1800" dirty="0"/>
-          </a:p>
-        </p:txBody>
-      </p:sp>
-      <p:sp>
-        <p:nvSpPr>
-          <p:cNvPr id="24" name="Shape 22"/>
-          <p:cNvSpPr/>
-          <p:nvPr/>
-        </p:nvSpPr>
-        <p:spPr>
-          <a:xfrm>
-            <a:off x="7589520" y="5410962"/>
-            <a:ext cx="146304" cy="146304"/>
-          </a:xfrm>
-          <a:prstGeom prst="rect">
-            <a:avLst/>
-          </a:prstGeom>
-          <a:solidFill>
-            <a:srgbClr val="0E7C86"/>
-          </a:solidFill>
-          <a:ln w="12700">
-            <a:solidFill>
-              <a:srgbClr val="0E7C86"/>
-            </a:solidFill>
-            <a:prstDash val="solid"/>
-          </a:ln>
-        </p:spPr>
-      </p:sp>
-      <p:sp>
-        <p:nvSpPr>
-          <p:cNvPr id="25" name="Text 23"/>
-          <p:cNvSpPr txBox="1"/>
-          <p:nvPr/>
-        </p:nvSpPr>
-        <p:spPr>
-          <a:xfrm>
-            <a:off x="7973568" y="5335524"/>
-            <a:ext cx="3669487" cy="836676"/>
-          </a:xfrm>
-          <a:prstGeom prst="rect">
-            <a:avLst/>
-          </a:prstGeom>
-          <a:noFill/>
-          <a:ln/>
-        </p:spPr>
-        <p:txBody>
-          <a:bodyPr wrap="square" lIns="0" tIns="0" rIns="0" bIns="0" rtlCol="0" anchor="t"/>
-          <a:lstStyle/>
-          <a:p>
-            <a:pPr indent="0" marL="0">
-              <a:spcAft>
-                <a:spcPts val="200"/>
-              </a:spcAft>
-              <a:buNone/>
-            </a:pPr>
-            <a:r>
-              <a:rPr lang="en-US" sz="1800" dirty="0">
-                <a:solidFill>
-                  <a:srgbClr val="1B2530"/>
-                </a:solidFill>
-                <a:latin typeface="Calibri" pitchFamily="34" charset="0"/>
-                <a:ea typeface="Calibri" pitchFamily="34" charset="-122"/>
-                <a:cs typeface="Calibri" pitchFamily="34" charset="-120"/>
-              </a:rPr>
-              <a:t>A flip-flop is edge-triggered: one operation per clock cycle, and no fluctuation of the output</a:t>
-            </a:r>
-            <a:endParaRPr lang="en-US" sz="1800" dirty="0"/>
-          </a:p>
-        </p:txBody>
-      </p:sp>
-      <p:sp>
-        <p:nvSpPr>
-          <p:cNvPr id="26" name="Shape 24"/>
-          <p:cNvSpPr/>
-          <p:nvPr/>
-        </p:nvSpPr>
-        <p:spPr>
-          <a:xfrm>
-            <a:off x="548640" y="5257800"/>
-            <a:ext cx="6675120" cy="914400"/>
-          </a:xfrm>
-          <a:prstGeom prst="roundRect">
-            <a:avLst>
-              <a:gd name="adj" fmla="val 8000"/>
-            </a:avLst>
-          </a:prstGeom>
-          <a:solidFill>
-            <a:srgbClr val="D8ECEE"/>
-          </a:solidFill>
-          <a:ln w="12700">
-            <a:solidFill>
-              <a:srgbClr val="D8ECEE"/>
-            </a:solidFill>
-            <a:prstDash val="solid"/>
-          </a:ln>
-        </p:spPr>
-      </p:sp>
-      <p:sp>
-        <p:nvSpPr>
-          <p:cNvPr id="27" name="Text 25"/>
-          <p:cNvSpPr txBox="1"/>
-          <p:nvPr/>
-        </p:nvSpPr>
-        <p:spPr>
-          <a:xfrm>
-            <a:off x="731520" y="5257800"/>
-            <a:ext cx="6309360" cy="914400"/>
-          </a:xfrm>
-          <a:prstGeom prst="rect">
-            <a:avLst/>
-          </a:prstGeom>
-          <a:noFill/>
-          <a:ln/>
-        </p:spPr>
-        <p:txBody>
-          <a:bodyPr wrap="square" lIns="0" tIns="0" rIns="0" bIns="0" rtlCol="0" anchor="ctr"/>
-          <a:lstStyle/>
-          <a:p>
-            <a:pPr algn="ctr" indent="0" marL="0">
-              <a:buNone/>
-            </a:pPr>
-            <a:r>
-              <a:rPr lang="en-US" sz="1800" b="1" dirty="0">
-                <a:solidFill>
-                  <a:srgbClr val="2E4A62"/>
-                </a:solidFill>
-                <a:latin typeface="Calibri" pitchFamily="34" charset="0"/>
-                <a:ea typeface="Calibri" pitchFamily="34" charset="-122"/>
-                <a:cs typeface="Calibri" pitchFamily="34" charset="-120"/>
-              </a:rPr>
-              <a:t>(level 0) followed by (level 1) = (rising edge)</a:t>
-            </a:r>
-            <a:endParaRPr lang="en-US" sz="1800" dirty="0"/>
-          </a:p>
-        </p:txBody>
-      </p:sp>
-      <p:sp>
-        <p:nvSpPr>
-          <p:cNvPr id="25" name="Slide Number Placeholder 0"/>
-          <p:cNvSpPr>
-            <a:spLocks noGrp="1"/>
-          </p:cNvSpPr>
-          <p:nvPr>
-            <p:ph type="sldNum" sz="quarter" idx="4294967295"/>
-          </p:nvPr>
-        </p:nvSpPr>
-        <p:spPr>
-          <a:xfrm>
-            <a:off x="11002975" y="6419088"/>
-            <a:ext cx="640080" cy="274320"/>
-          </a:xfrm>
-          <a:prstGeom prst="rect">
-            <a:avLst/>
-          </a:prstGeom>
-          <a:extLst>
-            <a:ext uri="{C572A759-6A51-4108-AA02-DFA0A04FC94B}">
-              <ma14:wrappingTextBoxFlag xmlns:ma14="http://schemas.microsoft.com/office/mac/drawingml/2011/main" val="0"/>
-            </a:ext>
-          </a:extLst>
-        </p:spPr>
-        <p:txBody>
-          <a:bodyPr/>
-          <a:lstStyle>
-            <a:lvl1pPr>
-              <a:defRPr sz="1000">
-                <a:solidFill>
-                  <a:srgbClr val="5B6B78"/>
-                </a:solidFill>
-                <a:latin typeface="Calibri"/>
-                <a:ea typeface="Calibri"/>
-                <a:cs typeface="Calibri"/>
-              </a:defRPr>
-            </a:lvl1pPr>
-          </a:lstStyle>
-          <a:p>
-            <a:pPr algn="r"/>
-            <a:fld id="{F7021451-1387-4CA6-816F-3879F97B5CBC}" type="slidenum">
-              <a:rPr b="0" lang="en-US"/>
               <a:t>13</a:t>
             </a:fld>
             <a:endParaRPr lang="en-US"/>
@@ -6859,7 +6454,7 @@
                 <a:ea typeface="Cambria" pitchFamily="34" charset="-122"/>
                 <a:cs typeface="Cambria" pitchFamily="34" charset="-120"/>
               </a:rPr>
-              <a:t>Latch or flip-flop? Watch the output</a:t>
+              <a:t>The master-slave flip-flop</a:t>
             </a:r>
             <a:endParaRPr lang="en-US" sz="3200" dirty="0"/>
           </a:p>
@@ -6867,64 +6462,513 @@
       </p:sp>
       <p:sp>
         <p:nvSpPr>
-          <p:cNvPr id="3" name="Shape 1"/>
-          <p:cNvSpPr/>
-          <p:nvPr/>
-        </p:nvSpPr>
-        <p:spPr>
-          <a:xfrm>
-            <a:off x="548640" y="1417320"/>
-            <a:ext cx="11094415" cy="3246120"/>
+          <p:cNvPr id="3" name="Text 1"/>
+          <p:cNvSpPr txBox="1"/>
+          <p:nvPr/>
+        </p:nvSpPr>
+        <p:spPr>
+          <a:xfrm>
+            <a:off x="1371600" y="1874520"/>
+            <a:ext cx="2011680" cy="1463040"/>
           </a:xfrm>
           <a:prstGeom prst="roundRect">
             <a:avLst>
-              <a:gd name="adj" fmla="val 2254"/>
+              <a:gd name="adj" fmla="val 3750"/>
             </a:avLst>
           </a:prstGeom>
           <a:solidFill>
-            <a:srgbClr val="EEF2F4"/>
+            <a:srgbClr val="0E7C86"/>
           </a:solidFill>
-          <a:ln w="12700">
+          <a:ln>
             <a:solidFill>
-              <a:srgbClr val="EEF2F4"/>
+              <a:srgbClr val="0E7C86"/>
+            </a:solidFill>
+          </a:ln>
+        </p:spPr>
+        <p:txBody>
+          <a:bodyPr wrap="square" lIns="38100" tIns="38100" rIns="38100" bIns="38100" rtlCol="0" anchor="ctr"/>
+          <a:lstStyle/>
+          <a:p>
+            <a:pPr algn="ctr" indent="0" marL="0">
+              <a:buNone/>
+            </a:pPr>
+            <a:r>
+              <a:rPr lang="en-US" sz="1500" b="1" dirty="0">
+                <a:solidFill>
+                  <a:srgbClr val="FFFFFF"/>
+                </a:solidFill>
+                <a:latin typeface="Calibri" pitchFamily="34" charset="0"/>
+                <a:ea typeface="Calibri" pitchFamily="34" charset="-122"/>
+                <a:cs typeface="Calibri" pitchFamily="34" charset="-120"/>
+              </a:rPr>
+              <a:t>MASTER</a:t>
+            </a:r>
+            <a:endParaRPr lang="en-US" sz="1500" dirty="0"/>
+          </a:p>
+          <a:p>
+            <a:pPr algn="ctr" indent="0" marL="0">
+              <a:buNone/>
+            </a:pPr>
+            <a:r>
+              <a:rPr lang="en-US" sz="1500" b="1" dirty="0">
+                <a:solidFill>
+                  <a:srgbClr val="FFFFFF"/>
+                </a:solidFill>
+                <a:latin typeface="Calibri" pitchFamily="34" charset="0"/>
+                <a:ea typeface="Calibri" pitchFamily="34" charset="-122"/>
+                <a:cs typeface="Calibri" pitchFamily="34" charset="-120"/>
+              </a:rPr>
+              <a:t>D latch</a:t>
+            </a:r>
+            <a:endParaRPr lang="en-US" sz="1500" dirty="0"/>
+          </a:p>
+          <a:p>
+            <a:pPr algn="ctr" indent="0" marL="0">
+              <a:buNone/>
+            </a:pPr>
+            <a:r>
+              <a:rPr lang="en-US" sz="1500" b="1" dirty="0">
+                <a:solidFill>
+                  <a:srgbClr val="FFFFFF"/>
+                </a:solidFill>
+                <a:latin typeface="Calibri" pitchFamily="34" charset="0"/>
+                <a:ea typeface="Calibri" pitchFamily="34" charset="-122"/>
+                <a:cs typeface="Calibri" pitchFamily="34" charset="-120"/>
+              </a:rPr>
+              <a:t>active when CK = 0</a:t>
+            </a:r>
+            <a:endParaRPr lang="en-US" sz="1500" dirty="0"/>
+          </a:p>
+        </p:txBody>
+      </p:sp>
+      <p:sp>
+        <p:nvSpPr>
+          <p:cNvPr id="4" name="Text 2"/>
+          <p:cNvSpPr txBox="1"/>
+          <p:nvPr/>
+        </p:nvSpPr>
+        <p:spPr>
+          <a:xfrm>
+            <a:off x="4389120" y="1874520"/>
+            <a:ext cx="2011680" cy="1463040"/>
+          </a:xfrm>
+          <a:prstGeom prst="roundRect">
+            <a:avLst>
+              <a:gd name="adj" fmla="val 3750"/>
+            </a:avLst>
+          </a:prstGeom>
+          <a:solidFill>
+            <a:srgbClr val="C7791B"/>
+          </a:solidFill>
+          <a:ln>
+            <a:solidFill>
+              <a:srgbClr val="C7791B"/>
+            </a:solidFill>
+          </a:ln>
+        </p:spPr>
+        <p:txBody>
+          <a:bodyPr wrap="square" lIns="38100" tIns="38100" rIns="38100" bIns="38100" rtlCol="0" anchor="ctr"/>
+          <a:lstStyle/>
+          <a:p>
+            <a:pPr algn="ctr" indent="0" marL="0">
+              <a:buNone/>
+            </a:pPr>
+            <a:r>
+              <a:rPr lang="en-US" sz="1500" b="1" dirty="0">
+                <a:solidFill>
+                  <a:srgbClr val="FFFFFF"/>
+                </a:solidFill>
+                <a:latin typeface="Calibri" pitchFamily="34" charset="0"/>
+                <a:ea typeface="Calibri" pitchFamily="34" charset="-122"/>
+                <a:cs typeface="Calibri" pitchFamily="34" charset="-120"/>
+              </a:rPr>
+              <a:t>SLAVE</a:t>
+            </a:r>
+            <a:endParaRPr lang="en-US" sz="1500" dirty="0"/>
+          </a:p>
+          <a:p>
+            <a:pPr algn="ctr" indent="0" marL="0">
+              <a:buNone/>
+            </a:pPr>
+            <a:r>
+              <a:rPr lang="en-US" sz="1500" b="1" dirty="0">
+                <a:solidFill>
+                  <a:srgbClr val="FFFFFF"/>
+                </a:solidFill>
+                <a:latin typeface="Calibri" pitchFamily="34" charset="0"/>
+                <a:ea typeface="Calibri" pitchFamily="34" charset="-122"/>
+                <a:cs typeface="Calibri" pitchFamily="34" charset="-120"/>
+              </a:rPr>
+              <a:t>D latch</a:t>
+            </a:r>
+            <a:endParaRPr lang="en-US" sz="1500" dirty="0"/>
+          </a:p>
+          <a:p>
+            <a:pPr algn="ctr" indent="0" marL="0">
+              <a:buNone/>
+            </a:pPr>
+            <a:r>
+              <a:rPr lang="en-US" sz="1500" b="1" dirty="0">
+                <a:solidFill>
+                  <a:srgbClr val="FFFFFF"/>
+                </a:solidFill>
+                <a:latin typeface="Calibri" pitchFamily="34" charset="0"/>
+                <a:ea typeface="Calibri" pitchFamily="34" charset="-122"/>
+                <a:cs typeface="Calibri" pitchFamily="34" charset="-120"/>
+              </a:rPr>
+              <a:t>active when CK = 1</a:t>
+            </a:r>
+            <a:endParaRPr lang="en-US" sz="1500" dirty="0"/>
+          </a:p>
+        </p:txBody>
+      </p:sp>
+      <p:sp>
+        <p:nvSpPr>
+          <p:cNvPr id="5" name="Shape 3"/>
+          <p:cNvSpPr/>
+          <p:nvPr/>
+        </p:nvSpPr>
+        <p:spPr>
+          <a:xfrm>
+            <a:off x="640080" y="2331720"/>
+            <a:ext cx="704088" cy="0"/>
+          </a:xfrm>
+          <a:prstGeom prst="line">
+            <a:avLst/>
+          </a:prstGeom>
+          <a:noFill/>
+          <a:ln w="28575">
+            <a:solidFill>
+              <a:srgbClr val="5B6B78"/>
+            </a:solidFill>
+            <a:prstDash val="solid"/>
+            <a:tailEnd type="triangle"/>
+          </a:ln>
+        </p:spPr>
+      </p:sp>
+      <p:sp>
+        <p:nvSpPr>
+          <p:cNvPr id="6" name="Text 4"/>
+          <p:cNvSpPr txBox="1"/>
+          <p:nvPr/>
+        </p:nvSpPr>
+        <p:spPr>
+          <a:xfrm>
+            <a:off x="640080" y="1965960"/>
+            <a:ext cx="457200" cy="274320"/>
+          </a:xfrm>
+          <a:prstGeom prst="rect">
+            <a:avLst/>
+          </a:prstGeom>
+          <a:noFill/>
+          <a:ln/>
+        </p:spPr>
+        <p:txBody>
+          <a:bodyPr wrap="square" lIns="0" tIns="0" rIns="0" bIns="0" rtlCol="0" anchor="t"/>
+          <a:lstStyle/>
+          <a:p>
+            <a:pPr indent="0" marL="0">
+              <a:buNone/>
+            </a:pPr>
+            <a:r>
+              <a:rPr lang="en-US" sz="1700" b="1" dirty="0">
+                <a:solidFill>
+                  <a:srgbClr val="1B2530"/>
+                </a:solidFill>
+                <a:latin typeface="Courier New" pitchFamily="34" charset="0"/>
+                <a:ea typeface="Courier New" pitchFamily="34" charset="-122"/>
+                <a:cs typeface="Courier New" pitchFamily="34" charset="-120"/>
+              </a:rPr>
+              <a:t>D</a:t>
+            </a:r>
+            <a:endParaRPr lang="en-US" sz="1700" dirty="0"/>
+          </a:p>
+        </p:txBody>
+      </p:sp>
+      <p:sp>
+        <p:nvSpPr>
+          <p:cNvPr id="7" name="Shape 5"/>
+          <p:cNvSpPr/>
+          <p:nvPr/>
+        </p:nvSpPr>
+        <p:spPr>
+          <a:xfrm>
+            <a:off x="3410712" y="2331720"/>
+            <a:ext cx="950976" cy="0"/>
+          </a:xfrm>
+          <a:prstGeom prst="line">
+            <a:avLst/>
+          </a:prstGeom>
+          <a:noFill/>
+          <a:ln w="28575">
+            <a:solidFill>
+              <a:srgbClr val="5B6B78"/>
+            </a:solidFill>
+            <a:prstDash val="solid"/>
+            <a:tailEnd type="triangle"/>
+          </a:ln>
+        </p:spPr>
+      </p:sp>
+      <p:sp>
+        <p:nvSpPr>
+          <p:cNvPr id="8" name="Text 6"/>
+          <p:cNvSpPr txBox="1"/>
+          <p:nvPr/>
+        </p:nvSpPr>
+        <p:spPr>
+          <a:xfrm>
+            <a:off x="3566160" y="1965960"/>
+            <a:ext cx="640080" cy="274320"/>
+          </a:xfrm>
+          <a:prstGeom prst="rect">
+            <a:avLst/>
+          </a:prstGeom>
+          <a:noFill/>
+          <a:ln/>
+        </p:spPr>
+        <p:txBody>
+          <a:bodyPr wrap="square" lIns="0" tIns="0" rIns="0" bIns="0" rtlCol="0" anchor="t"/>
+          <a:lstStyle/>
+          <a:p>
+            <a:pPr indent="0" marL="0">
+              <a:buNone/>
+            </a:pPr>
+            <a:r>
+              <a:rPr lang="en-US" sz="1500" b="1" dirty="0">
+                <a:solidFill>
+                  <a:srgbClr val="1B2530"/>
+                </a:solidFill>
+                <a:latin typeface="Courier New" pitchFamily="34" charset="0"/>
+                <a:ea typeface="Courier New" pitchFamily="34" charset="-122"/>
+                <a:cs typeface="Courier New" pitchFamily="34" charset="-120"/>
+              </a:rPr>
+              <a:t>Qm</a:t>
+            </a:r>
+            <a:endParaRPr lang="en-US" sz="1500" dirty="0"/>
+          </a:p>
+        </p:txBody>
+      </p:sp>
+      <p:sp>
+        <p:nvSpPr>
+          <p:cNvPr id="9" name="Shape 7"/>
+          <p:cNvSpPr/>
+          <p:nvPr/>
+        </p:nvSpPr>
+        <p:spPr>
+          <a:xfrm>
+            <a:off x="6428232" y="2331720"/>
+            <a:ext cx="658368" cy="0"/>
+          </a:xfrm>
+          <a:prstGeom prst="line">
+            <a:avLst/>
+          </a:prstGeom>
+          <a:noFill/>
+          <a:ln w="28575">
+            <a:solidFill>
+              <a:srgbClr val="5B6B78"/>
+            </a:solidFill>
+            <a:prstDash val="solid"/>
+            <a:tailEnd type="triangle"/>
+          </a:ln>
+        </p:spPr>
+      </p:sp>
+      <p:sp>
+        <p:nvSpPr>
+          <p:cNvPr id="10" name="Text 8"/>
+          <p:cNvSpPr txBox="1"/>
+          <p:nvPr/>
+        </p:nvSpPr>
+        <p:spPr>
+          <a:xfrm>
+            <a:off x="6629400" y="1965960"/>
+            <a:ext cx="457200" cy="274320"/>
+          </a:xfrm>
+          <a:prstGeom prst="rect">
+            <a:avLst/>
+          </a:prstGeom>
+          <a:noFill/>
+          <a:ln/>
+        </p:spPr>
+        <p:txBody>
+          <a:bodyPr wrap="square" lIns="0" tIns="0" rIns="0" bIns="0" rtlCol="0" anchor="t"/>
+          <a:lstStyle/>
+          <a:p>
+            <a:pPr indent="0" marL="0">
+              <a:buNone/>
+            </a:pPr>
+            <a:r>
+              <a:rPr lang="en-US" sz="1700" b="1" dirty="0">
+                <a:solidFill>
+                  <a:srgbClr val="1B2530"/>
+                </a:solidFill>
+                <a:latin typeface="Courier New" pitchFamily="34" charset="0"/>
+                <a:ea typeface="Courier New" pitchFamily="34" charset="-122"/>
+                <a:cs typeface="Courier New" pitchFamily="34" charset="-120"/>
+              </a:rPr>
+              <a:t>Q</a:t>
+            </a:r>
+            <a:endParaRPr lang="en-US" sz="1700" dirty="0"/>
+          </a:p>
+        </p:txBody>
+      </p:sp>
+      <p:sp>
+        <p:nvSpPr>
+          <p:cNvPr id="11" name="Shape 9"/>
+          <p:cNvSpPr/>
+          <p:nvPr/>
+        </p:nvSpPr>
+        <p:spPr>
+          <a:xfrm>
+            <a:off x="822960" y="4069080"/>
+            <a:ext cx="4572000" cy="0"/>
+          </a:xfrm>
+          <a:prstGeom prst="line">
+            <a:avLst/>
+          </a:prstGeom>
+          <a:noFill/>
+          <a:ln w="28575">
+            <a:solidFill>
+              <a:srgbClr val="B23A48"/>
             </a:solidFill>
             <a:prstDash val="solid"/>
           </a:ln>
         </p:spPr>
       </p:sp>
-      <p:pic>
-        <p:nvPicPr>
-          <p:cNvPr id="5" name="Image 0" descr="preencoded.png">    </p:cNvPr>
-          <p:cNvPicPr>
-            <a:picLocks noChangeAspect="1"/>
-          </p:cNvPicPr>
-          <p:nvPr/>
-        </p:nvPicPr>
-        <p:blipFill>
-          <a:blip r:embed="rId1"/>
-          <a:stretch>
-            <a:fillRect/>
-          </a:stretch>
-        </p:blipFill>
-        <p:spPr>
-          <a:xfrm>
-            <a:off x="775328" y="1463040"/>
-            <a:ext cx="10641040" cy="3154680"/>
-          </a:xfrm>
-          <a:prstGeom prst="rect">
-            <a:avLst/>
-          </a:prstGeom>
-        </p:spPr>
-      </p:pic>
-      <p:sp>
-        <p:nvSpPr>
-          <p:cNvPr id="6" name="Shape 2"/>
+      <p:sp>
+        <p:nvSpPr>
+          <p:cNvPr id="12" name="Text 10"/>
+          <p:cNvSpPr txBox="1"/>
+          <p:nvPr/>
+        </p:nvSpPr>
+        <p:spPr>
+          <a:xfrm>
+            <a:off x="822960" y="4114800"/>
+            <a:ext cx="640080" cy="274320"/>
+          </a:xfrm>
+          <a:prstGeom prst="rect">
+            <a:avLst/>
+          </a:prstGeom>
+          <a:noFill/>
+          <a:ln/>
+        </p:spPr>
+        <p:txBody>
+          <a:bodyPr wrap="square" lIns="0" tIns="0" rIns="0" bIns="0" rtlCol="0" anchor="t"/>
+          <a:lstStyle/>
+          <a:p>
+            <a:pPr indent="0" marL="0">
+              <a:buNone/>
+            </a:pPr>
+            <a:r>
+              <a:rPr lang="en-US" sz="1500" b="1" dirty="0">
+                <a:solidFill>
+                  <a:srgbClr val="B23A48"/>
+                </a:solidFill>
+                <a:latin typeface="Courier New" pitchFamily="34" charset="0"/>
+                <a:ea typeface="Courier New" pitchFamily="34" charset="-122"/>
+                <a:cs typeface="Courier New" pitchFamily="34" charset="-120"/>
+              </a:rPr>
+              <a:t>CK</a:t>
+            </a:r>
+            <a:endParaRPr lang="en-US" sz="1500" dirty="0"/>
+          </a:p>
+        </p:txBody>
+      </p:sp>
+      <p:sp>
+        <p:nvSpPr>
+          <p:cNvPr id="13" name="Shape 11"/>
           <p:cNvSpPr/>
           <p:nvPr/>
         </p:nvSpPr>
         <p:spPr>
-          <a:xfrm>
-            <a:off x="548640" y="4868291"/>
+          <a:xfrm flipV="1">
+            <a:off x="2377440" y="3364992"/>
+            <a:ext cx="0" cy="704088"/>
+          </a:xfrm>
+          <a:prstGeom prst="line">
+            <a:avLst/>
+          </a:prstGeom>
+          <a:noFill/>
+          <a:ln w="28575">
+            <a:solidFill>
+              <a:srgbClr val="B23A48"/>
+            </a:solidFill>
+            <a:prstDash val="solid"/>
+            <a:tailEnd type="triangle"/>
+          </a:ln>
+        </p:spPr>
+      </p:sp>
+      <p:sp>
+        <p:nvSpPr>
+          <p:cNvPr id="14" name="Shape 12"/>
+          <p:cNvSpPr/>
+          <p:nvPr/>
+        </p:nvSpPr>
+        <p:spPr>
+          <a:xfrm flipV="1">
+            <a:off x="5394960" y="3364992"/>
+            <a:ext cx="0" cy="704088"/>
+          </a:xfrm>
+          <a:prstGeom prst="line">
+            <a:avLst/>
+          </a:prstGeom>
+          <a:noFill/>
+          <a:ln w="28575">
+            <a:solidFill>
+              <a:srgbClr val="B23A48"/>
+            </a:solidFill>
+            <a:prstDash val="solid"/>
+            <a:tailEnd type="triangle"/>
+          </a:ln>
+        </p:spPr>
+      </p:sp>
+      <p:sp>
+        <p:nvSpPr>
+          <p:cNvPr id="15" name="Text 13"/>
+          <p:cNvSpPr txBox="1"/>
+          <p:nvPr/>
+        </p:nvSpPr>
+        <p:spPr>
+          <a:xfrm>
+            <a:off x="2468880" y="3520440"/>
+            <a:ext cx="1097280" cy="274320"/>
+          </a:xfrm>
+          <a:prstGeom prst="rect">
+            <a:avLst/>
+          </a:prstGeom>
+          <a:noFill/>
+          <a:ln/>
+        </p:spPr>
+        <p:txBody>
+          <a:bodyPr wrap="square" lIns="0" tIns="0" rIns="0" bIns="0" rtlCol="0" anchor="t"/>
+          <a:lstStyle/>
+          <a:p>
+            <a:pPr indent="0" marL="0">
+              <a:buNone/>
+            </a:pPr>
+            <a:r>
+              <a:rPr lang="en-US" sz="1250" i="1" dirty="0">
+                <a:solidFill>
+                  <a:srgbClr val="B23A48"/>
+                </a:solidFill>
+                <a:latin typeface="Calibri" pitchFamily="34" charset="0"/>
+                <a:ea typeface="Calibri" pitchFamily="34" charset="-122"/>
+                <a:cs typeface="Calibri" pitchFamily="34" charset="-120"/>
+              </a:rPr>
+              <a:t>inverted</a:t>
+            </a:r>
+            <a:endParaRPr lang="en-US" sz="1250" dirty="0"/>
+          </a:p>
+        </p:txBody>
+      </p:sp>
+      <p:sp>
+        <p:nvSpPr>
+          <p:cNvPr id="16" name="Shape 14"/>
+          <p:cNvSpPr/>
+          <p:nvPr/>
+        </p:nvSpPr>
+        <p:spPr>
+          <a:xfrm>
+            <a:off x="7589520" y="1492758"/>
             <a:ext cx="146304" cy="146304"/>
           </a:xfrm>
           <a:prstGeom prst="rect">
@@ -6943,14 +6987,14 @@
       </p:sp>
       <p:sp>
         <p:nvSpPr>
-          <p:cNvPr id="7" name="Text 3"/>
+          <p:cNvPr id="17" name="Text 15"/>
           <p:cNvSpPr txBox="1"/>
           <p:nvPr/>
         </p:nvSpPr>
         <p:spPr>
           <a:xfrm>
-            <a:off x="932688" y="4800600"/>
-            <a:ext cx="10710367" cy="526796"/>
+            <a:off x="7973568" y="1417320"/>
+            <a:ext cx="3669487" cy="836676"/>
           </a:xfrm>
           <a:prstGeom prst="rect">
             <a:avLst/>
@@ -6969,7 +7013,7 @@
               <a:buNone/>
             </a:pPr>
             <a:r>
-              <a:rPr lang="en-US" sz="1700" dirty="0">
+              <a:rPr lang="en-US" sz="1800" dirty="0">
                 <a:solidFill>
                   <a:srgbClr val="1B2530"/>
                 </a:solidFill>
@@ -6977,21 +7021,21 @@
                 <a:ea typeface="Calibri" pitchFamily="34" charset="-122"/>
                 <a:cs typeface="Calibri" pitchFamily="34" charset="-120"/>
               </a:rPr>
-              <a:t>The D latch follows D for the whole time the clock is high, and holds the last value when the clock goes low</a:t>
-            </a:r>
-            <a:endParaRPr lang="en-US" sz="1700" dirty="0"/>
-          </a:p>
-        </p:txBody>
-      </p:sp>
-      <p:sp>
-        <p:nvSpPr>
-          <p:cNvPr id="8" name="Shape 4"/>
+              <a:t>Two latches in series, controlled by opposite levels of the clock</a:t>
+            </a:r>
+            <a:endParaRPr lang="en-US" sz="1800" dirty="0"/>
+          </a:p>
+        </p:txBody>
+      </p:sp>
+      <p:sp>
+        <p:nvSpPr>
+          <p:cNvPr id="18" name="Shape 16"/>
           <p:cNvSpPr/>
           <p:nvPr/>
         </p:nvSpPr>
         <p:spPr>
           <a:xfrm>
-            <a:off x="548640" y="5554091"/>
+            <a:off x="7589520" y="2472309"/>
             <a:ext cx="146304" cy="146304"/>
           </a:xfrm>
           <a:prstGeom prst="rect">
@@ -7010,14 +7054,14 @@
       </p:sp>
       <p:sp>
         <p:nvSpPr>
-          <p:cNvPr id="9" name="Text 5"/>
+          <p:cNvPr id="19" name="Text 17"/>
           <p:cNvSpPr txBox="1"/>
           <p:nvPr/>
         </p:nvSpPr>
         <p:spPr>
           <a:xfrm>
-            <a:off x="932688" y="5486400"/>
-            <a:ext cx="10710367" cy="263398"/>
+            <a:off x="7973568" y="2396871"/>
+            <a:ext cx="3669487" cy="557784"/>
           </a:xfrm>
           <a:prstGeom prst="rect">
             <a:avLst/>
@@ -7036,7 +7080,7 @@
               <a:buNone/>
             </a:pPr>
             <a:r>
-              <a:rPr lang="en-US" sz="1700" dirty="0">
+              <a:rPr lang="en-US" sz="1800" dirty="0">
                 <a:solidFill>
                   <a:srgbClr val="1B2530"/>
                 </a:solidFill>
@@ -7044,21 +7088,21 @@
                 <a:ea typeface="Calibri" pitchFamily="34" charset="-122"/>
                 <a:cs typeface="Calibri" pitchFamily="34" charset="-120"/>
               </a:rPr>
-              <a:t>The D flip-flop looks at D only on the rising edge: short pulses between two edges are ignored</a:t>
-            </a:r>
-            <a:endParaRPr lang="en-US" sz="1700" dirty="0"/>
-          </a:p>
-        </p:txBody>
-      </p:sp>
-      <p:sp>
-        <p:nvSpPr>
-          <p:cNvPr id="10" name="Shape 6"/>
+              <a:t>The master receives the inputs; the slave produces the outputs</a:t>
+            </a:r>
+            <a:endParaRPr lang="en-US" sz="1800" dirty="0"/>
+          </a:p>
+        </p:txBody>
+      </p:sp>
+      <p:sp>
+        <p:nvSpPr>
+          <p:cNvPr id="20" name="Shape 18"/>
           <p:cNvSpPr/>
           <p:nvPr/>
         </p:nvSpPr>
         <p:spPr>
           <a:xfrm>
-            <a:off x="548640" y="5976493"/>
+            <a:off x="7589520" y="3172968"/>
             <a:ext cx="146304" cy="146304"/>
           </a:xfrm>
           <a:prstGeom prst="rect">
@@ -7077,14 +7121,14 @@
       </p:sp>
       <p:sp>
         <p:nvSpPr>
-          <p:cNvPr id="11" name="Text 7"/>
+          <p:cNvPr id="21" name="Text 19"/>
           <p:cNvSpPr txBox="1"/>
           <p:nvPr/>
         </p:nvSpPr>
         <p:spPr>
           <a:xfrm>
-            <a:off x="932688" y="5908802"/>
-            <a:ext cx="10710367" cy="263398"/>
+            <a:off x="7973568" y="3097530"/>
+            <a:ext cx="3669487" cy="1115568"/>
           </a:xfrm>
           <a:prstGeom prst="rect">
             <a:avLst/>
@@ -7103,7 +7147,7 @@
               <a:buNone/>
             </a:pPr>
             <a:r>
-              <a:rPr lang="en-US" sz="1700" dirty="0">
+              <a:rPr lang="en-US" sz="1800" dirty="0">
                 <a:solidFill>
                   <a:srgbClr val="1B2530"/>
                 </a:solidFill>
@@ -7111,9 +7155,209 @@
                 <a:ea typeface="Calibri" pitchFamily="34" charset="-122"/>
                 <a:cs typeface="Calibri" pitchFamily="34" charset="-120"/>
               </a:rPr>
-              <a:t>The flip-flop output is steady for a whole period: this is what a state register needs</a:t>
-            </a:r>
-            <a:endParaRPr lang="en-US" sz="1700" dirty="0"/>
+              <a:t>They are never transparent at the same time: the input can never run straight through to the output</a:t>
+            </a:r>
+            <a:endParaRPr lang="en-US" sz="1800" dirty="0"/>
+          </a:p>
+        </p:txBody>
+      </p:sp>
+      <p:sp>
+        <p:nvSpPr>
+          <p:cNvPr id="22" name="Shape 20"/>
+          <p:cNvSpPr/>
+          <p:nvPr/>
+        </p:nvSpPr>
+        <p:spPr>
+          <a:xfrm>
+            <a:off x="7589520" y="4431411"/>
+            <a:ext cx="146304" cy="146304"/>
+          </a:xfrm>
+          <a:prstGeom prst="rect">
+            <a:avLst/>
+          </a:prstGeom>
+          <a:solidFill>
+            <a:srgbClr val="C7791B"/>
+          </a:solidFill>
+          <a:ln w="12700">
+            <a:solidFill>
+              <a:srgbClr val="C7791B"/>
+            </a:solidFill>
+            <a:prstDash val="solid"/>
+          </a:ln>
+        </p:spPr>
+      </p:sp>
+      <p:sp>
+        <p:nvSpPr>
+          <p:cNvPr id="23" name="Text 21"/>
+          <p:cNvSpPr txBox="1"/>
+          <p:nvPr/>
+        </p:nvSpPr>
+        <p:spPr>
+          <a:xfrm>
+            <a:off x="7973568" y="4355973"/>
+            <a:ext cx="3669487" cy="836676"/>
+          </a:xfrm>
+          <a:prstGeom prst="rect">
+            <a:avLst/>
+          </a:prstGeom>
+          <a:noFill/>
+          <a:ln/>
+        </p:spPr>
+        <p:txBody>
+          <a:bodyPr wrap="square" lIns="0" tIns="0" rIns="0" bIns="0" rtlCol="0" anchor="t"/>
+          <a:lstStyle/>
+          <a:p>
+            <a:pPr indent="0" marL="0">
+              <a:spcAft>
+                <a:spcPts val="200"/>
+              </a:spcAft>
+              <a:buNone/>
+            </a:pPr>
+            <a:r>
+              <a:rPr lang="en-US" sz="1800" dirty="0">
+                <a:solidFill>
+                  <a:srgbClr val="1B2530"/>
+                </a:solidFill>
+                <a:latin typeface="Calibri" pitchFamily="34" charset="0"/>
+                <a:ea typeface="Calibri" pitchFamily="34" charset="-122"/>
+                <a:cs typeface="Calibri" pitchFamily="34" charset="-120"/>
+              </a:rPr>
+              <a:t>The output changes only when the clock passes from 0 to 1: on the edge</a:t>
+            </a:r>
+            <a:endParaRPr lang="en-US" sz="1800" dirty="0"/>
+          </a:p>
+        </p:txBody>
+      </p:sp>
+      <p:sp>
+        <p:nvSpPr>
+          <p:cNvPr id="24" name="Shape 22"/>
+          <p:cNvSpPr/>
+          <p:nvPr/>
+        </p:nvSpPr>
+        <p:spPr>
+          <a:xfrm>
+            <a:off x="7589520" y="5410962"/>
+            <a:ext cx="146304" cy="146304"/>
+          </a:xfrm>
+          <a:prstGeom prst="rect">
+            <a:avLst/>
+          </a:prstGeom>
+          <a:solidFill>
+            <a:srgbClr val="0E7C86"/>
+          </a:solidFill>
+          <a:ln w="12700">
+            <a:solidFill>
+              <a:srgbClr val="0E7C86"/>
+            </a:solidFill>
+            <a:prstDash val="solid"/>
+          </a:ln>
+        </p:spPr>
+      </p:sp>
+      <p:sp>
+        <p:nvSpPr>
+          <p:cNvPr id="25" name="Text 23"/>
+          <p:cNvSpPr txBox="1"/>
+          <p:nvPr/>
+        </p:nvSpPr>
+        <p:spPr>
+          <a:xfrm>
+            <a:off x="7973568" y="5335524"/>
+            <a:ext cx="3669487" cy="836676"/>
+          </a:xfrm>
+          <a:prstGeom prst="rect">
+            <a:avLst/>
+          </a:prstGeom>
+          <a:noFill/>
+          <a:ln/>
+        </p:spPr>
+        <p:txBody>
+          <a:bodyPr wrap="square" lIns="0" tIns="0" rIns="0" bIns="0" rtlCol="0" anchor="t"/>
+          <a:lstStyle/>
+          <a:p>
+            <a:pPr indent="0" marL="0">
+              <a:spcAft>
+                <a:spcPts val="200"/>
+              </a:spcAft>
+              <a:buNone/>
+            </a:pPr>
+            <a:r>
+              <a:rPr lang="en-US" sz="1800" dirty="0">
+                <a:solidFill>
+                  <a:srgbClr val="1B2530"/>
+                </a:solidFill>
+                <a:latin typeface="Calibri" pitchFamily="34" charset="0"/>
+                <a:ea typeface="Calibri" pitchFamily="34" charset="-122"/>
+                <a:cs typeface="Calibri" pitchFamily="34" charset="-120"/>
+              </a:rPr>
+              <a:t>A flip-flop is edge-triggered: one operation per clock cycle, and no fluctuation of the output</a:t>
+            </a:r>
+            <a:endParaRPr lang="en-US" sz="1800" dirty="0"/>
+          </a:p>
+        </p:txBody>
+      </p:sp>
+      <p:sp>
+        <p:nvSpPr>
+          <p:cNvPr id="26" name="Shape 24"/>
+          <p:cNvSpPr/>
+          <p:nvPr/>
+        </p:nvSpPr>
+        <p:spPr>
+          <a:xfrm>
+            <a:off x="548640" y="5257800"/>
+            <a:ext cx="6675120" cy="914400"/>
+          </a:xfrm>
+          <a:prstGeom prst="roundRect">
+            <a:avLst>
+              <a:gd name="adj" fmla="val 8000"/>
+            </a:avLst>
+          </a:prstGeom>
+          <a:solidFill>
+            <a:srgbClr val="D8ECEE"/>
+          </a:solidFill>
+          <a:ln w="12700">
+            <a:solidFill>
+              <a:srgbClr val="D8ECEE"/>
+            </a:solidFill>
+            <a:prstDash val="solid"/>
+          </a:ln>
+        </p:spPr>
+      </p:sp>
+      <p:sp>
+        <p:nvSpPr>
+          <p:cNvPr id="27" name="Text 25"/>
+          <p:cNvSpPr txBox="1"/>
+          <p:nvPr/>
+        </p:nvSpPr>
+        <p:spPr>
+          <a:xfrm>
+            <a:off x="731520" y="5257800"/>
+            <a:ext cx="6309360" cy="914400"/>
+          </a:xfrm>
+          <a:prstGeom prst="rect">
+            <a:avLst/>
+          </a:prstGeom>
+          <a:noFill/>
+          <a:ln/>
+        </p:spPr>
+        <p:txBody>
+          <a:bodyPr wrap="square" lIns="0" tIns="0" rIns="0" bIns="0" rtlCol="0" anchor="ctr"/>
+          <a:lstStyle/>
+          <a:p>
+            <a:pPr algn="ctr" indent="0" marL="0">
+              <a:buNone/>
+            </a:pPr>
+            <a:r>
+              <a:rPr lang="en-US" sz="1800" b="1" dirty="0">
+                <a:solidFill>
+                  <a:srgbClr val="2E4A62"/>
+                </a:solidFill>
+                <a:latin typeface="Calibri" pitchFamily="34" charset="0"/>
+                <a:ea typeface="Calibri" pitchFamily="34" charset="-122"/>
+                <a:cs typeface="Calibri" pitchFamily="34" charset="-120"/>
+              </a:rPr>
+              <a:t>(level 0) followed by (level 1) = (rising edge)</a:t>
+            </a:r>
+            <a:endParaRPr lang="en-US" sz="1800" dirty="0"/>
           </a:p>
         </p:txBody>
       </p:sp>
@@ -7225,1962 +7469,264 @@
                 <a:ea typeface="Cambria" pitchFamily="34" charset="-122"/>
                 <a:cs typeface="Cambria" pitchFamily="34" charset="-120"/>
               </a:rPr>
-              <a:t>Memory elements: a summary</a:t>
+              <a:t>Latch or flip-flop? Watch the output</a:t>
             </a:r>
             <a:endParaRPr lang="en-US" sz="3200" dirty="0"/>
           </a:p>
         </p:txBody>
       </p:sp>
-      <p:graphicFrame>
-        <p:nvGraphicFramePr>
-          <p:cNvPr id="16" name="Table 0"/>
-          <p:cNvGraphicFramePr>
-            <a:graphicFrameLocks noGrp="1"/>
-          </p:cNvGraphicFramePr>
-          <p:nvPr>
-            <p:extLst>
-              <p:ext uri="{D42A27DB-BD31-4B8C-83A1-F6EECF244321}">
-                <p14:modId xmlns:p14="http://schemas.microsoft.com/office/powerpoint/2010/main" val="1579011935"/>
-              </p:ext>
-            </p:extLst>
-          </p:nvPr>
-        </p:nvGraphicFramePr>
-        <p:xfrm>
-          <a:off x="548640" y="1417320"/>
-          <a:ext cx="11094415" cy="914400"/>
-        </p:xfrm>
-        <a:graphic>
-          <a:graphicData uri="http://schemas.openxmlformats.org/drawingml/2006/table">
-            <a:tbl>
-              <a:tblPr/>
-              <a:tblGrid>
-                <a:gridCol w="2840170"/>
-                <a:gridCol w="1686351"/>
-                <a:gridCol w="2840170"/>
-                <a:gridCol w="3727724"/>
-              </a:tblGrid>
-              <a:tr h="0">
-                <a:tc>
-                  <a:txBody>
-                    <a:bodyPr/>
-                    <a:lstStyle/>
-                    <a:p>
-                      <a:pPr algn="l" indent="0" marL="0">
-                        <a:buNone/>
-                      </a:pPr>
-                      <a:r>
-                        <a:rPr lang="en-US" sz="2100" b="1" dirty="0">
-                          <a:solidFill>
-                            <a:srgbClr val="FFFFFF"/>
-                          </a:solidFill>
-                          <a:latin typeface="Calibri" pitchFamily="34" charset="0"/>
-                          <a:ea typeface="Calibri" pitchFamily="34" charset="-122"/>
-                          <a:cs typeface="Calibri" pitchFamily="34" charset="-120"/>
-                        </a:rPr>
-                        <a:t>Element</a:t>
-                      </a:r>
-                      <a:endParaRPr lang="en-US" sz="2100" dirty="0">
-                        <a:latin typeface="Calibri" charset="0"/>
-                        <a:ea typeface="Calibri" charset="0"/>
-                        <a:cs typeface="Calibri" charset="0"/>
-                      </a:endParaRPr>
-                    </a:p>
-                  </a:txBody>
-                  <a:tcPr marL="101600" marR="101600" marT="50800" marB="50800" anchor="ctr">
-                    <a:lnL w="6350" cap="flat" cmpd="sng" algn="ctr">
-                      <a:solidFill>
-                        <a:srgbClr val="C9D2D8"/>
-                      </a:solidFill>
-                      <a:prstDash val="solid"/>
-                      <a:round/>
-                      <a:headEnd type="none" w="med" len="med"/>
-                      <a:tailEnd type="none" w="med" len="med"/>
-                    </a:lnL>
-                    <a:lnR w="6350" cap="flat" cmpd="sng" algn="ctr">
-                      <a:solidFill>
-                        <a:srgbClr val="C9D2D8"/>
-                      </a:solidFill>
-                      <a:prstDash val="solid"/>
-                      <a:round/>
-                      <a:headEnd type="none" w="med" len="med"/>
-                      <a:tailEnd type="none" w="med" len="med"/>
-                    </a:lnR>
-                    <a:lnT w="6350" cap="flat" cmpd="sng" algn="ctr">
-                      <a:solidFill>
-                        <a:srgbClr val="C9D2D8"/>
-                      </a:solidFill>
-                      <a:prstDash val="solid"/>
-                      <a:round/>
-                      <a:headEnd type="none" w="med" len="med"/>
-                      <a:tailEnd type="none" w="med" len="med"/>
-                    </a:lnT>
-                    <a:lnB w="6350" cap="flat" cmpd="sng" algn="ctr">
-                      <a:solidFill>
-                        <a:srgbClr val="C9D2D8"/>
-                      </a:solidFill>
-                      <a:prstDash val="solid"/>
-                      <a:round/>
-                      <a:headEnd type="none" w="med" len="med"/>
-                      <a:tailEnd type="none" w="med" len="med"/>
-                    </a:lnB>
-                    <a:solidFill>
-                      <a:srgbClr val="2E4A62"/>
-                    </a:solidFill>
-                  </a:tcPr>
-                </a:tc>
-                <a:tc>
-                  <a:txBody>
-                    <a:bodyPr/>
-                    <a:lstStyle/>
-                    <a:p>
-                      <a:pPr algn="l" indent="0" marL="0">
-                        <a:buNone/>
-                      </a:pPr>
-                      <a:r>
-                        <a:rPr lang="en-US" sz="2100" b="1" dirty="0">
-                          <a:solidFill>
-                            <a:srgbClr val="FFFFFF"/>
-                          </a:solidFill>
-                          <a:latin typeface="Calibri" pitchFamily="34" charset="0"/>
-                          <a:ea typeface="Calibri" pitchFamily="34" charset="-122"/>
-                          <a:cs typeface="Calibri" pitchFamily="34" charset="-120"/>
-                        </a:rPr>
-                        <a:t>Inputs</a:t>
-                      </a:r>
-                      <a:endParaRPr lang="en-US" sz="2100" dirty="0">
-                        <a:latin typeface="Calibri" charset="0"/>
-                        <a:ea typeface="Calibri" charset="0"/>
-                        <a:cs typeface="Calibri" charset="0"/>
-                      </a:endParaRPr>
-                    </a:p>
-                  </a:txBody>
-                  <a:tcPr marL="101600" marR="101600" marT="50800" marB="50800" anchor="ctr">
-                    <a:lnL w="6350" cap="flat" cmpd="sng" algn="ctr">
-                      <a:solidFill>
-                        <a:srgbClr val="C9D2D8"/>
-                      </a:solidFill>
-                      <a:prstDash val="solid"/>
-                      <a:round/>
-                      <a:headEnd type="none" w="med" len="med"/>
-                      <a:tailEnd type="none" w="med" len="med"/>
-                    </a:lnL>
-                    <a:lnR w="6350" cap="flat" cmpd="sng" algn="ctr">
-                      <a:solidFill>
-                        <a:srgbClr val="C9D2D8"/>
-                      </a:solidFill>
-                      <a:prstDash val="solid"/>
-                      <a:round/>
-                      <a:headEnd type="none" w="med" len="med"/>
-                      <a:tailEnd type="none" w="med" len="med"/>
-                    </a:lnR>
-                    <a:lnT w="6350" cap="flat" cmpd="sng" algn="ctr">
-                      <a:solidFill>
-                        <a:srgbClr val="C9D2D8"/>
-                      </a:solidFill>
-                      <a:prstDash val="solid"/>
-                      <a:round/>
-                      <a:headEnd type="none" w="med" len="med"/>
-                      <a:tailEnd type="none" w="med" len="med"/>
-                    </a:lnT>
-                    <a:lnB w="6350" cap="flat" cmpd="sng" algn="ctr">
-                      <a:solidFill>
-                        <a:srgbClr val="C9D2D8"/>
-                      </a:solidFill>
-                      <a:prstDash val="solid"/>
-                      <a:round/>
-                      <a:headEnd type="none" w="med" len="med"/>
-                      <a:tailEnd type="none" w="med" len="med"/>
-                    </a:lnB>
-                    <a:solidFill>
-                      <a:srgbClr val="2E4A62"/>
-                    </a:solidFill>
-                  </a:tcPr>
-                </a:tc>
-                <a:tc>
-                  <a:txBody>
-                    <a:bodyPr/>
-                    <a:lstStyle/>
-                    <a:p>
-                      <a:pPr algn="l" indent="0" marL="0">
-                        <a:buNone/>
-                      </a:pPr>
-                      <a:r>
-                        <a:rPr lang="en-US" sz="2100" b="1" dirty="0">
-                          <a:solidFill>
-                            <a:srgbClr val="FFFFFF"/>
-                          </a:solidFill>
-                          <a:latin typeface="Calibri" pitchFamily="34" charset="0"/>
-                          <a:ea typeface="Calibri" pitchFamily="34" charset="-122"/>
-                          <a:cs typeface="Calibri" pitchFamily="34" charset="-120"/>
-                        </a:rPr>
-                        <a:t>Next state</a:t>
-                      </a:r>
-                      <a:endParaRPr lang="en-US" sz="2100" dirty="0">
-                        <a:latin typeface="Calibri" charset="0"/>
-                        <a:ea typeface="Calibri" charset="0"/>
-                        <a:cs typeface="Calibri" charset="0"/>
-                      </a:endParaRPr>
-                    </a:p>
-                  </a:txBody>
-                  <a:tcPr marL="101600" marR="101600" marT="50800" marB="50800" anchor="ctr">
-                    <a:lnL w="6350" cap="flat" cmpd="sng" algn="ctr">
-                      <a:solidFill>
-                        <a:srgbClr val="C9D2D8"/>
-                      </a:solidFill>
-                      <a:prstDash val="solid"/>
-                      <a:round/>
-                      <a:headEnd type="none" w="med" len="med"/>
-                      <a:tailEnd type="none" w="med" len="med"/>
-                    </a:lnL>
-                    <a:lnR w="6350" cap="flat" cmpd="sng" algn="ctr">
-                      <a:solidFill>
-                        <a:srgbClr val="C9D2D8"/>
-                      </a:solidFill>
-                      <a:prstDash val="solid"/>
-                      <a:round/>
-                      <a:headEnd type="none" w="med" len="med"/>
-                      <a:tailEnd type="none" w="med" len="med"/>
-                    </a:lnR>
-                    <a:lnT w="6350" cap="flat" cmpd="sng" algn="ctr">
-                      <a:solidFill>
-                        <a:srgbClr val="C9D2D8"/>
-                      </a:solidFill>
-                      <a:prstDash val="solid"/>
-                      <a:round/>
-                      <a:headEnd type="none" w="med" len="med"/>
-                      <a:tailEnd type="none" w="med" len="med"/>
-                    </a:lnT>
-                    <a:lnB w="6350" cap="flat" cmpd="sng" algn="ctr">
-                      <a:solidFill>
-                        <a:srgbClr val="C9D2D8"/>
-                      </a:solidFill>
-                      <a:prstDash val="solid"/>
-                      <a:round/>
-                      <a:headEnd type="none" w="med" len="med"/>
-                      <a:tailEnd type="none" w="med" len="med"/>
-                    </a:lnB>
-                    <a:solidFill>
-                      <a:srgbClr val="2E4A62"/>
-                    </a:solidFill>
-                  </a:tcPr>
-                </a:tc>
-                <a:tc>
-                  <a:txBody>
-                    <a:bodyPr/>
-                    <a:lstStyle/>
-                    <a:p>
-                      <a:pPr algn="l" indent="0" marL="0">
-                        <a:buNone/>
-                      </a:pPr>
-                      <a:r>
-                        <a:rPr lang="en-US" sz="2100" b="1" dirty="0">
-                          <a:solidFill>
-                            <a:srgbClr val="FFFFFF"/>
-                          </a:solidFill>
-                          <a:latin typeface="Calibri" pitchFamily="34" charset="0"/>
-                          <a:ea typeface="Calibri" pitchFamily="34" charset="-122"/>
-                          <a:cs typeface="Calibri" pitchFamily="34" charset="-120"/>
-                        </a:rPr>
-                        <a:t>Changes when</a:t>
-                      </a:r>
-                      <a:endParaRPr lang="en-US" sz="2100" dirty="0">
-                        <a:latin typeface="Calibri" charset="0"/>
-                        <a:ea typeface="Calibri" charset="0"/>
-                        <a:cs typeface="Calibri" charset="0"/>
-                      </a:endParaRPr>
-                    </a:p>
-                  </a:txBody>
-                  <a:tcPr marL="101600" marR="101600" marT="50800" marB="50800" anchor="ctr">
-                    <a:lnL w="6350" cap="flat" cmpd="sng" algn="ctr">
-                      <a:solidFill>
-                        <a:srgbClr val="C9D2D8"/>
-                      </a:solidFill>
-                      <a:prstDash val="solid"/>
-                      <a:round/>
-                      <a:headEnd type="none" w="med" len="med"/>
-                      <a:tailEnd type="none" w="med" len="med"/>
-                    </a:lnL>
-                    <a:lnR w="6350" cap="flat" cmpd="sng" algn="ctr">
-                      <a:solidFill>
-                        <a:srgbClr val="C9D2D8"/>
-                      </a:solidFill>
-                      <a:prstDash val="solid"/>
-                      <a:round/>
-                      <a:headEnd type="none" w="med" len="med"/>
-                      <a:tailEnd type="none" w="med" len="med"/>
-                    </a:lnR>
-                    <a:lnT w="6350" cap="flat" cmpd="sng" algn="ctr">
-                      <a:solidFill>
-                        <a:srgbClr val="C9D2D8"/>
-                      </a:solidFill>
-                      <a:prstDash val="solid"/>
-                      <a:round/>
-                      <a:headEnd type="none" w="med" len="med"/>
-                      <a:tailEnd type="none" w="med" len="med"/>
-                    </a:lnT>
-                    <a:lnB w="6350" cap="flat" cmpd="sng" algn="ctr">
-                      <a:solidFill>
-                        <a:srgbClr val="C9D2D8"/>
-                      </a:solidFill>
-                      <a:prstDash val="solid"/>
-                      <a:round/>
-                      <a:headEnd type="none" w="med" len="med"/>
-                      <a:tailEnd type="none" w="med" len="med"/>
-                    </a:lnB>
-                    <a:solidFill>
-                      <a:srgbClr val="2E4A62"/>
-                    </a:solidFill>
-                  </a:tcPr>
-                </a:tc>
-              </a:tr>
-              <a:tr h="0">
-                <a:tc>
-                  <a:txBody>
-                    <a:bodyPr/>
-                    <a:lstStyle/>
-                    <a:p>
-                      <a:pPr algn="l" indent="0" marL="0">
-                        <a:buNone/>
-                      </a:pPr>
-                      <a:r>
-                        <a:rPr lang="en-US" sz="2100" b="1" dirty="0">
-                          <a:solidFill>
-                            <a:srgbClr val="1B2530"/>
-                          </a:solidFill>
-                          <a:latin typeface="Calibri" pitchFamily="34" charset="0"/>
-                          <a:ea typeface="Calibri" pitchFamily="34" charset="-122"/>
-                          <a:cs typeface="Calibri" pitchFamily="34" charset="-120"/>
-                        </a:rPr>
-                        <a:t>SR latch (S R = 0)</a:t>
-                      </a:r>
-                      <a:endParaRPr lang="en-US" sz="2100" dirty="0">
-                        <a:latin typeface="Calibri" charset="0"/>
-                        <a:ea typeface="Calibri" charset="0"/>
-                        <a:cs typeface="Calibri" charset="0"/>
-                      </a:endParaRPr>
-                    </a:p>
-                  </a:txBody>
-                  <a:tcPr marL="101600" marR="101600" marT="50800" marB="50800" anchor="ctr">
-                    <a:lnL w="6350" cap="flat" cmpd="sng" algn="ctr">
-                      <a:solidFill>
-                        <a:srgbClr val="C9D2D8"/>
-                      </a:solidFill>
-                      <a:prstDash val="solid"/>
-                      <a:round/>
-                      <a:headEnd type="none" w="med" len="med"/>
-                      <a:tailEnd type="none" w="med" len="med"/>
-                    </a:lnL>
-                    <a:lnR w="6350" cap="flat" cmpd="sng" algn="ctr">
-                      <a:solidFill>
-                        <a:srgbClr val="C9D2D8"/>
-                      </a:solidFill>
-                      <a:prstDash val="solid"/>
-                      <a:round/>
-                      <a:headEnd type="none" w="med" len="med"/>
-                      <a:tailEnd type="none" w="med" len="med"/>
-                    </a:lnR>
-                    <a:lnT w="6350" cap="flat" cmpd="sng" algn="ctr">
-                      <a:solidFill>
-                        <a:srgbClr val="C9D2D8"/>
-                      </a:solidFill>
-                      <a:prstDash val="solid"/>
-                      <a:round/>
-                      <a:headEnd type="none" w="med" len="med"/>
-                      <a:tailEnd type="none" w="med" len="med"/>
-                    </a:lnT>
-                    <a:lnB w="6350" cap="flat" cmpd="sng" algn="ctr">
-                      <a:solidFill>
-                        <a:srgbClr val="C9D2D8"/>
-                      </a:solidFill>
-                      <a:prstDash val="solid"/>
-                      <a:round/>
-                      <a:headEnd type="none" w="med" len="med"/>
-                      <a:tailEnd type="none" w="med" len="med"/>
-                    </a:lnB>
-                    <a:solidFill>
-                      <a:srgbClr val="EEF2F4"/>
-                    </a:solidFill>
-                  </a:tcPr>
-                </a:tc>
-                <a:tc>
-                  <a:txBody>
-                    <a:bodyPr/>
-                    <a:lstStyle/>
-                    <a:p>
-                      <a:pPr algn="l" indent="0" marL="0">
-                        <a:buNone/>
-                      </a:pPr>
-                      <a:r>
-                        <a:rPr lang="en-US" sz="2100" dirty="0">
-                          <a:solidFill>
-                            <a:srgbClr val="1B2530"/>
-                          </a:solidFill>
-                          <a:latin typeface="Courier New" pitchFamily="34" charset="0"/>
-                          <a:ea typeface="Courier New" pitchFamily="34" charset="-122"/>
-                          <a:cs typeface="Courier New" pitchFamily="34" charset="-120"/>
-                        </a:rPr>
-                        <a:t>S, R</a:t>
-                      </a:r>
-                      <a:endParaRPr lang="en-US" sz="2100" dirty="0">
-                        <a:latin typeface="Courier New" charset="0"/>
-                        <a:ea typeface="Courier New" charset="0"/>
-                        <a:cs typeface="Courier New" charset="0"/>
-                      </a:endParaRPr>
-                    </a:p>
-                  </a:txBody>
-                  <a:tcPr marL="101600" marR="101600" marT="50800" marB="50800" anchor="ctr">
-                    <a:lnL w="6350" cap="flat" cmpd="sng" algn="ctr">
-                      <a:solidFill>
-                        <a:srgbClr val="C9D2D8"/>
-                      </a:solidFill>
-                      <a:prstDash val="solid"/>
-                      <a:round/>
-                      <a:headEnd type="none" w="med" len="med"/>
-                      <a:tailEnd type="none" w="med" len="med"/>
-                    </a:lnL>
-                    <a:lnR w="6350" cap="flat" cmpd="sng" algn="ctr">
-                      <a:solidFill>
-                        <a:srgbClr val="C9D2D8"/>
-                      </a:solidFill>
-                      <a:prstDash val="solid"/>
-                      <a:round/>
-                      <a:headEnd type="none" w="med" len="med"/>
-                      <a:tailEnd type="none" w="med" len="med"/>
-                    </a:lnR>
-                    <a:lnT w="6350" cap="flat" cmpd="sng" algn="ctr">
-                      <a:solidFill>
-                        <a:srgbClr val="C9D2D8"/>
-                      </a:solidFill>
-                      <a:prstDash val="solid"/>
-                      <a:round/>
-                      <a:headEnd type="none" w="med" len="med"/>
-                      <a:tailEnd type="none" w="med" len="med"/>
-                    </a:lnT>
-                    <a:lnB w="6350" cap="flat" cmpd="sng" algn="ctr">
-                      <a:solidFill>
-                        <a:srgbClr val="C9D2D8"/>
-                      </a:solidFill>
-                      <a:prstDash val="solid"/>
-                      <a:round/>
-                      <a:headEnd type="none" w="med" len="med"/>
-                      <a:tailEnd type="none" w="med" len="med"/>
-                    </a:lnB>
-                    <a:solidFill>
-                      <a:srgbClr val="EEF2F4"/>
-                    </a:solidFill>
-                  </a:tcPr>
-                </a:tc>
-                <a:tc>
-                  <a:txBody>
-                    <a:bodyPr/>
-                    <a:lstStyle/>
-                    <a:p>
-                      <a:pPr algn="l" indent="0" marL="0">
-                        <a:buNone/>
-                      </a:pPr>
-                      <a:r>
-                        <a:rPr lang="en-US" sz="2100" dirty="0">
-                          <a:solidFill>
-                            <a:srgbClr val="1B2530"/>
-                          </a:solidFill>
-                          <a:latin typeface="Courier New" pitchFamily="34" charset="0"/>
-                          <a:ea typeface="Courier New" pitchFamily="34" charset="-122"/>
-                          <a:cs typeface="Courier New" pitchFamily="34" charset="-120"/>
-                        </a:rPr>
-                        <a:t>Q+ = S + R' Q</a:t>
-                      </a:r>
-                      <a:endParaRPr lang="en-US" sz="2100" dirty="0">
-                        <a:latin typeface="Courier New" charset="0"/>
-                        <a:ea typeface="Courier New" charset="0"/>
-                        <a:cs typeface="Courier New" charset="0"/>
-                      </a:endParaRPr>
-                    </a:p>
-                  </a:txBody>
-                  <a:tcPr marL="101600" marR="101600" marT="50800" marB="50800" anchor="ctr">
-                    <a:lnL w="6350" cap="flat" cmpd="sng" algn="ctr">
-                      <a:solidFill>
-                        <a:srgbClr val="C9D2D8"/>
-                      </a:solidFill>
-                      <a:prstDash val="solid"/>
-                      <a:round/>
-                      <a:headEnd type="none" w="med" len="med"/>
-                      <a:tailEnd type="none" w="med" len="med"/>
-                    </a:lnL>
-                    <a:lnR w="6350" cap="flat" cmpd="sng" algn="ctr">
-                      <a:solidFill>
-                        <a:srgbClr val="C9D2D8"/>
-                      </a:solidFill>
-                      <a:prstDash val="solid"/>
-                      <a:round/>
-                      <a:headEnd type="none" w="med" len="med"/>
-                      <a:tailEnd type="none" w="med" len="med"/>
-                    </a:lnR>
-                    <a:lnT w="6350" cap="flat" cmpd="sng" algn="ctr">
-                      <a:solidFill>
-                        <a:srgbClr val="C9D2D8"/>
-                      </a:solidFill>
-                      <a:prstDash val="solid"/>
-                      <a:round/>
-                      <a:headEnd type="none" w="med" len="med"/>
-                      <a:tailEnd type="none" w="med" len="med"/>
-                    </a:lnT>
-                    <a:lnB w="6350" cap="flat" cmpd="sng" algn="ctr">
-                      <a:solidFill>
-                        <a:srgbClr val="C9D2D8"/>
-                      </a:solidFill>
-                      <a:prstDash val="solid"/>
-                      <a:round/>
-                      <a:headEnd type="none" w="med" len="med"/>
-                      <a:tailEnd type="none" w="med" len="med"/>
-                    </a:lnB>
-                    <a:solidFill>
-                      <a:srgbClr val="EEF2F4"/>
-                    </a:solidFill>
-                  </a:tcPr>
-                </a:tc>
-                <a:tc>
-                  <a:txBody>
-                    <a:bodyPr/>
-                    <a:lstStyle/>
-                    <a:p>
-                      <a:pPr algn="l" indent="0" marL="0">
-                        <a:buNone/>
-                      </a:pPr>
-                      <a:r>
-                        <a:rPr lang="en-US" sz="2100" dirty="0">
-                          <a:solidFill>
-                            <a:srgbClr val="1B2530"/>
-                          </a:solidFill>
-                          <a:latin typeface="Calibri" pitchFamily="34" charset="0"/>
-                          <a:ea typeface="Calibri" pitchFamily="34" charset="-122"/>
-                          <a:cs typeface="Calibri" pitchFamily="34" charset="-120"/>
-                        </a:rPr>
-                        <a:t>any time an input changes</a:t>
-                      </a:r>
-                      <a:endParaRPr lang="en-US" sz="2100" dirty="0">
-                        <a:latin typeface="Calibri" charset="0"/>
-                        <a:ea typeface="Calibri" charset="0"/>
-                        <a:cs typeface="Calibri" charset="0"/>
-                      </a:endParaRPr>
-                    </a:p>
-                  </a:txBody>
-                  <a:tcPr marL="101600" marR="101600" marT="50800" marB="50800" anchor="ctr">
-                    <a:lnL w="6350" cap="flat" cmpd="sng" algn="ctr">
-                      <a:solidFill>
-                        <a:srgbClr val="C9D2D8"/>
-                      </a:solidFill>
-                      <a:prstDash val="solid"/>
-                      <a:round/>
-                      <a:headEnd type="none" w="med" len="med"/>
-                      <a:tailEnd type="none" w="med" len="med"/>
-                    </a:lnL>
-                    <a:lnR w="6350" cap="flat" cmpd="sng" algn="ctr">
-                      <a:solidFill>
-                        <a:srgbClr val="C9D2D8"/>
-                      </a:solidFill>
-                      <a:prstDash val="solid"/>
-                      <a:round/>
-                      <a:headEnd type="none" w="med" len="med"/>
-                      <a:tailEnd type="none" w="med" len="med"/>
-                    </a:lnR>
-                    <a:lnT w="6350" cap="flat" cmpd="sng" algn="ctr">
-                      <a:solidFill>
-                        <a:srgbClr val="C9D2D8"/>
-                      </a:solidFill>
-                      <a:prstDash val="solid"/>
-                      <a:round/>
-                      <a:headEnd type="none" w="med" len="med"/>
-                      <a:tailEnd type="none" w="med" len="med"/>
-                    </a:lnT>
-                    <a:lnB w="6350" cap="flat" cmpd="sng" algn="ctr">
-                      <a:solidFill>
-                        <a:srgbClr val="C9D2D8"/>
-                      </a:solidFill>
-                      <a:prstDash val="solid"/>
-                      <a:round/>
-                      <a:headEnd type="none" w="med" len="med"/>
-                      <a:tailEnd type="none" w="med" len="med"/>
-                    </a:lnB>
-                    <a:solidFill>
-                      <a:srgbClr val="EEF2F4"/>
-                    </a:solidFill>
-                  </a:tcPr>
-                </a:tc>
-              </a:tr>
-              <a:tr h="0">
-                <a:tc>
-                  <a:txBody>
-                    <a:bodyPr/>
-                    <a:lstStyle/>
-                    <a:p>
-                      <a:pPr algn="l" indent="0" marL="0">
-                        <a:buNone/>
-                      </a:pPr>
-                      <a:r>
-                        <a:rPr lang="en-US" sz="2100" b="1" dirty="0">
-                          <a:solidFill>
-                            <a:srgbClr val="1B2530"/>
-                          </a:solidFill>
-                          <a:latin typeface="Calibri" pitchFamily="34" charset="0"/>
-                          <a:ea typeface="Calibri" pitchFamily="34" charset="-122"/>
-                          <a:cs typeface="Calibri" pitchFamily="34" charset="-120"/>
-                        </a:rPr>
-                        <a:t>clocked SR latch</a:t>
-                      </a:r>
-                      <a:endParaRPr lang="en-US" sz="2100" dirty="0">
-                        <a:latin typeface="Calibri" charset="0"/>
-                        <a:ea typeface="Calibri" charset="0"/>
-                        <a:cs typeface="Calibri" charset="0"/>
-                      </a:endParaRPr>
-                    </a:p>
-                  </a:txBody>
-                  <a:tcPr marL="101600" marR="101600" marT="50800" marB="50800" anchor="ctr">
-                    <a:lnL w="6350" cap="flat" cmpd="sng" algn="ctr">
-                      <a:solidFill>
-                        <a:srgbClr val="C9D2D8"/>
-                      </a:solidFill>
-                      <a:prstDash val="solid"/>
-                      <a:round/>
-                      <a:headEnd type="none" w="med" len="med"/>
-                      <a:tailEnd type="none" w="med" len="med"/>
-                    </a:lnL>
-                    <a:lnR w="6350" cap="flat" cmpd="sng" algn="ctr">
-                      <a:solidFill>
-                        <a:srgbClr val="C9D2D8"/>
-                      </a:solidFill>
-                      <a:prstDash val="solid"/>
-                      <a:round/>
-                      <a:headEnd type="none" w="med" len="med"/>
-                      <a:tailEnd type="none" w="med" len="med"/>
-                    </a:lnR>
-                    <a:lnT w="6350" cap="flat" cmpd="sng" algn="ctr">
-                      <a:solidFill>
-                        <a:srgbClr val="C9D2D8"/>
-                      </a:solidFill>
-                      <a:prstDash val="solid"/>
-                      <a:round/>
-                      <a:headEnd type="none" w="med" len="med"/>
-                      <a:tailEnd type="none" w="med" len="med"/>
-                    </a:lnT>
-                    <a:lnB w="6350" cap="flat" cmpd="sng" algn="ctr">
-                      <a:solidFill>
-                        <a:srgbClr val="C9D2D8"/>
-                      </a:solidFill>
-                      <a:prstDash val="solid"/>
-                      <a:round/>
-                      <a:headEnd type="none" w="med" len="med"/>
-                      <a:tailEnd type="none" w="med" len="med"/>
-                    </a:lnB>
-                    <a:solidFill>
-                      <a:srgbClr val="FFFFFF"/>
-                    </a:solidFill>
-                  </a:tcPr>
-                </a:tc>
-                <a:tc>
-                  <a:txBody>
-                    <a:bodyPr/>
-                    <a:lstStyle/>
-                    <a:p>
-                      <a:pPr algn="l" indent="0" marL="0">
-                        <a:buNone/>
-                      </a:pPr>
-                      <a:r>
-                        <a:rPr lang="en-US" sz="2100" dirty="0">
-                          <a:solidFill>
-                            <a:srgbClr val="1B2530"/>
-                          </a:solidFill>
-                          <a:latin typeface="Courier New" pitchFamily="34" charset="0"/>
-                          <a:ea typeface="Courier New" pitchFamily="34" charset="-122"/>
-                          <a:cs typeface="Courier New" pitchFamily="34" charset="-120"/>
-                        </a:rPr>
-                        <a:t>S, R, CK</a:t>
-                      </a:r>
-                      <a:endParaRPr lang="en-US" sz="2100" dirty="0">
-                        <a:latin typeface="Courier New" charset="0"/>
-                        <a:ea typeface="Courier New" charset="0"/>
-                        <a:cs typeface="Courier New" charset="0"/>
-                      </a:endParaRPr>
-                    </a:p>
-                  </a:txBody>
-                  <a:tcPr marL="101600" marR="101600" marT="50800" marB="50800" anchor="ctr">
-                    <a:lnL w="6350" cap="flat" cmpd="sng" algn="ctr">
-                      <a:solidFill>
-                        <a:srgbClr val="C9D2D8"/>
-                      </a:solidFill>
-                      <a:prstDash val="solid"/>
-                      <a:round/>
-                      <a:headEnd type="none" w="med" len="med"/>
-                      <a:tailEnd type="none" w="med" len="med"/>
-                    </a:lnL>
-                    <a:lnR w="6350" cap="flat" cmpd="sng" algn="ctr">
-                      <a:solidFill>
-                        <a:srgbClr val="C9D2D8"/>
-                      </a:solidFill>
-                      <a:prstDash val="solid"/>
-                      <a:round/>
-                      <a:headEnd type="none" w="med" len="med"/>
-                      <a:tailEnd type="none" w="med" len="med"/>
-                    </a:lnR>
-                    <a:lnT w="6350" cap="flat" cmpd="sng" algn="ctr">
-                      <a:solidFill>
-                        <a:srgbClr val="C9D2D8"/>
-                      </a:solidFill>
-                      <a:prstDash val="solid"/>
-                      <a:round/>
-                      <a:headEnd type="none" w="med" len="med"/>
-                      <a:tailEnd type="none" w="med" len="med"/>
-                    </a:lnT>
-                    <a:lnB w="6350" cap="flat" cmpd="sng" algn="ctr">
-                      <a:solidFill>
-                        <a:srgbClr val="C9D2D8"/>
-                      </a:solidFill>
-                      <a:prstDash val="solid"/>
-                      <a:round/>
-                      <a:headEnd type="none" w="med" len="med"/>
-                      <a:tailEnd type="none" w="med" len="med"/>
-                    </a:lnB>
-                    <a:solidFill>
-                      <a:srgbClr val="FFFFFF"/>
-                    </a:solidFill>
-                  </a:tcPr>
-                </a:tc>
-                <a:tc>
-                  <a:txBody>
-                    <a:bodyPr/>
-                    <a:lstStyle/>
-                    <a:p>
-                      <a:pPr algn="l" indent="0" marL="0">
-                        <a:buNone/>
-                      </a:pPr>
-                      <a:r>
-                        <a:rPr lang="en-US" sz="2100" dirty="0">
-                          <a:solidFill>
-                            <a:srgbClr val="1B2530"/>
-                          </a:solidFill>
-                          <a:latin typeface="Courier New" pitchFamily="34" charset="0"/>
-                          <a:ea typeface="Courier New" pitchFamily="34" charset="-122"/>
-                          <a:cs typeface="Courier New" pitchFamily="34" charset="-120"/>
-                        </a:rPr>
-                        <a:t>as above</a:t>
-                      </a:r>
-                      <a:endParaRPr lang="en-US" sz="2100" dirty="0">
-                        <a:latin typeface="Courier New" charset="0"/>
-                        <a:ea typeface="Courier New" charset="0"/>
-                        <a:cs typeface="Courier New" charset="0"/>
-                      </a:endParaRPr>
-                    </a:p>
-                  </a:txBody>
-                  <a:tcPr marL="101600" marR="101600" marT="50800" marB="50800" anchor="ctr">
-                    <a:lnL w="6350" cap="flat" cmpd="sng" algn="ctr">
-                      <a:solidFill>
-                        <a:srgbClr val="C9D2D8"/>
-                      </a:solidFill>
-                      <a:prstDash val="solid"/>
-                      <a:round/>
-                      <a:headEnd type="none" w="med" len="med"/>
-                      <a:tailEnd type="none" w="med" len="med"/>
-                    </a:lnL>
-                    <a:lnR w="6350" cap="flat" cmpd="sng" algn="ctr">
-                      <a:solidFill>
-                        <a:srgbClr val="C9D2D8"/>
-                      </a:solidFill>
-                      <a:prstDash val="solid"/>
-                      <a:round/>
-                      <a:headEnd type="none" w="med" len="med"/>
-                      <a:tailEnd type="none" w="med" len="med"/>
-                    </a:lnR>
-                    <a:lnT w="6350" cap="flat" cmpd="sng" algn="ctr">
-                      <a:solidFill>
-                        <a:srgbClr val="C9D2D8"/>
-                      </a:solidFill>
-                      <a:prstDash val="solid"/>
-                      <a:round/>
-                      <a:headEnd type="none" w="med" len="med"/>
-                      <a:tailEnd type="none" w="med" len="med"/>
-                    </a:lnT>
-                    <a:lnB w="6350" cap="flat" cmpd="sng" algn="ctr">
-                      <a:solidFill>
-                        <a:srgbClr val="C9D2D8"/>
-                      </a:solidFill>
-                      <a:prstDash val="solid"/>
-                      <a:round/>
-                      <a:headEnd type="none" w="med" len="med"/>
-                      <a:tailEnd type="none" w="med" len="med"/>
-                    </a:lnB>
-                    <a:solidFill>
-                      <a:srgbClr val="FFFFFF"/>
-                    </a:solidFill>
-                  </a:tcPr>
-                </a:tc>
-                <a:tc>
-                  <a:txBody>
-                    <a:bodyPr/>
-                    <a:lstStyle/>
-                    <a:p>
-                      <a:pPr algn="l" indent="0" marL="0">
-                        <a:buNone/>
-                      </a:pPr>
-                      <a:r>
-                        <a:rPr lang="en-US" sz="2100" dirty="0">
-                          <a:solidFill>
-                            <a:srgbClr val="1B2530"/>
-                          </a:solidFill>
-                          <a:latin typeface="Calibri" pitchFamily="34" charset="0"/>
-                          <a:ea typeface="Calibri" pitchFamily="34" charset="-122"/>
-                          <a:cs typeface="Calibri" pitchFamily="34" charset="-120"/>
-                        </a:rPr>
-                        <a:t>while the clock is at the active level</a:t>
-                      </a:r>
-                      <a:endParaRPr lang="en-US" sz="2100" dirty="0">
-                        <a:latin typeface="Calibri" charset="0"/>
-                        <a:ea typeface="Calibri" charset="0"/>
-                        <a:cs typeface="Calibri" charset="0"/>
-                      </a:endParaRPr>
-                    </a:p>
-                  </a:txBody>
-                  <a:tcPr marL="101600" marR="101600" marT="50800" marB="50800" anchor="ctr">
-                    <a:lnL w="6350" cap="flat" cmpd="sng" algn="ctr">
-                      <a:solidFill>
-                        <a:srgbClr val="C9D2D8"/>
-                      </a:solidFill>
-                      <a:prstDash val="solid"/>
-                      <a:round/>
-                      <a:headEnd type="none" w="med" len="med"/>
-                      <a:tailEnd type="none" w="med" len="med"/>
-                    </a:lnL>
-                    <a:lnR w="6350" cap="flat" cmpd="sng" algn="ctr">
-                      <a:solidFill>
-                        <a:srgbClr val="C9D2D8"/>
-                      </a:solidFill>
-                      <a:prstDash val="solid"/>
-                      <a:round/>
-                      <a:headEnd type="none" w="med" len="med"/>
-                      <a:tailEnd type="none" w="med" len="med"/>
-                    </a:lnR>
-                    <a:lnT w="6350" cap="flat" cmpd="sng" algn="ctr">
-                      <a:solidFill>
-                        <a:srgbClr val="C9D2D8"/>
-                      </a:solidFill>
-                      <a:prstDash val="solid"/>
-                      <a:round/>
-                      <a:headEnd type="none" w="med" len="med"/>
-                      <a:tailEnd type="none" w="med" len="med"/>
-                    </a:lnT>
-                    <a:lnB w="6350" cap="flat" cmpd="sng" algn="ctr">
-                      <a:solidFill>
-                        <a:srgbClr val="C9D2D8"/>
-                      </a:solidFill>
-                      <a:prstDash val="solid"/>
-                      <a:round/>
-                      <a:headEnd type="none" w="med" len="med"/>
-                      <a:tailEnd type="none" w="med" len="med"/>
-                    </a:lnB>
-                    <a:solidFill>
-                      <a:srgbClr val="FFFFFF"/>
-                    </a:solidFill>
-                  </a:tcPr>
-                </a:tc>
-              </a:tr>
-              <a:tr h="0">
-                <a:tc>
-                  <a:txBody>
-                    <a:bodyPr/>
-                    <a:lstStyle/>
-                    <a:p>
-                      <a:pPr algn="l" indent="0" marL="0">
-                        <a:buNone/>
-                      </a:pPr>
-                      <a:r>
-                        <a:rPr lang="en-US" sz="2100" b="1" dirty="0">
-                          <a:solidFill>
-                            <a:srgbClr val="1B2530"/>
-                          </a:solidFill>
-                          <a:latin typeface="Calibri" pitchFamily="34" charset="0"/>
-                          <a:ea typeface="Calibri" pitchFamily="34" charset="-122"/>
-                          <a:cs typeface="Calibri" pitchFamily="34" charset="-120"/>
-                        </a:rPr>
-                        <a:t>D latch</a:t>
-                      </a:r>
-                      <a:endParaRPr lang="en-US" sz="2100" dirty="0">
-                        <a:latin typeface="Calibri" charset="0"/>
-                        <a:ea typeface="Calibri" charset="0"/>
-                        <a:cs typeface="Calibri" charset="0"/>
-                      </a:endParaRPr>
-                    </a:p>
-                  </a:txBody>
-                  <a:tcPr marL="101600" marR="101600" marT="50800" marB="50800" anchor="ctr">
-                    <a:lnL w="6350" cap="flat" cmpd="sng" algn="ctr">
-                      <a:solidFill>
-                        <a:srgbClr val="C9D2D8"/>
-                      </a:solidFill>
-                      <a:prstDash val="solid"/>
-                      <a:round/>
-                      <a:headEnd type="none" w="med" len="med"/>
-                      <a:tailEnd type="none" w="med" len="med"/>
-                    </a:lnL>
-                    <a:lnR w="6350" cap="flat" cmpd="sng" algn="ctr">
-                      <a:solidFill>
-                        <a:srgbClr val="C9D2D8"/>
-                      </a:solidFill>
-                      <a:prstDash val="solid"/>
-                      <a:round/>
-                      <a:headEnd type="none" w="med" len="med"/>
-                      <a:tailEnd type="none" w="med" len="med"/>
-                    </a:lnR>
-                    <a:lnT w="6350" cap="flat" cmpd="sng" algn="ctr">
-                      <a:solidFill>
-                        <a:srgbClr val="C9D2D8"/>
-                      </a:solidFill>
-                      <a:prstDash val="solid"/>
-                      <a:round/>
-                      <a:headEnd type="none" w="med" len="med"/>
-                      <a:tailEnd type="none" w="med" len="med"/>
-                    </a:lnT>
-                    <a:lnB w="6350" cap="flat" cmpd="sng" algn="ctr">
-                      <a:solidFill>
-                        <a:srgbClr val="C9D2D8"/>
-                      </a:solidFill>
-                      <a:prstDash val="solid"/>
-                      <a:round/>
-                      <a:headEnd type="none" w="med" len="med"/>
-                      <a:tailEnd type="none" w="med" len="med"/>
-                    </a:lnB>
-                    <a:solidFill>
-                      <a:srgbClr val="EEF2F4"/>
-                    </a:solidFill>
-                  </a:tcPr>
-                </a:tc>
-                <a:tc>
-                  <a:txBody>
-                    <a:bodyPr/>
-                    <a:lstStyle/>
-                    <a:p>
-                      <a:pPr algn="l" indent="0" marL="0">
-                        <a:buNone/>
-                      </a:pPr>
-                      <a:r>
-                        <a:rPr lang="en-US" sz="2100" dirty="0">
-                          <a:solidFill>
-                            <a:srgbClr val="1B2530"/>
-                          </a:solidFill>
-                          <a:latin typeface="Courier New" pitchFamily="34" charset="0"/>
-                          <a:ea typeface="Courier New" pitchFamily="34" charset="-122"/>
-                          <a:cs typeface="Courier New" pitchFamily="34" charset="-120"/>
-                        </a:rPr>
-                        <a:t>D, CK</a:t>
-                      </a:r>
-                      <a:endParaRPr lang="en-US" sz="2100" dirty="0">
-                        <a:latin typeface="Courier New" charset="0"/>
-                        <a:ea typeface="Courier New" charset="0"/>
-                        <a:cs typeface="Courier New" charset="0"/>
-                      </a:endParaRPr>
-                    </a:p>
-                  </a:txBody>
-                  <a:tcPr marL="101600" marR="101600" marT="50800" marB="50800" anchor="ctr">
-                    <a:lnL w="6350" cap="flat" cmpd="sng" algn="ctr">
-                      <a:solidFill>
-                        <a:srgbClr val="C9D2D8"/>
-                      </a:solidFill>
-                      <a:prstDash val="solid"/>
-                      <a:round/>
-                      <a:headEnd type="none" w="med" len="med"/>
-                      <a:tailEnd type="none" w="med" len="med"/>
-                    </a:lnL>
-                    <a:lnR w="6350" cap="flat" cmpd="sng" algn="ctr">
-                      <a:solidFill>
-                        <a:srgbClr val="C9D2D8"/>
-                      </a:solidFill>
-                      <a:prstDash val="solid"/>
-                      <a:round/>
-                      <a:headEnd type="none" w="med" len="med"/>
-                      <a:tailEnd type="none" w="med" len="med"/>
-                    </a:lnR>
-                    <a:lnT w="6350" cap="flat" cmpd="sng" algn="ctr">
-                      <a:solidFill>
-                        <a:srgbClr val="C9D2D8"/>
-                      </a:solidFill>
-                      <a:prstDash val="solid"/>
-                      <a:round/>
-                      <a:headEnd type="none" w="med" len="med"/>
-                      <a:tailEnd type="none" w="med" len="med"/>
-                    </a:lnT>
-                    <a:lnB w="6350" cap="flat" cmpd="sng" algn="ctr">
-                      <a:solidFill>
-                        <a:srgbClr val="C9D2D8"/>
-                      </a:solidFill>
-                      <a:prstDash val="solid"/>
-                      <a:round/>
-                      <a:headEnd type="none" w="med" len="med"/>
-                      <a:tailEnd type="none" w="med" len="med"/>
-                    </a:lnB>
-                    <a:solidFill>
-                      <a:srgbClr val="EEF2F4"/>
-                    </a:solidFill>
-                  </a:tcPr>
-                </a:tc>
-                <a:tc>
-                  <a:txBody>
-                    <a:bodyPr/>
-                    <a:lstStyle/>
-                    <a:p>
-                      <a:pPr algn="l" indent="0" marL="0">
-                        <a:buNone/>
-                      </a:pPr>
-                      <a:r>
-                        <a:rPr lang="en-US" sz="2100" dirty="0">
-                          <a:solidFill>
-                            <a:srgbClr val="1B2530"/>
-                          </a:solidFill>
-                          <a:latin typeface="Courier New" pitchFamily="34" charset="0"/>
-                          <a:ea typeface="Courier New" pitchFamily="34" charset="-122"/>
-                          <a:cs typeface="Courier New" pitchFamily="34" charset="-120"/>
-                        </a:rPr>
-                        <a:t>Q+ = D</a:t>
-                      </a:r>
-                      <a:endParaRPr lang="en-US" sz="2100" dirty="0">
-                        <a:latin typeface="Courier New" charset="0"/>
-                        <a:ea typeface="Courier New" charset="0"/>
-                        <a:cs typeface="Courier New" charset="0"/>
-                      </a:endParaRPr>
-                    </a:p>
-                  </a:txBody>
-                  <a:tcPr marL="101600" marR="101600" marT="50800" marB="50800" anchor="ctr">
-                    <a:lnL w="6350" cap="flat" cmpd="sng" algn="ctr">
-                      <a:solidFill>
-                        <a:srgbClr val="C9D2D8"/>
-                      </a:solidFill>
-                      <a:prstDash val="solid"/>
-                      <a:round/>
-                      <a:headEnd type="none" w="med" len="med"/>
-                      <a:tailEnd type="none" w="med" len="med"/>
-                    </a:lnL>
-                    <a:lnR w="6350" cap="flat" cmpd="sng" algn="ctr">
-                      <a:solidFill>
-                        <a:srgbClr val="C9D2D8"/>
-                      </a:solidFill>
-                      <a:prstDash val="solid"/>
-                      <a:round/>
-                      <a:headEnd type="none" w="med" len="med"/>
-                      <a:tailEnd type="none" w="med" len="med"/>
-                    </a:lnR>
-                    <a:lnT w="6350" cap="flat" cmpd="sng" algn="ctr">
-                      <a:solidFill>
-                        <a:srgbClr val="C9D2D8"/>
-                      </a:solidFill>
-                      <a:prstDash val="solid"/>
-                      <a:round/>
-                      <a:headEnd type="none" w="med" len="med"/>
-                      <a:tailEnd type="none" w="med" len="med"/>
-                    </a:lnT>
-                    <a:lnB w="6350" cap="flat" cmpd="sng" algn="ctr">
-                      <a:solidFill>
-                        <a:srgbClr val="C9D2D8"/>
-                      </a:solidFill>
-                      <a:prstDash val="solid"/>
-                      <a:round/>
-                      <a:headEnd type="none" w="med" len="med"/>
-                      <a:tailEnd type="none" w="med" len="med"/>
-                    </a:lnB>
-                    <a:solidFill>
-                      <a:srgbClr val="EEF2F4"/>
-                    </a:solidFill>
-                  </a:tcPr>
-                </a:tc>
-                <a:tc>
-                  <a:txBody>
-                    <a:bodyPr/>
-                    <a:lstStyle/>
-                    <a:p>
-                      <a:pPr algn="l" indent="0" marL="0">
-                        <a:buNone/>
-                      </a:pPr>
-                      <a:r>
-                        <a:rPr lang="en-US" sz="2100" dirty="0">
-                          <a:solidFill>
-                            <a:srgbClr val="1B2530"/>
-                          </a:solidFill>
-                          <a:latin typeface="Calibri" pitchFamily="34" charset="0"/>
-                          <a:ea typeface="Calibri" pitchFamily="34" charset="-122"/>
-                          <a:cs typeface="Calibri" pitchFamily="34" charset="-120"/>
-                        </a:rPr>
-                        <a:t>while the clock is at the active level</a:t>
-                      </a:r>
-                      <a:endParaRPr lang="en-US" sz="2100" dirty="0">
-                        <a:latin typeface="Calibri" charset="0"/>
-                        <a:ea typeface="Calibri" charset="0"/>
-                        <a:cs typeface="Calibri" charset="0"/>
-                      </a:endParaRPr>
-                    </a:p>
-                  </a:txBody>
-                  <a:tcPr marL="101600" marR="101600" marT="50800" marB="50800" anchor="ctr">
-                    <a:lnL w="6350" cap="flat" cmpd="sng" algn="ctr">
-                      <a:solidFill>
-                        <a:srgbClr val="C9D2D8"/>
-                      </a:solidFill>
-                      <a:prstDash val="solid"/>
-                      <a:round/>
-                      <a:headEnd type="none" w="med" len="med"/>
-                      <a:tailEnd type="none" w="med" len="med"/>
-                    </a:lnL>
-                    <a:lnR w="6350" cap="flat" cmpd="sng" algn="ctr">
-                      <a:solidFill>
-                        <a:srgbClr val="C9D2D8"/>
-                      </a:solidFill>
-                      <a:prstDash val="solid"/>
-                      <a:round/>
-                      <a:headEnd type="none" w="med" len="med"/>
-                      <a:tailEnd type="none" w="med" len="med"/>
-                    </a:lnR>
-                    <a:lnT w="6350" cap="flat" cmpd="sng" algn="ctr">
-                      <a:solidFill>
-                        <a:srgbClr val="C9D2D8"/>
-                      </a:solidFill>
-                      <a:prstDash val="solid"/>
-                      <a:round/>
-                      <a:headEnd type="none" w="med" len="med"/>
-                      <a:tailEnd type="none" w="med" len="med"/>
-                    </a:lnT>
-                    <a:lnB w="6350" cap="flat" cmpd="sng" algn="ctr">
-                      <a:solidFill>
-                        <a:srgbClr val="C9D2D8"/>
-                      </a:solidFill>
-                      <a:prstDash val="solid"/>
-                      <a:round/>
-                      <a:headEnd type="none" w="med" len="med"/>
-                      <a:tailEnd type="none" w="med" len="med"/>
-                    </a:lnB>
-                    <a:solidFill>
-                      <a:srgbClr val="EEF2F4"/>
-                    </a:solidFill>
-                  </a:tcPr>
-                </a:tc>
-              </a:tr>
-              <a:tr h="0">
-                <a:tc>
-                  <a:txBody>
-                    <a:bodyPr/>
-                    <a:lstStyle/>
-                    <a:p>
-                      <a:pPr algn="l" indent="0" marL="0">
-                        <a:buNone/>
-                      </a:pPr>
-                      <a:r>
-                        <a:rPr lang="en-US" sz="2100" b="1" dirty="0">
-                          <a:solidFill>
-                            <a:srgbClr val="1B2530"/>
-                          </a:solidFill>
-                          <a:latin typeface="Calibri" pitchFamily="34" charset="0"/>
-                          <a:ea typeface="Calibri" pitchFamily="34" charset="-122"/>
-                          <a:cs typeface="Calibri" pitchFamily="34" charset="-120"/>
-                        </a:rPr>
-                        <a:t>JK flip-flop</a:t>
-                      </a:r>
-                      <a:endParaRPr lang="en-US" sz="2100" dirty="0">
-                        <a:latin typeface="Calibri" charset="0"/>
-                        <a:ea typeface="Calibri" charset="0"/>
-                        <a:cs typeface="Calibri" charset="0"/>
-                      </a:endParaRPr>
-                    </a:p>
-                  </a:txBody>
-                  <a:tcPr marL="101600" marR="101600" marT="50800" marB="50800" anchor="ctr">
-                    <a:lnL w="6350" cap="flat" cmpd="sng" algn="ctr">
-                      <a:solidFill>
-                        <a:srgbClr val="C9D2D8"/>
-                      </a:solidFill>
-                      <a:prstDash val="solid"/>
-                      <a:round/>
-                      <a:headEnd type="none" w="med" len="med"/>
-                      <a:tailEnd type="none" w="med" len="med"/>
-                    </a:lnL>
-                    <a:lnR w="6350" cap="flat" cmpd="sng" algn="ctr">
-                      <a:solidFill>
-                        <a:srgbClr val="C9D2D8"/>
-                      </a:solidFill>
-                      <a:prstDash val="solid"/>
-                      <a:round/>
-                      <a:headEnd type="none" w="med" len="med"/>
-                      <a:tailEnd type="none" w="med" len="med"/>
-                    </a:lnR>
-                    <a:lnT w="6350" cap="flat" cmpd="sng" algn="ctr">
-                      <a:solidFill>
-                        <a:srgbClr val="C9D2D8"/>
-                      </a:solidFill>
-                      <a:prstDash val="solid"/>
-                      <a:round/>
-                      <a:headEnd type="none" w="med" len="med"/>
-                      <a:tailEnd type="none" w="med" len="med"/>
-                    </a:lnT>
-                    <a:lnB w="6350" cap="flat" cmpd="sng" algn="ctr">
-                      <a:solidFill>
-                        <a:srgbClr val="C9D2D8"/>
-                      </a:solidFill>
-                      <a:prstDash val="solid"/>
-                      <a:round/>
-                      <a:headEnd type="none" w="med" len="med"/>
-                      <a:tailEnd type="none" w="med" len="med"/>
-                    </a:lnB>
-                    <a:solidFill>
-                      <a:srgbClr val="FFFFFF"/>
-                    </a:solidFill>
-                  </a:tcPr>
-                </a:tc>
-                <a:tc>
-                  <a:txBody>
-                    <a:bodyPr/>
-                    <a:lstStyle/>
-                    <a:p>
-                      <a:pPr algn="l" indent="0" marL="0">
-                        <a:buNone/>
-                      </a:pPr>
-                      <a:r>
-                        <a:rPr lang="en-US" sz="2100" dirty="0">
-                          <a:solidFill>
-                            <a:srgbClr val="1B2530"/>
-                          </a:solidFill>
-                          <a:latin typeface="Courier New" pitchFamily="34" charset="0"/>
-                          <a:ea typeface="Courier New" pitchFamily="34" charset="-122"/>
-                          <a:cs typeface="Courier New" pitchFamily="34" charset="-120"/>
-                        </a:rPr>
-                        <a:t>J, K, CK</a:t>
-                      </a:r>
-                      <a:endParaRPr lang="en-US" sz="2100" dirty="0">
-                        <a:latin typeface="Courier New" charset="0"/>
-                        <a:ea typeface="Courier New" charset="0"/>
-                        <a:cs typeface="Courier New" charset="0"/>
-                      </a:endParaRPr>
-                    </a:p>
-                  </a:txBody>
-                  <a:tcPr marL="101600" marR="101600" marT="50800" marB="50800" anchor="ctr">
-                    <a:lnL w="6350" cap="flat" cmpd="sng" algn="ctr">
-                      <a:solidFill>
-                        <a:srgbClr val="C9D2D8"/>
-                      </a:solidFill>
-                      <a:prstDash val="solid"/>
-                      <a:round/>
-                      <a:headEnd type="none" w="med" len="med"/>
-                      <a:tailEnd type="none" w="med" len="med"/>
-                    </a:lnL>
-                    <a:lnR w="6350" cap="flat" cmpd="sng" algn="ctr">
-                      <a:solidFill>
-                        <a:srgbClr val="C9D2D8"/>
-                      </a:solidFill>
-                      <a:prstDash val="solid"/>
-                      <a:round/>
-                      <a:headEnd type="none" w="med" len="med"/>
-                      <a:tailEnd type="none" w="med" len="med"/>
-                    </a:lnR>
-                    <a:lnT w="6350" cap="flat" cmpd="sng" algn="ctr">
-                      <a:solidFill>
-                        <a:srgbClr val="C9D2D8"/>
-                      </a:solidFill>
-                      <a:prstDash val="solid"/>
-                      <a:round/>
-                      <a:headEnd type="none" w="med" len="med"/>
-                      <a:tailEnd type="none" w="med" len="med"/>
-                    </a:lnT>
-                    <a:lnB w="6350" cap="flat" cmpd="sng" algn="ctr">
-                      <a:solidFill>
-                        <a:srgbClr val="C9D2D8"/>
-                      </a:solidFill>
-                      <a:prstDash val="solid"/>
-                      <a:round/>
-                      <a:headEnd type="none" w="med" len="med"/>
-                      <a:tailEnd type="none" w="med" len="med"/>
-                    </a:lnB>
-                    <a:solidFill>
-                      <a:srgbClr val="FFFFFF"/>
-                    </a:solidFill>
-                  </a:tcPr>
-                </a:tc>
-                <a:tc>
-                  <a:txBody>
-                    <a:bodyPr/>
-                    <a:lstStyle/>
-                    <a:p>
-                      <a:pPr algn="l" indent="0" marL="0">
-                        <a:buNone/>
-                      </a:pPr>
-                      <a:r>
-                        <a:rPr lang="en-US" sz="2100" dirty="0">
-                          <a:solidFill>
-                            <a:srgbClr val="1B2530"/>
-                          </a:solidFill>
-                          <a:latin typeface="Courier New" pitchFamily="34" charset="0"/>
-                          <a:ea typeface="Courier New" pitchFamily="34" charset="-122"/>
-                          <a:cs typeface="Courier New" pitchFamily="34" charset="-120"/>
-                        </a:rPr>
-                        <a:t>Q+ = J Q' + K' Q</a:t>
-                      </a:r>
-                      <a:endParaRPr lang="en-US" sz="2100" dirty="0">
-                        <a:latin typeface="Courier New" charset="0"/>
-                        <a:ea typeface="Courier New" charset="0"/>
-                        <a:cs typeface="Courier New" charset="0"/>
-                      </a:endParaRPr>
-                    </a:p>
-                  </a:txBody>
-                  <a:tcPr marL="101600" marR="101600" marT="50800" marB="50800" anchor="ctr">
-                    <a:lnL w="6350" cap="flat" cmpd="sng" algn="ctr">
-                      <a:solidFill>
-                        <a:srgbClr val="C9D2D8"/>
-                      </a:solidFill>
-                      <a:prstDash val="solid"/>
-                      <a:round/>
-                      <a:headEnd type="none" w="med" len="med"/>
-                      <a:tailEnd type="none" w="med" len="med"/>
-                    </a:lnL>
-                    <a:lnR w="6350" cap="flat" cmpd="sng" algn="ctr">
-                      <a:solidFill>
-                        <a:srgbClr val="C9D2D8"/>
-                      </a:solidFill>
-                      <a:prstDash val="solid"/>
-                      <a:round/>
-                      <a:headEnd type="none" w="med" len="med"/>
-                      <a:tailEnd type="none" w="med" len="med"/>
-                    </a:lnR>
-                    <a:lnT w="6350" cap="flat" cmpd="sng" algn="ctr">
-                      <a:solidFill>
-                        <a:srgbClr val="C9D2D8"/>
-                      </a:solidFill>
-                      <a:prstDash val="solid"/>
-                      <a:round/>
-                      <a:headEnd type="none" w="med" len="med"/>
-                      <a:tailEnd type="none" w="med" len="med"/>
-                    </a:lnT>
-                    <a:lnB w="6350" cap="flat" cmpd="sng" algn="ctr">
-                      <a:solidFill>
-                        <a:srgbClr val="C9D2D8"/>
-                      </a:solidFill>
-                      <a:prstDash val="solid"/>
-                      <a:round/>
-                      <a:headEnd type="none" w="med" len="med"/>
-                      <a:tailEnd type="none" w="med" len="med"/>
-                    </a:lnB>
-                    <a:solidFill>
-                      <a:srgbClr val="FFFFFF"/>
-                    </a:solidFill>
-                  </a:tcPr>
-                </a:tc>
-                <a:tc>
-                  <a:txBody>
-                    <a:bodyPr/>
-                    <a:lstStyle/>
-                    <a:p>
-                      <a:pPr algn="l" indent="0" marL="0">
-                        <a:buNone/>
-                      </a:pPr>
-                      <a:r>
-                        <a:rPr lang="en-US" sz="2100" dirty="0">
-                          <a:solidFill>
-                            <a:srgbClr val="1B2530"/>
-                          </a:solidFill>
-                          <a:latin typeface="Calibri" pitchFamily="34" charset="0"/>
-                          <a:ea typeface="Calibri" pitchFamily="34" charset="-122"/>
-                          <a:cs typeface="Calibri" pitchFamily="34" charset="-120"/>
-                        </a:rPr>
-                        <a:t>on the clock edge</a:t>
-                      </a:r>
-                      <a:endParaRPr lang="en-US" sz="2100" dirty="0">
-                        <a:latin typeface="Calibri" charset="0"/>
-                        <a:ea typeface="Calibri" charset="0"/>
-                        <a:cs typeface="Calibri" charset="0"/>
-                      </a:endParaRPr>
-                    </a:p>
-                  </a:txBody>
-                  <a:tcPr marL="101600" marR="101600" marT="50800" marB="50800" anchor="ctr">
-                    <a:lnL w="6350" cap="flat" cmpd="sng" algn="ctr">
-                      <a:solidFill>
-                        <a:srgbClr val="C9D2D8"/>
-                      </a:solidFill>
-                      <a:prstDash val="solid"/>
-                      <a:round/>
-                      <a:headEnd type="none" w="med" len="med"/>
-                      <a:tailEnd type="none" w="med" len="med"/>
-                    </a:lnL>
-                    <a:lnR w="6350" cap="flat" cmpd="sng" algn="ctr">
-                      <a:solidFill>
-                        <a:srgbClr val="C9D2D8"/>
-                      </a:solidFill>
-                      <a:prstDash val="solid"/>
-                      <a:round/>
-                      <a:headEnd type="none" w="med" len="med"/>
-                      <a:tailEnd type="none" w="med" len="med"/>
-                    </a:lnR>
-                    <a:lnT w="6350" cap="flat" cmpd="sng" algn="ctr">
-                      <a:solidFill>
-                        <a:srgbClr val="C9D2D8"/>
-                      </a:solidFill>
-                      <a:prstDash val="solid"/>
-                      <a:round/>
-                      <a:headEnd type="none" w="med" len="med"/>
-                      <a:tailEnd type="none" w="med" len="med"/>
-                    </a:lnT>
-                    <a:lnB w="6350" cap="flat" cmpd="sng" algn="ctr">
-                      <a:solidFill>
-                        <a:srgbClr val="C9D2D8"/>
-                      </a:solidFill>
-                      <a:prstDash val="solid"/>
-                      <a:round/>
-                      <a:headEnd type="none" w="med" len="med"/>
-                      <a:tailEnd type="none" w="med" len="med"/>
-                    </a:lnB>
-                    <a:solidFill>
-                      <a:srgbClr val="FFFFFF"/>
-                    </a:solidFill>
-                  </a:tcPr>
-                </a:tc>
-              </a:tr>
-              <a:tr h="0">
-                <a:tc>
-                  <a:txBody>
-                    <a:bodyPr/>
-                    <a:lstStyle/>
-                    <a:p>
-                      <a:pPr algn="l" indent="0" marL="0">
-                        <a:buNone/>
-                      </a:pPr>
-                      <a:r>
-                        <a:rPr lang="en-US" sz="2100" b="1" dirty="0">
-                          <a:solidFill>
-                            <a:srgbClr val="1B2530"/>
-                          </a:solidFill>
-                          <a:latin typeface="Calibri" pitchFamily="34" charset="0"/>
-                          <a:ea typeface="Calibri" pitchFamily="34" charset="-122"/>
-                          <a:cs typeface="Calibri" pitchFamily="34" charset="-120"/>
-                        </a:rPr>
-                        <a:t>D flip-flop</a:t>
-                      </a:r>
-                      <a:endParaRPr lang="en-US" sz="2100" dirty="0">
-                        <a:latin typeface="Calibri" charset="0"/>
-                        <a:ea typeface="Calibri" charset="0"/>
-                        <a:cs typeface="Calibri" charset="0"/>
-                      </a:endParaRPr>
-                    </a:p>
-                  </a:txBody>
-                  <a:tcPr marL="101600" marR="101600" marT="50800" marB="50800" anchor="ctr">
-                    <a:lnL w="6350" cap="flat" cmpd="sng" algn="ctr">
-                      <a:solidFill>
-                        <a:srgbClr val="C9D2D8"/>
-                      </a:solidFill>
-                      <a:prstDash val="solid"/>
-                      <a:round/>
-                      <a:headEnd type="none" w="med" len="med"/>
-                      <a:tailEnd type="none" w="med" len="med"/>
-                    </a:lnL>
-                    <a:lnR w="6350" cap="flat" cmpd="sng" algn="ctr">
-                      <a:solidFill>
-                        <a:srgbClr val="C9D2D8"/>
-                      </a:solidFill>
-                      <a:prstDash val="solid"/>
-                      <a:round/>
-                      <a:headEnd type="none" w="med" len="med"/>
-                      <a:tailEnd type="none" w="med" len="med"/>
-                    </a:lnR>
-                    <a:lnT w="6350" cap="flat" cmpd="sng" algn="ctr">
-                      <a:solidFill>
-                        <a:srgbClr val="C9D2D8"/>
-                      </a:solidFill>
-                      <a:prstDash val="solid"/>
-                      <a:round/>
-                      <a:headEnd type="none" w="med" len="med"/>
-                      <a:tailEnd type="none" w="med" len="med"/>
-                    </a:lnT>
-                    <a:lnB w="6350" cap="flat" cmpd="sng" algn="ctr">
-                      <a:solidFill>
-                        <a:srgbClr val="C9D2D8"/>
-                      </a:solidFill>
-                      <a:prstDash val="solid"/>
-                      <a:round/>
-                      <a:headEnd type="none" w="med" len="med"/>
-                      <a:tailEnd type="none" w="med" len="med"/>
-                    </a:lnB>
-                    <a:solidFill>
-                      <a:srgbClr val="EEF2F4"/>
-                    </a:solidFill>
-                  </a:tcPr>
-                </a:tc>
-                <a:tc>
-                  <a:txBody>
-                    <a:bodyPr/>
-                    <a:lstStyle/>
-                    <a:p>
-                      <a:pPr algn="l" indent="0" marL="0">
-                        <a:buNone/>
-                      </a:pPr>
-                      <a:r>
-                        <a:rPr lang="en-US" sz="2100" dirty="0">
-                          <a:solidFill>
-                            <a:srgbClr val="1B2530"/>
-                          </a:solidFill>
-                          <a:latin typeface="Courier New" pitchFamily="34" charset="0"/>
-                          <a:ea typeface="Courier New" pitchFamily="34" charset="-122"/>
-                          <a:cs typeface="Courier New" pitchFamily="34" charset="-120"/>
-                        </a:rPr>
-                        <a:t>D, CK</a:t>
-                      </a:r>
-                      <a:endParaRPr lang="en-US" sz="2100" dirty="0">
-                        <a:latin typeface="Courier New" charset="0"/>
-                        <a:ea typeface="Courier New" charset="0"/>
-                        <a:cs typeface="Courier New" charset="0"/>
-                      </a:endParaRPr>
-                    </a:p>
-                  </a:txBody>
-                  <a:tcPr marL="101600" marR="101600" marT="50800" marB="50800" anchor="ctr">
-                    <a:lnL w="6350" cap="flat" cmpd="sng" algn="ctr">
-                      <a:solidFill>
-                        <a:srgbClr val="C9D2D8"/>
-                      </a:solidFill>
-                      <a:prstDash val="solid"/>
-                      <a:round/>
-                      <a:headEnd type="none" w="med" len="med"/>
-                      <a:tailEnd type="none" w="med" len="med"/>
-                    </a:lnL>
-                    <a:lnR w="6350" cap="flat" cmpd="sng" algn="ctr">
-                      <a:solidFill>
-                        <a:srgbClr val="C9D2D8"/>
-                      </a:solidFill>
-                      <a:prstDash val="solid"/>
-                      <a:round/>
-                      <a:headEnd type="none" w="med" len="med"/>
-                      <a:tailEnd type="none" w="med" len="med"/>
-                    </a:lnR>
-                    <a:lnT w="6350" cap="flat" cmpd="sng" algn="ctr">
-                      <a:solidFill>
-                        <a:srgbClr val="C9D2D8"/>
-                      </a:solidFill>
-                      <a:prstDash val="solid"/>
-                      <a:round/>
-                      <a:headEnd type="none" w="med" len="med"/>
-                      <a:tailEnd type="none" w="med" len="med"/>
-                    </a:lnT>
-                    <a:lnB w="6350" cap="flat" cmpd="sng" algn="ctr">
-                      <a:solidFill>
-                        <a:srgbClr val="C9D2D8"/>
-                      </a:solidFill>
-                      <a:prstDash val="solid"/>
-                      <a:round/>
-                      <a:headEnd type="none" w="med" len="med"/>
-                      <a:tailEnd type="none" w="med" len="med"/>
-                    </a:lnB>
-                    <a:solidFill>
-                      <a:srgbClr val="EEF2F4"/>
-                    </a:solidFill>
-                  </a:tcPr>
-                </a:tc>
-                <a:tc>
-                  <a:txBody>
-                    <a:bodyPr/>
-                    <a:lstStyle/>
-                    <a:p>
-                      <a:pPr algn="l" indent="0" marL="0">
-                        <a:buNone/>
-                      </a:pPr>
-                      <a:r>
-                        <a:rPr lang="en-US" sz="2100" dirty="0">
-                          <a:solidFill>
-                            <a:srgbClr val="1B2530"/>
-                          </a:solidFill>
-                          <a:latin typeface="Courier New" pitchFamily="34" charset="0"/>
-                          <a:ea typeface="Courier New" pitchFamily="34" charset="-122"/>
-                          <a:cs typeface="Courier New" pitchFamily="34" charset="-120"/>
-                        </a:rPr>
-                        <a:t>Q+ = D</a:t>
-                      </a:r>
-                      <a:endParaRPr lang="en-US" sz="2100" dirty="0">
-                        <a:latin typeface="Courier New" charset="0"/>
-                        <a:ea typeface="Courier New" charset="0"/>
-                        <a:cs typeface="Courier New" charset="0"/>
-                      </a:endParaRPr>
-                    </a:p>
-                  </a:txBody>
-                  <a:tcPr marL="101600" marR="101600" marT="50800" marB="50800" anchor="ctr">
-                    <a:lnL w="6350" cap="flat" cmpd="sng" algn="ctr">
-                      <a:solidFill>
-                        <a:srgbClr val="C9D2D8"/>
-                      </a:solidFill>
-                      <a:prstDash val="solid"/>
-                      <a:round/>
-                      <a:headEnd type="none" w="med" len="med"/>
-                      <a:tailEnd type="none" w="med" len="med"/>
-                    </a:lnL>
-                    <a:lnR w="6350" cap="flat" cmpd="sng" algn="ctr">
-                      <a:solidFill>
-                        <a:srgbClr val="C9D2D8"/>
-                      </a:solidFill>
-                      <a:prstDash val="solid"/>
-                      <a:round/>
-                      <a:headEnd type="none" w="med" len="med"/>
-                      <a:tailEnd type="none" w="med" len="med"/>
-                    </a:lnR>
-                    <a:lnT w="6350" cap="flat" cmpd="sng" algn="ctr">
-                      <a:solidFill>
-                        <a:srgbClr val="C9D2D8"/>
-                      </a:solidFill>
-                      <a:prstDash val="solid"/>
-                      <a:round/>
-                      <a:headEnd type="none" w="med" len="med"/>
-                      <a:tailEnd type="none" w="med" len="med"/>
-                    </a:lnT>
-                    <a:lnB w="6350" cap="flat" cmpd="sng" algn="ctr">
-                      <a:solidFill>
-                        <a:srgbClr val="C9D2D8"/>
-                      </a:solidFill>
-                      <a:prstDash val="solid"/>
-                      <a:round/>
-                      <a:headEnd type="none" w="med" len="med"/>
-                      <a:tailEnd type="none" w="med" len="med"/>
-                    </a:lnB>
-                    <a:solidFill>
-                      <a:srgbClr val="EEF2F4"/>
-                    </a:solidFill>
-                  </a:tcPr>
-                </a:tc>
-                <a:tc>
-                  <a:txBody>
-                    <a:bodyPr/>
-                    <a:lstStyle/>
-                    <a:p>
-                      <a:pPr algn="l" indent="0" marL="0">
-                        <a:buNone/>
-                      </a:pPr>
-                      <a:r>
-                        <a:rPr lang="en-US" sz="2100" dirty="0">
-                          <a:solidFill>
-                            <a:srgbClr val="1B2530"/>
-                          </a:solidFill>
-                          <a:latin typeface="Calibri" pitchFamily="34" charset="0"/>
-                          <a:ea typeface="Calibri" pitchFamily="34" charset="-122"/>
-                          <a:cs typeface="Calibri" pitchFamily="34" charset="-120"/>
-                        </a:rPr>
-                        <a:t>on the clock edge</a:t>
-                      </a:r>
-                      <a:endParaRPr lang="en-US" sz="2100" dirty="0">
-                        <a:latin typeface="Calibri" charset="0"/>
-                        <a:ea typeface="Calibri" charset="0"/>
-                        <a:cs typeface="Calibri" charset="0"/>
-                      </a:endParaRPr>
-                    </a:p>
-                  </a:txBody>
-                  <a:tcPr marL="101600" marR="101600" marT="50800" marB="50800" anchor="ctr">
-                    <a:lnL w="6350" cap="flat" cmpd="sng" algn="ctr">
-                      <a:solidFill>
-                        <a:srgbClr val="C9D2D8"/>
-                      </a:solidFill>
-                      <a:prstDash val="solid"/>
-                      <a:round/>
-                      <a:headEnd type="none" w="med" len="med"/>
-                      <a:tailEnd type="none" w="med" len="med"/>
-                    </a:lnL>
-                    <a:lnR w="6350" cap="flat" cmpd="sng" algn="ctr">
-                      <a:solidFill>
-                        <a:srgbClr val="C9D2D8"/>
-                      </a:solidFill>
-                      <a:prstDash val="solid"/>
-                      <a:round/>
-                      <a:headEnd type="none" w="med" len="med"/>
-                      <a:tailEnd type="none" w="med" len="med"/>
-                    </a:lnR>
-                    <a:lnT w="6350" cap="flat" cmpd="sng" algn="ctr">
-                      <a:solidFill>
-                        <a:srgbClr val="C9D2D8"/>
-                      </a:solidFill>
-                      <a:prstDash val="solid"/>
-                      <a:round/>
-                      <a:headEnd type="none" w="med" len="med"/>
-                      <a:tailEnd type="none" w="med" len="med"/>
-                    </a:lnT>
-                    <a:lnB w="6350" cap="flat" cmpd="sng" algn="ctr">
-                      <a:solidFill>
-                        <a:srgbClr val="C9D2D8"/>
-                      </a:solidFill>
-                      <a:prstDash val="solid"/>
-                      <a:round/>
-                      <a:headEnd type="none" w="med" len="med"/>
-                      <a:tailEnd type="none" w="med" len="med"/>
-                    </a:lnB>
-                    <a:solidFill>
-                      <a:srgbClr val="EEF2F4"/>
-                    </a:solidFill>
-                  </a:tcPr>
-                </a:tc>
-              </a:tr>
-              <a:tr h="0">
-                <a:tc>
-                  <a:txBody>
-                    <a:bodyPr/>
-                    <a:lstStyle/>
-                    <a:p>
-                      <a:pPr algn="l" indent="0" marL="0">
-                        <a:buNone/>
-                      </a:pPr>
-                      <a:r>
-                        <a:rPr lang="en-US" sz="2100" b="1" dirty="0">
-                          <a:solidFill>
-                            <a:srgbClr val="1B2530"/>
-                          </a:solidFill>
-                          <a:latin typeface="Calibri" pitchFamily="34" charset="0"/>
-                          <a:ea typeface="Calibri" pitchFamily="34" charset="-122"/>
-                          <a:cs typeface="Calibri" pitchFamily="34" charset="-120"/>
-                        </a:rPr>
-                        <a:t>T flip-flop</a:t>
-                      </a:r>
-                      <a:endParaRPr lang="en-US" sz="2100" dirty="0">
-                        <a:latin typeface="Calibri" charset="0"/>
-                        <a:ea typeface="Calibri" charset="0"/>
-                        <a:cs typeface="Calibri" charset="0"/>
-                      </a:endParaRPr>
-                    </a:p>
-                  </a:txBody>
-                  <a:tcPr marL="101600" marR="101600" marT="50800" marB="50800" anchor="ctr">
-                    <a:lnL w="6350" cap="flat" cmpd="sng" algn="ctr">
-                      <a:solidFill>
-                        <a:srgbClr val="C9D2D8"/>
-                      </a:solidFill>
-                      <a:prstDash val="solid"/>
-                      <a:round/>
-                      <a:headEnd type="none" w="med" len="med"/>
-                      <a:tailEnd type="none" w="med" len="med"/>
-                    </a:lnL>
-                    <a:lnR w="6350" cap="flat" cmpd="sng" algn="ctr">
-                      <a:solidFill>
-                        <a:srgbClr val="C9D2D8"/>
-                      </a:solidFill>
-                      <a:prstDash val="solid"/>
-                      <a:round/>
-                      <a:headEnd type="none" w="med" len="med"/>
-                      <a:tailEnd type="none" w="med" len="med"/>
-                    </a:lnR>
-                    <a:lnT w="6350" cap="flat" cmpd="sng" algn="ctr">
-                      <a:solidFill>
-                        <a:srgbClr val="C9D2D8"/>
-                      </a:solidFill>
-                      <a:prstDash val="solid"/>
-                      <a:round/>
-                      <a:headEnd type="none" w="med" len="med"/>
-                      <a:tailEnd type="none" w="med" len="med"/>
-                    </a:lnT>
-                    <a:lnB w="6350" cap="flat" cmpd="sng" algn="ctr">
-                      <a:solidFill>
-                        <a:srgbClr val="C9D2D8"/>
-                      </a:solidFill>
-                      <a:prstDash val="solid"/>
-                      <a:round/>
-                      <a:headEnd type="none" w="med" len="med"/>
-                      <a:tailEnd type="none" w="med" len="med"/>
-                    </a:lnB>
-                    <a:solidFill>
-                      <a:srgbClr val="FFFFFF"/>
-                    </a:solidFill>
-                  </a:tcPr>
-                </a:tc>
-                <a:tc>
-                  <a:txBody>
-                    <a:bodyPr/>
-                    <a:lstStyle/>
-                    <a:p>
-                      <a:pPr algn="l" indent="0" marL="0">
-                        <a:buNone/>
-                      </a:pPr>
-                      <a:r>
-                        <a:rPr lang="en-US" sz="2100" dirty="0">
-                          <a:solidFill>
-                            <a:srgbClr val="1B2530"/>
-                          </a:solidFill>
-                          <a:latin typeface="Courier New" pitchFamily="34" charset="0"/>
-                          <a:ea typeface="Courier New" pitchFamily="34" charset="-122"/>
-                          <a:cs typeface="Courier New" pitchFamily="34" charset="-120"/>
-                        </a:rPr>
-                        <a:t>T, CK</a:t>
-                      </a:r>
-                      <a:endParaRPr lang="en-US" sz="2100" dirty="0">
-                        <a:latin typeface="Courier New" charset="0"/>
-                        <a:ea typeface="Courier New" charset="0"/>
-                        <a:cs typeface="Courier New" charset="0"/>
-                      </a:endParaRPr>
-                    </a:p>
-                  </a:txBody>
-                  <a:tcPr marL="101600" marR="101600" marT="50800" marB="50800" anchor="ctr">
-                    <a:lnL w="6350" cap="flat" cmpd="sng" algn="ctr">
-                      <a:solidFill>
-                        <a:srgbClr val="C9D2D8"/>
-                      </a:solidFill>
-                      <a:prstDash val="solid"/>
-                      <a:round/>
-                      <a:headEnd type="none" w="med" len="med"/>
-                      <a:tailEnd type="none" w="med" len="med"/>
-                    </a:lnL>
-                    <a:lnR w="6350" cap="flat" cmpd="sng" algn="ctr">
-                      <a:solidFill>
-                        <a:srgbClr val="C9D2D8"/>
-                      </a:solidFill>
-                      <a:prstDash val="solid"/>
-                      <a:round/>
-                      <a:headEnd type="none" w="med" len="med"/>
-                      <a:tailEnd type="none" w="med" len="med"/>
-                    </a:lnR>
-                    <a:lnT w="6350" cap="flat" cmpd="sng" algn="ctr">
-                      <a:solidFill>
-                        <a:srgbClr val="C9D2D8"/>
-                      </a:solidFill>
-                      <a:prstDash val="solid"/>
-                      <a:round/>
-                      <a:headEnd type="none" w="med" len="med"/>
-                      <a:tailEnd type="none" w="med" len="med"/>
-                    </a:lnT>
-                    <a:lnB w="6350" cap="flat" cmpd="sng" algn="ctr">
-                      <a:solidFill>
-                        <a:srgbClr val="C9D2D8"/>
-                      </a:solidFill>
-                      <a:prstDash val="solid"/>
-                      <a:round/>
-                      <a:headEnd type="none" w="med" len="med"/>
-                      <a:tailEnd type="none" w="med" len="med"/>
-                    </a:lnB>
-                    <a:solidFill>
-                      <a:srgbClr val="FFFFFF"/>
-                    </a:solidFill>
-                  </a:tcPr>
-                </a:tc>
-                <a:tc>
-                  <a:txBody>
-                    <a:bodyPr/>
-                    <a:lstStyle/>
-                    <a:p>
-                      <a:pPr algn="l" indent="0" marL="0">
-                        <a:buNone/>
-                      </a:pPr>
-                      <a:r>
-                        <a:rPr lang="en-US" sz="2100" dirty="0">
-                          <a:solidFill>
-                            <a:srgbClr val="1B2530"/>
-                          </a:solidFill>
-                          <a:latin typeface="Courier New" pitchFamily="34" charset="0"/>
-                          <a:ea typeface="Courier New" pitchFamily="34" charset="-122"/>
-                          <a:cs typeface="Courier New" pitchFamily="34" charset="-120"/>
-                        </a:rPr>
-                        <a:t>Q+ = T xor Q</a:t>
-                      </a:r>
-                      <a:endParaRPr lang="en-US" sz="2100" dirty="0">
-                        <a:latin typeface="Courier New" charset="0"/>
-                        <a:ea typeface="Courier New" charset="0"/>
-                        <a:cs typeface="Courier New" charset="0"/>
-                      </a:endParaRPr>
-                    </a:p>
-                  </a:txBody>
-                  <a:tcPr marL="101600" marR="101600" marT="50800" marB="50800" anchor="ctr">
-                    <a:lnL w="6350" cap="flat" cmpd="sng" algn="ctr">
-                      <a:solidFill>
-                        <a:srgbClr val="C9D2D8"/>
-                      </a:solidFill>
-                      <a:prstDash val="solid"/>
-                      <a:round/>
-                      <a:headEnd type="none" w="med" len="med"/>
-                      <a:tailEnd type="none" w="med" len="med"/>
-                    </a:lnL>
-                    <a:lnR w="6350" cap="flat" cmpd="sng" algn="ctr">
-                      <a:solidFill>
-                        <a:srgbClr val="C9D2D8"/>
-                      </a:solidFill>
-                      <a:prstDash val="solid"/>
-                      <a:round/>
-                      <a:headEnd type="none" w="med" len="med"/>
-                      <a:tailEnd type="none" w="med" len="med"/>
-                    </a:lnR>
-                    <a:lnT w="6350" cap="flat" cmpd="sng" algn="ctr">
-                      <a:solidFill>
-                        <a:srgbClr val="C9D2D8"/>
-                      </a:solidFill>
-                      <a:prstDash val="solid"/>
-                      <a:round/>
-                      <a:headEnd type="none" w="med" len="med"/>
-                      <a:tailEnd type="none" w="med" len="med"/>
-                    </a:lnT>
-                    <a:lnB w="6350" cap="flat" cmpd="sng" algn="ctr">
-                      <a:solidFill>
-                        <a:srgbClr val="C9D2D8"/>
-                      </a:solidFill>
-                      <a:prstDash val="solid"/>
-                      <a:round/>
-                      <a:headEnd type="none" w="med" len="med"/>
-                      <a:tailEnd type="none" w="med" len="med"/>
-                    </a:lnB>
-                    <a:solidFill>
-                      <a:srgbClr val="FFFFFF"/>
-                    </a:solidFill>
-                  </a:tcPr>
-                </a:tc>
-                <a:tc>
-                  <a:txBody>
-                    <a:bodyPr/>
-                    <a:lstStyle/>
-                    <a:p>
-                      <a:pPr algn="l" indent="0" marL="0">
-                        <a:buNone/>
-                      </a:pPr>
-                      <a:r>
-                        <a:rPr lang="en-US" sz="2100" dirty="0">
-                          <a:solidFill>
-                            <a:srgbClr val="1B2530"/>
-                          </a:solidFill>
-                          <a:latin typeface="Calibri" pitchFamily="34" charset="0"/>
-                          <a:ea typeface="Calibri" pitchFamily="34" charset="-122"/>
-                          <a:cs typeface="Calibri" pitchFamily="34" charset="-120"/>
-                        </a:rPr>
-                        <a:t>on the clock edge</a:t>
-                      </a:r>
-                      <a:endParaRPr lang="en-US" sz="2100" dirty="0">
-                        <a:latin typeface="Calibri" charset="0"/>
-                        <a:ea typeface="Calibri" charset="0"/>
-                        <a:cs typeface="Calibri" charset="0"/>
-                      </a:endParaRPr>
-                    </a:p>
-                  </a:txBody>
-                  <a:tcPr marL="101600" marR="101600" marT="50800" marB="50800" anchor="ctr">
-                    <a:lnL w="6350" cap="flat" cmpd="sng" algn="ctr">
-                      <a:solidFill>
-                        <a:srgbClr val="C9D2D8"/>
-                      </a:solidFill>
-                      <a:prstDash val="solid"/>
-                      <a:round/>
-                      <a:headEnd type="none" w="med" len="med"/>
-                      <a:tailEnd type="none" w="med" len="med"/>
-                    </a:lnL>
-                    <a:lnR w="6350" cap="flat" cmpd="sng" algn="ctr">
-                      <a:solidFill>
-                        <a:srgbClr val="C9D2D8"/>
-                      </a:solidFill>
-                      <a:prstDash val="solid"/>
-                      <a:round/>
-                      <a:headEnd type="none" w="med" len="med"/>
-                      <a:tailEnd type="none" w="med" len="med"/>
-                    </a:lnR>
-                    <a:lnT w="6350" cap="flat" cmpd="sng" algn="ctr">
-                      <a:solidFill>
-                        <a:srgbClr val="C9D2D8"/>
-                      </a:solidFill>
-                      <a:prstDash val="solid"/>
-                      <a:round/>
-                      <a:headEnd type="none" w="med" len="med"/>
-                      <a:tailEnd type="none" w="med" len="med"/>
-                    </a:lnT>
-                    <a:lnB w="6350" cap="flat" cmpd="sng" algn="ctr">
-                      <a:solidFill>
-                        <a:srgbClr val="C9D2D8"/>
-                      </a:solidFill>
-                      <a:prstDash val="solid"/>
-                      <a:round/>
-                      <a:headEnd type="none" w="med" len="med"/>
-                      <a:tailEnd type="none" w="med" len="med"/>
-                    </a:lnB>
-                    <a:solidFill>
-                      <a:srgbClr val="FFFFFF"/>
-                    </a:solidFill>
-                  </a:tcPr>
-                </a:tc>
-              </a:tr>
-            </a:tbl>
-          </a:graphicData>
-        </a:graphic>
-      </p:graphicFrame>
+      <p:sp>
+        <p:nvSpPr>
+          <p:cNvPr id="3" name="Shape 1"/>
+          <p:cNvSpPr/>
+          <p:nvPr/>
+        </p:nvSpPr>
+        <p:spPr>
+          <a:xfrm>
+            <a:off x="548640" y="1417320"/>
+            <a:ext cx="11094415" cy="3246120"/>
+          </a:xfrm>
+          <a:prstGeom prst="roundRect">
+            <a:avLst>
+              <a:gd name="adj" fmla="val 2254"/>
+            </a:avLst>
+          </a:prstGeom>
+          <a:solidFill>
+            <a:srgbClr val="EEF2F4"/>
+          </a:solidFill>
+          <a:ln w="12700">
+            <a:solidFill>
+              <a:srgbClr val="EEF2F4"/>
+            </a:solidFill>
+            <a:prstDash val="solid"/>
+          </a:ln>
+        </p:spPr>
+      </p:sp>
+      <p:pic>
+        <p:nvPicPr>
+          <p:cNvPr id="5" name="Image 0" descr="preencoded.png">    </p:cNvPr>
+          <p:cNvPicPr>
+            <a:picLocks noChangeAspect="1"/>
+          </p:cNvPicPr>
+          <p:nvPr/>
+        </p:nvPicPr>
+        <p:blipFill>
+          <a:blip r:embed="rId1"/>
+          <a:stretch>
+            <a:fillRect/>
+          </a:stretch>
+        </p:blipFill>
+        <p:spPr>
+          <a:xfrm>
+            <a:off x="775328" y="1463040"/>
+            <a:ext cx="10641040" cy="3154680"/>
+          </a:xfrm>
+          <a:prstGeom prst="rect">
+            <a:avLst/>
+          </a:prstGeom>
+        </p:spPr>
+      </p:pic>
+      <p:sp>
+        <p:nvSpPr>
+          <p:cNvPr id="6" name="Shape 2"/>
+          <p:cNvSpPr/>
+          <p:nvPr/>
+        </p:nvSpPr>
+        <p:spPr>
+          <a:xfrm>
+            <a:off x="548640" y="4868291"/>
+            <a:ext cx="146304" cy="146304"/>
+          </a:xfrm>
+          <a:prstGeom prst="rect">
+            <a:avLst/>
+          </a:prstGeom>
+          <a:solidFill>
+            <a:srgbClr val="0E7C86"/>
+          </a:solidFill>
+          <a:ln w="12700">
+            <a:solidFill>
+              <a:srgbClr val="0E7C86"/>
+            </a:solidFill>
+            <a:prstDash val="solid"/>
+          </a:ln>
+        </p:spPr>
+      </p:sp>
+      <p:sp>
+        <p:nvSpPr>
+          <p:cNvPr id="7" name="Text 3"/>
+          <p:cNvSpPr txBox="1"/>
+          <p:nvPr/>
+        </p:nvSpPr>
+        <p:spPr>
+          <a:xfrm>
+            <a:off x="932688" y="4800600"/>
+            <a:ext cx="10710367" cy="526796"/>
+          </a:xfrm>
+          <a:prstGeom prst="rect">
+            <a:avLst/>
+          </a:prstGeom>
+          <a:noFill/>
+          <a:ln/>
+        </p:spPr>
+        <p:txBody>
+          <a:bodyPr wrap="square" lIns="0" tIns="0" rIns="0" bIns="0" rtlCol="0" anchor="t"/>
+          <a:lstStyle/>
+          <a:p>
+            <a:pPr indent="0" marL="0">
+              <a:spcAft>
+                <a:spcPts val="200"/>
+              </a:spcAft>
+              <a:buNone/>
+            </a:pPr>
+            <a:r>
+              <a:rPr lang="en-US" sz="1700" dirty="0">
+                <a:solidFill>
+                  <a:srgbClr val="1B2530"/>
+                </a:solidFill>
+                <a:latin typeface="Calibri" pitchFamily="34" charset="0"/>
+                <a:ea typeface="Calibri" pitchFamily="34" charset="-122"/>
+                <a:cs typeface="Calibri" pitchFamily="34" charset="-120"/>
+              </a:rPr>
+              <a:t>The D latch follows D for the whole time the clock is high, and holds the last value when the clock goes low</a:t>
+            </a:r>
+            <a:endParaRPr lang="en-US" sz="1700" dirty="0"/>
+          </a:p>
+        </p:txBody>
+      </p:sp>
+      <p:sp>
+        <p:nvSpPr>
+          <p:cNvPr id="8" name="Shape 4"/>
+          <p:cNvSpPr/>
+          <p:nvPr/>
+        </p:nvSpPr>
+        <p:spPr>
+          <a:xfrm>
+            <a:off x="548640" y="5554091"/>
+            <a:ext cx="146304" cy="146304"/>
+          </a:xfrm>
+          <a:prstGeom prst="rect">
+            <a:avLst/>
+          </a:prstGeom>
+          <a:solidFill>
+            <a:srgbClr val="C7791B"/>
+          </a:solidFill>
+          <a:ln w="12700">
+            <a:solidFill>
+              <a:srgbClr val="C7791B"/>
+            </a:solidFill>
+            <a:prstDash val="solid"/>
+          </a:ln>
+        </p:spPr>
+      </p:sp>
+      <p:sp>
+        <p:nvSpPr>
+          <p:cNvPr id="9" name="Text 5"/>
+          <p:cNvSpPr txBox="1"/>
+          <p:nvPr/>
+        </p:nvSpPr>
+        <p:spPr>
+          <a:xfrm>
+            <a:off x="932688" y="5486400"/>
+            <a:ext cx="10710367" cy="263398"/>
+          </a:xfrm>
+          <a:prstGeom prst="rect">
+            <a:avLst/>
+          </a:prstGeom>
+          <a:noFill/>
+          <a:ln/>
+        </p:spPr>
+        <p:txBody>
+          <a:bodyPr wrap="square" lIns="0" tIns="0" rIns="0" bIns="0" rtlCol="0" anchor="t"/>
+          <a:lstStyle/>
+          <a:p>
+            <a:pPr indent="0" marL="0">
+              <a:spcAft>
+                <a:spcPts val="200"/>
+              </a:spcAft>
+              <a:buNone/>
+            </a:pPr>
+            <a:r>
+              <a:rPr lang="en-US" sz="1700" dirty="0">
+                <a:solidFill>
+                  <a:srgbClr val="1B2530"/>
+                </a:solidFill>
+                <a:latin typeface="Calibri" pitchFamily="34" charset="0"/>
+                <a:ea typeface="Calibri" pitchFamily="34" charset="-122"/>
+                <a:cs typeface="Calibri" pitchFamily="34" charset="-120"/>
+              </a:rPr>
+              <a:t>The D flip-flop looks at D only on the rising edge: short pulses between two edges are ignored</a:t>
+            </a:r>
+            <a:endParaRPr lang="en-US" sz="1700" dirty="0"/>
+          </a:p>
+        </p:txBody>
+      </p:sp>
+      <p:sp>
+        <p:nvSpPr>
+          <p:cNvPr id="10" name="Shape 6"/>
+          <p:cNvSpPr/>
+          <p:nvPr/>
+        </p:nvSpPr>
+        <p:spPr>
+          <a:xfrm>
+            <a:off x="548640" y="5976493"/>
+            <a:ext cx="146304" cy="146304"/>
+          </a:xfrm>
+          <a:prstGeom prst="rect">
+            <a:avLst/>
+          </a:prstGeom>
+          <a:solidFill>
+            <a:srgbClr val="0E7C86"/>
+          </a:solidFill>
+          <a:ln w="12700">
+            <a:solidFill>
+              <a:srgbClr val="0E7C86"/>
+            </a:solidFill>
+            <a:prstDash val="solid"/>
+          </a:ln>
+        </p:spPr>
+      </p:sp>
+      <p:sp>
+        <p:nvSpPr>
+          <p:cNvPr id="11" name="Text 7"/>
+          <p:cNvSpPr txBox="1"/>
+          <p:nvPr/>
+        </p:nvSpPr>
+        <p:spPr>
+          <a:xfrm>
+            <a:off x="932688" y="5908802"/>
+            <a:ext cx="10710367" cy="263398"/>
+          </a:xfrm>
+          <a:prstGeom prst="rect">
+            <a:avLst/>
+          </a:prstGeom>
+          <a:noFill/>
+          <a:ln/>
+        </p:spPr>
+        <p:txBody>
+          <a:bodyPr wrap="square" lIns="0" tIns="0" rIns="0" bIns="0" rtlCol="0" anchor="t"/>
+          <a:lstStyle/>
+          <a:p>
+            <a:pPr indent="0" marL="0">
+              <a:spcAft>
+                <a:spcPts val="200"/>
+              </a:spcAft>
+              <a:buNone/>
+            </a:pPr>
+            <a:r>
+              <a:rPr lang="en-US" sz="1700" dirty="0">
+                <a:solidFill>
+                  <a:srgbClr val="1B2530"/>
+                </a:solidFill>
+                <a:latin typeface="Calibri" pitchFamily="34" charset="0"/>
+                <a:ea typeface="Calibri" pitchFamily="34" charset="-122"/>
+                <a:cs typeface="Calibri" pitchFamily="34" charset="-120"/>
+              </a:rPr>
+              <a:t>The flip-flop output is steady for a whole period: this is what a state register needs</a:t>
+            </a:r>
+            <a:endParaRPr lang="en-US" sz="1700" dirty="0"/>
+          </a:p>
+        </p:txBody>
+      </p:sp>
       <p:sp>
         <p:nvSpPr>
           <p:cNvPr id="25" name="Slide Number Placeholder 0"/>

--- a/en/slides/13-Computer_Architecture-Sequential_Machines.pptx
+++ b/en/slides/13-Computer_Architecture-Sequential_Machines.pptx
@@ -126,19 +126,19 @@
   <p:extLst>
     <p:ext uri="{521415D9-36F7-43E2-AB2F-B90AF26B5E84}">
       <p14:sectionLst xmlns:p14="http://schemas.microsoft.com/office/powerpoint/2010/main">
-        <p14:section name="Opening" id="{6e069c56-f527-8306-4732-055a642540a3}">
+        <p14:section name="Opening" id="{5c09e7f5-f37c-2563-9c2e-891b1e1279ee}">
           <p14:sldIdLst>
             <p14:sldId id="256"/>
             <p14:sldId id="257"/>
           </p14:sldIdLst>
         </p14:section>
-        <p14:section name="Time and state" id="{8efa21a8-df3e-0968-684c-a83abfe0ec47}">
+        <p14:section name="Time and state" id="{a5366134-142d-216a-6ef9-8328891ead2f}">
           <p14:sldIdLst>
             <p14:sldId id="258"/>
             <p14:sldId id="259"/>
           </p14:sldIdLst>
         </p14:section>
-        <p14:section name="Finite-state machines" id="{36c782ff-9e16-3ff5-d600-03e7d05bce81}">
+        <p14:section name="Finite-state machines" id="{0bf2711b-4d94-bf7c-73a6-6d814977bcf5}">
           <p14:sldIdLst>
             <p14:sldId id="260"/>
             <p14:sldId id="261"/>
@@ -146,7 +146,7 @@
             <p14:sldId id="263"/>
           </p14:sldIdLst>
         </p14:section>
-        <p14:section name="Latches" id="{93e7f4bf-00fb-1348-eb6a-8429bc1583c8}">
+        <p14:section name="Latches" id="{3f78aab7-c5c7-f15b-efb3-323efd5d4602}">
           <p14:sldIdLst>
             <p14:sldId id="264"/>
             <p14:sldId id="265"/>
@@ -155,13 +155,13 @@
             <p14:sldId id="268"/>
           </p14:sldIdLst>
         </p14:section>
-        <p14:section name="Flip-flops" id="{457d8237-dcad-1695-d018-0580b1f77a19}">
+        <p14:section name="Flip-flops" id="{7f7415f0-d982-66ff-513c-0e8c4efbe36c}">
           <p14:sldIdLst>
             <p14:sldId id="269"/>
             <p14:sldId id="270"/>
           </p14:sldIdLst>
         </p14:section>
-        <p14:section name="Back to the machine" id="{06e07fd4-2782-4061-47d8-22181cc6a82b}">
+        <p14:section name="Back to the machine" id="{7a9facd9-1f92-b3b7-75fc-5297434efbef}">
           <p14:sldIdLst>
             <p14:sldId id="271"/>
             <p14:sldId id="272"/>
@@ -575,6 +575,8 @@
             <a:r>
               <a:rPr lang="en-US" dirty="0"/>
               <a:t>The third block of the course begins: state and memory. The machines of Lecture 11 had no memory: the same inputs always gave the same outputs. A computer, however, remembers: a counter survives from one frame to the next, a game knows whether it is showing the title or the playfield. This lecture introduces time and state, the model that describes every circuit with memory, and the elementary memories, latches and flip-flops, from which the registers of the processor are built.
+Learning status: UNDERSTAND NOW, by the end of this lecture you explain it, trace it and apply it on your own; USE NOW, you follow and use the recipe today; how it works inside is explained later, or is not part of the course; UNDERSTAND LATER, recognise the name and what it is for; a later lecture explains it. A slide without a badge is context: a story, an example, a question, an exercise.
+Learning status of this lecture. UNDERSTAND NOW: finite-state machines; the clock; latches and flip-flops; registers as flip-flops. USE NOW: the complete program, the PRG32 tools (used, not studied, in this course). UNDERSTAND LATER: nothing. A slide without a badge is context: a story, an example, a question, an exercise.
 For the lecturer: The quotation is translated back from the Italian version used in the original deck. Spiral: a game with a title screen is a finite-state machine written in assembly; the lecture then builds the theory (time, state, Mealy and Moore), the memory elements (latches and flip-flops), and returns to the registers and the program counter of RISC-V.</a:t>
             </a:r>
             <a:endParaRPr lang="en-US" dirty="0"/>
@@ -664,6 +666,7 @@
             <a:r>
               <a:rPr lang="en-US" dirty="0"/>
               <a:t>The latch in time. S goes to 1, and after the delay of the gates Q becomes 1. Then S returns to 0 and nothing happens: the feedback keeps Q at 1. This flat stretch is the memory. Later R goes to 1, Q returns to 0, and it stays there when R returns to 0. Follow the four marked instants on the drawing with the circuit of the previous slide in front of you, working out the output of each gate.
+UNDERSTAND NOW: latches and flip-flops.
 For the lecturer: Diagramma temporale. The original deck traced each of these four steps gate by gate over a dozen slides; replay them on the board with the circuit of the previous slide. The latch is a Moore automaton: its output is its state.</a:t>
             </a:r>
             <a:endParaRPr lang="en-US" dirty="0"/>
@@ -753,6 +756,7 @@
             <a:r>
               <a:rPr lang="en-US" dirty="0"/>
               <a:t>With S and R both at 1, both NOR gates output 0, so Q and its complement are no longer complementary. Worse: if the two inputs then return to 0 together, the gates race against each other, and the final state depends on which is faster. The result is unpredictable, and the latch may even oscillate. Whoever uses an SR latch must guarantee that S and R are never 1 together. The JK and D elements were invented to remove this problem at the root.
+UNDERSTAND NOW: latches and flip-flops.
 For the lecturer: The conclusions of the original deck swapped set and reset on one slide: set gives Q = 1, reset gives Q = 0.</a:t>
             </a:r>
             <a:endParaRPr lang="en-US" dirty="0"/>
@@ -842,6 +846,7 @@
             <a:r>
               <a:rPr lang="en-US" dirty="0"/>
               <a:t>In an asynchronous circuit the outputs may change whenever an input changes. In a synchronous one the clock decides when. To make the SR latch synchronous, S and R pass through two AND gates together with the clock. When the clock is 0 both gates give 0 and the latch cannot change; when the clock is 1 it behaves like the plain latch. The clock decides when the inputs are listened to.
+UNDERSTAND NOW: latches and flip-flops.
 For the lecturer: Latch sincroni e asincroni. A simulator is suggested in the original deck: de-iitr.vlabs.ac.in/exp/truth-tables-flip-flops.</a:t>
             </a:r>
             <a:endParaRPr lang="en-US" dirty="0"/>
@@ -931,6 +936,7 @@
             <a:r>
               <a:rPr lang="en-US" dirty="0"/>
               <a:t>Two improvements of the latch. In the JK latch the outputs are fed back to the input gates, so that the internal set and reset can never be 1 together; the combination J = K = 1, instead of being forbidden, inverts the output: it toggles. The D latch has a single input: D goes to set and its negation to reset, so the output simply takes the value of D while the clock is active. D stands for delay, or data.
+UNDERSTAND NOW: latches and flip-flops.
 For the lecturer: JK: the outputs are fed back to the input gates, S = J . Q' and R = K . Q; since Q and Q' are complementary, S and R can never both be 1. D: a single input goes to S and, through an inverter, to R, so only the cases S = 0, R = 1 and S = 1, R = 0 are possible.</a:t>
             </a:r>
             <a:endParaRPr lang="en-US" dirty="0"/>
@@ -1020,6 +1026,7 @@
             <a:r>
               <a:rPr lang="en-US" dirty="0"/>
               <a:t>The master-slave flip-flop is made of two latches in series, controlled by opposite levels of the clock. When the clock is 0 the master is open and follows the input, while the slave is closed. When the clock passes to 1 the master closes, keeping what it had, and the slave opens and shows it. The two are never transparent together, so the input can never run straight through to the output. The effect is that the output changes only at the rising edge: the flip-flop is edge-triggered.
+UNDERSTAND NOW: latches and flip-flops.
 For the lecturer: Flip-flop master-slave. The original deck showed the JK version, built from two clocked JK latches; the D version is the one used in the registers of a processor.</a:t>
             </a:r>
             <a:endParaRPr lang="en-US" dirty="0"/>
@@ -1109,6 +1116,7 @@
             <a:r>
               <a:rPr lang="en-US" dirty="0"/>
               <a:t>The difference, seen on the waveforms. The clock and the input D are the same for both. The output of the latch follows D for the whole high phase of the clock: it changes in the middle of a phase. The output of the flip-flop changes only at the rising edges, taking the value that D has at that instant; short pulses of D between two edges are ignored. The flip-flop's output is steady for a whole period, which is exactly what a state register needs.
+UNDERSTAND NOW: latches and flip-flops.
 For the lecturer: Level-triggered versus edge-triggered. The waveforms are computed, not drawn by hand: the latch output changes in the middle of a high phase, the flip-flop output only at rising edges.</a:t>
             </a:r>
             <a:endParaRPr lang="en-US" dirty="0"/>
@@ -1198,6 +1206,7 @@
             <a:r>
               <a:rPr lang="en-US" dirty="0"/>
               <a:t>A register is a row of flip-flops with a common clock: one flip-flop per bit. With a load-enable signal it takes a new value only when asked, and otherwise keeps the old one. RISC-V has thirty-two registers of thirty-two bits: 1,024 flip-flops. Now the two machines of Lecture 11 find their place: the decoder driven by the field rd activates the load enable of one register only, and the multiplexers select which registers are read.
+UNDERSTAND NOW: registers as flip-flops.
 For the lecturer: Registro. The original deck used the 74273 (eight D flip-flops, one clock and a clear) as its example. Registers, shift registers, buses and three-state buffers are the subject of the next lecture.</a:t>
             </a:r>
             <a:endParaRPr lang="en-US" dirty="0"/>
@@ -1645,6 +1654,7 @@
             <a:r>
               <a:rPr lang="en-US" dirty="0"/>
               <a:t>Five conclusions. Digital circuits are combinational or sequential, and for the second kind time and state matter. A sequential machine implements a finite-state automaton, of the Mealy or the Moore type. Latches and flip-flops are the elementary memories, and feedback is what makes a circuit remember. The clock decides when: latches listen during a level, flip-flops on an edge. Registers, counters, the program counter and the processor are sequential machines built around combinational networks.
+Learning status, recap. UNDERSTAND NOW: finite-state machines; the clock; latches and flip-flops; registers as flip-flops. USE NOW: the complete program, the PRG32 tools (used, not studied, in this course). UNDERSTAND LATER: nothing. A slide without a badge is context: a story, an example, a question, an exercise.
 For the lecturer: Next lecture: the elementary machines for the architecture: registers, shift registers, buses and three-state buffers.</a:t>
             </a:r>
             <a:endParaRPr lang="en-US" dirty="0"/>
@@ -1734,6 +1744,7 @@
             <a:r>
               <a:rPr lang="en-US" dirty="0"/>
               <a:t>The clock is a signal that alternates regularly between 0 and 1. The drawing names its parts: the period T, the high time and the low time, the rising edge, where it passes from 0 to 1, and the falling edge. The frequency is the number of periods per second, one divided by T. Synchronous circuits change state on one of the two edges. For the kit: 160 MHz means a period of 6.25 nanoseconds, and every combinational network in the chip must settle within that time.
+UNDERSTAND NOW: the clock.
 For the lecturer: Fronte di salita, fronte di discesa, periodo TCK, TH and TL in the original slide. The link with Lecture 11: the period must exceed the critical path. In a PRG32 game the frame plays the role of a much slower clock.</a:t>
             </a:r>
             <a:endParaRPr lang="en-US" dirty="0"/>
@@ -1823,6 +1834,7 @@
             <a:r>
               <a:rPr lang="en-US" dirty="0"/>
               <a:t>The state is a summary of the whole previous history of the inputs: everything the circuit needs to know about the past in order to behave correctly from now on. It is held by state variables. A transition function computes the next state from the present state and the present inputs, and the state is updated once per clock cycle. The formula on the right says it compactly. To store the state we need elements with two stable conditions: latches and flip-flops.
+UNDERSTAND NOW: finite-state machines.
 For the lecturer: In the warm-up: one state variable (the word state), the transition function is game_update, the clock is the frame.</a:t>
             </a:r>
             <a:endParaRPr lang="en-US" dirty="0"/>
@@ -1912,6 +1924,7 @@
             <a:r>
               <a:rPr lang="en-US" dirty="0"/>
               <a:t>The formal definition. A sequential machine is made of five things: an input alphabet I and an output alphabet U, which are finite sets of symbols; a finite set of states S; a next-state function, which for each pair of state and input gives one next state; and an output function. Compare it with the warm-up: the input is "A pressed or not", the states are TITLE, PLAY and OVER, the next-state function is the code of game_update, and the output is the screen.
+UNDERSTAND NOW: finite-state machines.
 For the lecturer: Automa a stati finiti; macchina sequenziale. With k state variables there are at most 2^k states. The source slide wrote the functions with 'belongs to' signs: the correct arrows are used here.</a:t>
             </a:r>
             <a:endParaRPr lang="en-US" dirty="0"/>
@@ -2001,6 +2014,7 @@
             <a:r>
               <a:rPr lang="en-US" dirty="0"/>
               <a:t>There are two ways of defining the output. In a Mealy machine the output depends on the state and on the input: it is written on the transitions, and it can react to an input in the same cycle. In a Moore machine the output depends on the state alone: it is written inside the states and changes only when the state changes. The game of the warm-up is a Moore machine: each state has its screen. The two models are equivalent, though the number of states may differ.
+UNDERSTAND NOW: finite-state machines.
 For the lecturer: Every Mealy machine has an equivalent Moore machine and vice versa, possibly with a different number of states.</a:t>
             </a:r>
             <a:endParaRPr lang="en-US" dirty="0"/>
@@ -2090,6 +2104,7 @@
             <a:r>
               <a:rPr lang="en-US" dirty="0"/>
               <a:t>The general architecture of every sequential machine. A combinational network computes the next state and the outputs from the inputs and the present state. A register of flip-flops holds the present state. At each clock edge the next state becomes the present state. The loop from the network to the register and back is what makes memory possible, and the register is what keeps the loop under control: values go round once per cycle, never faster. Everything in Lecture 11 lives in the upper box.
+UNDERSTAND NOW: finite-state machines.
 For the lecturer: Rete combinatoria and registri di stato. The warm-up has exactly this shape: game_update is the upper box, the word state is the register, the frame is the clock.</a:t>
             </a:r>
             <a:endParaRPr lang="en-US" dirty="0"/>
@@ -2179,6 +2194,7 @@
             <a:r>
               <a:rPr lang="en-US" dirty="0"/>
               <a:t>The two equivalent descriptions of a machine, for a Mealy example with four states. In the state table each row is a present state and each column an input symbol; the cell gives the next state and, after the slash, the output. In the state diagram each state is a node and each transition an arrow labelled input slash output. Practise going from one to the other: take the row of s0 and find its two arrows in the drawing.
+UNDERSTAND NOW: finite-state machines.
 For the lecturer: Tabella degli stati and diagramma degli stati: G(V, E, L) with V the nodes (states), E the arcs (transitions) and L the labels. The example is the one of the original deck.</a:t>
             </a:r>
             <a:endParaRPr lang="en-US" dirty="0"/>
@@ -2268,6 +2284,7 @@
             <a:r>
               <a:rPr lang="en-US" dirty="0"/>
               <a:t>The SR latch: two NOR gates, each with its output connected to an input of the other. S, for set, brings Q to 1; R, for reset, brings Q to 0. With both at 0 the latch keeps its last value: it remembers which input was 1 most recently. The table summarises the four cases, and the last one is forbidden. Because of the feedback Q depends on itself: in a circuit with a loop, a signal is a waveform in time and not a single value.
+UNDERSTAND NOW: latches and flip-flops.
 For the lecturer: Q = (R + Q')' and Q' = (S + Q)'. Breaking the feedback wire turns the latch into a plain combinational network of two NORs: that is how the original deck analysed it, case by case. The same latch can be built with two NAND gates and active-low inputs.</a:t>
             </a:r>
             <a:endParaRPr lang="en-US" dirty="0"/>
@@ -3405,6 +3422,420 @@
       </p:pic>
       <p:sp>
         <p:nvSpPr>
+          <p:cNvPr id="15" name="Shape 12"/>
+          <p:cNvSpPr/>
+          <p:nvPr/>
+        </p:nvSpPr>
+        <p:spPr>
+          <a:xfrm>
+            <a:off x="9690303" y="91440"/>
+            <a:ext cx="1952752" cy="274320"/>
+          </a:xfrm>
+          <a:prstGeom prst="rect">
+            <a:avLst/>
+          </a:prstGeom>
+          <a:solidFill>
+            <a:srgbClr val="F3E8FF"/>
+          </a:solidFill>
+          <a:ln w="12700">
+            <a:solidFill>
+              <a:srgbClr val="7E22CE"/>
+            </a:solidFill>
+            <a:prstDash val="dash"/>
+          </a:ln>
+        </p:spPr>
+      </p:sp>
+      <p:sp>
+        <p:nvSpPr>
+          <p:cNvPr id="16" name="Shape 13"/>
+          <p:cNvSpPr/>
+          <p:nvPr/>
+        </p:nvSpPr>
+        <p:spPr>
+          <a:xfrm>
+            <a:off x="9717735" y="128016"/>
+            <a:ext cx="45720" cy="45720"/>
+          </a:xfrm>
+          <a:prstGeom prst="rect">
+            <a:avLst/>
+          </a:prstGeom>
+          <a:solidFill>
+            <a:srgbClr val="7E22CE"/>
+          </a:solidFill>
+          <a:ln w="12700">
+            <a:solidFill>
+              <a:srgbClr val="7E22CE"/>
+            </a:solidFill>
+            <a:prstDash val="solid"/>
+          </a:ln>
+        </p:spPr>
+      </p:sp>
+      <p:sp>
+        <p:nvSpPr>
+          <p:cNvPr id="17" name="Shape 14"/>
+          <p:cNvSpPr/>
+          <p:nvPr/>
+        </p:nvSpPr>
+        <p:spPr>
+          <a:xfrm>
+            <a:off x="9717735" y="205740"/>
+            <a:ext cx="45720" cy="45720"/>
+          </a:xfrm>
+          <a:prstGeom prst="rect">
+            <a:avLst/>
+          </a:prstGeom>
+          <a:solidFill>
+            <a:srgbClr val="7E22CE"/>
+          </a:solidFill>
+          <a:ln w="12700">
+            <a:solidFill>
+              <a:srgbClr val="7E22CE"/>
+            </a:solidFill>
+            <a:prstDash val="solid"/>
+          </a:ln>
+        </p:spPr>
+      </p:sp>
+      <p:sp>
+        <p:nvSpPr>
+          <p:cNvPr id="18" name="Shape 15"/>
+          <p:cNvSpPr/>
+          <p:nvPr/>
+        </p:nvSpPr>
+        <p:spPr>
+          <a:xfrm>
+            <a:off x="9717735" y="283464"/>
+            <a:ext cx="45720" cy="45720"/>
+          </a:xfrm>
+          <a:prstGeom prst="rect">
+            <a:avLst/>
+          </a:prstGeom>
+          <a:solidFill>
+            <a:srgbClr val="7E22CE"/>
+          </a:solidFill>
+          <a:ln w="12700">
+            <a:solidFill>
+              <a:srgbClr val="7E22CE"/>
+            </a:solidFill>
+            <a:prstDash val="solid"/>
+          </a:ln>
+        </p:spPr>
+      </p:sp>
+      <p:pic>
+        <p:nvPicPr>
+          <p:cNvPr id="19" name="Image 1" descr="preencoded.png">    </p:cNvPr>
+          <p:cNvPicPr>
+            <a:picLocks noChangeAspect="1"/>
+          </p:cNvPicPr>
+          <p:nvPr/>
+        </p:nvPicPr>
+        <p:blipFill>
+          <a:blip r:embed="rId2"/>
+          <a:stretch>
+            <a:fillRect/>
+          </a:stretch>
+        </p:blipFill>
+        <p:spPr>
+          <a:xfrm>
+            <a:off x="9818319" y="128016"/>
+            <a:ext cx="201168" cy="201168"/>
+          </a:xfrm>
+          <a:prstGeom prst="rect">
+            <a:avLst/>
+          </a:prstGeom>
+        </p:spPr>
+      </p:pic>
+      <p:sp>
+        <p:nvSpPr>
+          <p:cNvPr id="20" name="Text 16"/>
+          <p:cNvSpPr txBox="1"/>
+          <p:nvPr/>
+        </p:nvSpPr>
+        <p:spPr>
+          <a:xfrm>
+            <a:off x="10074351" y="91440"/>
+            <a:ext cx="1532128" cy="274320"/>
+          </a:xfrm>
+          <a:prstGeom prst="rect">
+            <a:avLst/>
+          </a:prstGeom>
+          <a:noFill/>
+          <a:ln/>
+        </p:spPr>
+        <p:txBody>
+          <a:bodyPr wrap="square" lIns="0" tIns="0" rIns="0" bIns="0" rtlCol="0" anchor="ctr"/>
+          <a:lstStyle/>
+          <a:p>
+            <a:pPr indent="0" marL="0">
+              <a:buNone/>
+            </a:pPr>
+            <a:r>
+              <a:rPr lang="en-US" sz="1100" b="1" dirty="0">
+                <a:solidFill>
+                  <a:srgbClr val="6B21A8"/>
+                </a:solidFill>
+                <a:latin typeface="Calibri" pitchFamily="34" charset="0"/>
+                <a:ea typeface="Calibri" pitchFamily="34" charset="-122"/>
+                <a:cs typeface="Calibri" pitchFamily="34" charset="-120"/>
+              </a:rPr>
+              <a:t>UNDERSTAND LATER</a:t>
+            </a:r>
+            <a:endParaRPr lang="en-US" sz="1100" dirty="0"/>
+          </a:p>
+        </p:txBody>
+      </p:sp>
+      <p:sp>
+        <p:nvSpPr>
+          <p:cNvPr id="21" name="Shape 17"/>
+          <p:cNvSpPr/>
+          <p:nvPr/>
+        </p:nvSpPr>
+        <p:spPr>
+          <a:xfrm>
+            <a:off x="8407349" y="91440"/>
+            <a:ext cx="1173226" cy="274320"/>
+          </a:xfrm>
+          <a:prstGeom prst="rect">
+            <a:avLst/>
+          </a:prstGeom>
+          <a:solidFill>
+            <a:srgbClr val="FEF3C7"/>
+          </a:solidFill>
+          <a:ln w="12700">
+            <a:solidFill>
+              <a:srgbClr val="B45309"/>
+            </a:solidFill>
+            <a:prstDash val="solid"/>
+          </a:ln>
+        </p:spPr>
+      </p:sp>
+      <p:sp>
+        <p:nvSpPr>
+          <p:cNvPr id="22" name="Shape 18"/>
+          <p:cNvSpPr/>
+          <p:nvPr/>
+        </p:nvSpPr>
+        <p:spPr>
+          <a:xfrm>
+            <a:off x="8407349" y="91440"/>
+            <a:ext cx="27432" cy="274320"/>
+          </a:xfrm>
+          <a:prstGeom prst="rect">
+            <a:avLst/>
+          </a:prstGeom>
+          <a:solidFill>
+            <a:srgbClr val="B45309"/>
+          </a:solidFill>
+          <a:ln w="12700">
+            <a:solidFill>
+              <a:srgbClr val="B45309"/>
+            </a:solidFill>
+            <a:prstDash val="solid"/>
+          </a:ln>
+        </p:spPr>
+      </p:sp>
+      <p:sp>
+        <p:nvSpPr>
+          <p:cNvPr id="23" name="Shape 19"/>
+          <p:cNvSpPr/>
+          <p:nvPr/>
+        </p:nvSpPr>
+        <p:spPr>
+          <a:xfrm>
+            <a:off x="8462213" y="91440"/>
+            <a:ext cx="27432" cy="274320"/>
+          </a:xfrm>
+          <a:prstGeom prst="rect">
+            <a:avLst/>
+          </a:prstGeom>
+          <a:solidFill>
+            <a:srgbClr val="B45309"/>
+          </a:solidFill>
+          <a:ln w="12700">
+            <a:solidFill>
+              <a:srgbClr val="B45309"/>
+            </a:solidFill>
+            <a:prstDash val="solid"/>
+          </a:ln>
+        </p:spPr>
+      </p:sp>
+      <p:pic>
+        <p:nvPicPr>
+          <p:cNvPr id="24" name="Image 2" descr="preencoded.png">    </p:cNvPr>
+          <p:cNvPicPr>
+            <a:picLocks noChangeAspect="1"/>
+          </p:cNvPicPr>
+          <p:nvPr/>
+        </p:nvPicPr>
+        <p:blipFill>
+          <a:blip r:embed="rId3"/>
+          <a:stretch>
+            <a:fillRect/>
+          </a:stretch>
+        </p:blipFill>
+        <p:spPr>
+          <a:xfrm>
+            <a:off x="8535365" y="128016"/>
+            <a:ext cx="201168" cy="201168"/>
+          </a:xfrm>
+          <a:prstGeom prst="rect">
+            <a:avLst/>
+          </a:prstGeom>
+        </p:spPr>
+      </p:pic>
+      <p:sp>
+        <p:nvSpPr>
+          <p:cNvPr id="25" name="Text 20"/>
+          <p:cNvSpPr txBox="1"/>
+          <p:nvPr/>
+        </p:nvSpPr>
+        <p:spPr>
+          <a:xfrm>
+            <a:off x="8791397" y="91440"/>
+            <a:ext cx="752602" cy="274320"/>
+          </a:xfrm>
+          <a:prstGeom prst="rect">
+            <a:avLst/>
+          </a:prstGeom>
+          <a:noFill/>
+          <a:ln/>
+        </p:spPr>
+        <p:txBody>
+          <a:bodyPr wrap="square" lIns="0" tIns="0" rIns="0" bIns="0" rtlCol="0" anchor="ctr"/>
+          <a:lstStyle/>
+          <a:p>
+            <a:pPr indent="0" marL="0">
+              <a:buNone/>
+            </a:pPr>
+            <a:r>
+              <a:rPr lang="en-US" sz="1100" b="1" dirty="0">
+                <a:solidFill>
+                  <a:srgbClr val="92400E"/>
+                </a:solidFill>
+                <a:latin typeface="Calibri" pitchFamily="34" charset="0"/>
+                <a:ea typeface="Calibri" pitchFamily="34" charset="-122"/>
+                <a:cs typeface="Calibri" pitchFamily="34" charset="-120"/>
+              </a:rPr>
+              <a:t>USE NOW</a:t>
+            </a:r>
+            <a:endParaRPr lang="en-US" sz="1100" dirty="0"/>
+          </a:p>
+        </p:txBody>
+      </p:sp>
+      <p:sp>
+        <p:nvSpPr>
+          <p:cNvPr id="26" name="Shape 21"/>
+          <p:cNvSpPr/>
+          <p:nvPr/>
+        </p:nvSpPr>
+        <p:spPr>
+          <a:xfrm>
+            <a:off x="6518097" y="91440"/>
+            <a:ext cx="1779524" cy="274320"/>
+          </a:xfrm>
+          <a:prstGeom prst="rect">
+            <a:avLst/>
+          </a:prstGeom>
+          <a:solidFill>
+            <a:srgbClr val="E0F2FE"/>
+          </a:solidFill>
+          <a:ln w="12700">
+            <a:solidFill>
+              <a:srgbClr val="0369A1"/>
+            </a:solidFill>
+            <a:prstDash val="solid"/>
+          </a:ln>
+        </p:spPr>
+      </p:sp>
+      <p:sp>
+        <p:nvSpPr>
+          <p:cNvPr id="27" name="Shape 22"/>
+          <p:cNvSpPr/>
+          <p:nvPr/>
+        </p:nvSpPr>
+        <p:spPr>
+          <a:xfrm>
+            <a:off x="6518097" y="91440"/>
+            <a:ext cx="73152" cy="274320"/>
+          </a:xfrm>
+          <a:prstGeom prst="rect">
+            <a:avLst/>
+          </a:prstGeom>
+          <a:solidFill>
+            <a:srgbClr val="0369A1"/>
+          </a:solidFill>
+          <a:ln w="12700">
+            <a:solidFill>
+              <a:srgbClr val="0369A1"/>
+            </a:solidFill>
+            <a:prstDash val="solid"/>
+          </a:ln>
+        </p:spPr>
+      </p:sp>
+      <p:pic>
+        <p:nvPicPr>
+          <p:cNvPr id="28" name="Image 3" descr="preencoded.png">    </p:cNvPr>
+          <p:cNvPicPr>
+            <a:picLocks noChangeAspect="1"/>
+          </p:cNvPicPr>
+          <p:nvPr/>
+        </p:nvPicPr>
+        <p:blipFill>
+          <a:blip r:embed="rId4"/>
+          <a:stretch>
+            <a:fillRect/>
+          </a:stretch>
+        </p:blipFill>
+        <p:spPr>
+          <a:xfrm>
+            <a:off x="6646113" y="128016"/>
+            <a:ext cx="201168" cy="201168"/>
+          </a:xfrm>
+          <a:prstGeom prst="rect">
+            <a:avLst/>
+          </a:prstGeom>
+        </p:spPr>
+      </p:pic>
+      <p:sp>
+        <p:nvSpPr>
+          <p:cNvPr id="29" name="Text 23"/>
+          <p:cNvSpPr txBox="1"/>
+          <p:nvPr/>
+        </p:nvSpPr>
+        <p:spPr>
+          <a:xfrm>
+            <a:off x="6902145" y="91440"/>
+            <a:ext cx="1358900" cy="274320"/>
+          </a:xfrm>
+          <a:prstGeom prst="rect">
+            <a:avLst/>
+          </a:prstGeom>
+          <a:noFill/>
+          <a:ln/>
+        </p:spPr>
+        <p:txBody>
+          <a:bodyPr wrap="square" lIns="0" tIns="0" rIns="0" bIns="0" rtlCol="0" anchor="ctr"/>
+          <a:lstStyle/>
+          <a:p>
+            <a:pPr indent="0" marL="0">
+              <a:buNone/>
+            </a:pPr>
+            <a:r>
+              <a:rPr lang="en-US" sz="1100" b="1" dirty="0">
+                <a:solidFill>
+                  <a:srgbClr val="075985"/>
+                </a:solidFill>
+                <a:latin typeface="Calibri" pitchFamily="34" charset="0"/>
+                <a:ea typeface="Calibri" pitchFamily="34" charset="-122"/>
+                <a:cs typeface="Calibri" pitchFamily="34" charset="-120"/>
+              </a:rPr>
+              <a:t>UNDERSTAND NOW</a:t>
+            </a:r>
+            <a:endParaRPr lang="en-US" sz="1100" dirty="0"/>
+          </a:p>
+        </p:txBody>
+      </p:sp>
+      <p:sp>
+        <p:nvSpPr>
           <p:cNvPr id="25" name="Slide Number Placeholder 0"/>
           <p:cNvSpPr>
             <a:spLocks noGrp="1"/>
@@ -3544,9 +3975,59 @@
           </a:ln>
         </p:spPr>
       </p:sp>
+      <p:sp>
+        <p:nvSpPr>
+          <p:cNvPr id="4" name="Shape 2"/>
+          <p:cNvSpPr/>
+          <p:nvPr/>
+        </p:nvSpPr>
+        <p:spPr>
+          <a:xfrm>
+            <a:off x="8222056" y="91440"/>
+            <a:ext cx="3420999" cy="274320"/>
+          </a:xfrm>
+          <a:prstGeom prst="rect">
+            <a:avLst/>
+          </a:prstGeom>
+          <a:solidFill>
+            <a:srgbClr val="E0F2FE"/>
+          </a:solidFill>
+          <a:ln w="12700">
+            <a:solidFill>
+              <a:srgbClr val="0369A1"/>
+            </a:solidFill>
+            <a:prstDash val="solid"/>
+          </a:ln>
+        </p:spPr>
+      </p:sp>
+      <p:sp>
+        <p:nvSpPr>
+          <p:cNvPr id="5" name="Shape 3"/>
+          <p:cNvSpPr/>
+          <p:nvPr/>
+        </p:nvSpPr>
+        <p:spPr>
+          <a:xfrm>
+            <a:off x="8222056" y="91440"/>
+            <a:ext cx="73152" cy="274320"/>
+          </a:xfrm>
+          <a:prstGeom prst="rect">
+            <a:avLst/>
+          </a:prstGeom>
+          <a:solidFill>
+            <a:srgbClr val="0369A1"/>
+          </a:solidFill>
+          <a:ln w="12700">
+            <a:solidFill>
+              <a:srgbClr val="0369A1"/>
+            </a:solidFill>
+            <a:prstDash val="solid"/>
+          </a:ln>
+        </p:spPr>
+      </p:sp>
       <p:pic>
         <p:nvPicPr>
-          <p:cNvPr id="5" name="Image 0" descr="preencoded.png">    </p:cNvPr>
+          <p:cNvPr id="6" name="Image 0" descr="preencoded.png">    </p:cNvPr>
           <p:cNvPicPr>
             <a:picLocks noChangeAspect="1"/>
           </p:cNvPicPr>
@@ -3560,6 +4041,83 @@
         </p:blipFill>
         <p:spPr>
           <a:xfrm>
+            <a:off x="8350072" y="128016"/>
+            <a:ext cx="201168" cy="201168"/>
+          </a:xfrm>
+          <a:prstGeom prst="rect">
+            <a:avLst/>
+          </a:prstGeom>
+        </p:spPr>
+      </p:pic>
+      <p:sp>
+        <p:nvSpPr>
+          <p:cNvPr id="7" name="Text 4"/>
+          <p:cNvSpPr txBox="1"/>
+          <p:nvPr/>
+        </p:nvSpPr>
+        <p:spPr>
+          <a:xfrm>
+            <a:off x="8606104" y="91440"/>
+            <a:ext cx="3000375" cy="274320"/>
+          </a:xfrm>
+          <a:prstGeom prst="rect">
+            <a:avLst/>
+          </a:prstGeom>
+          <a:noFill/>
+          <a:ln/>
+        </p:spPr>
+        <p:txBody>
+          <a:bodyPr wrap="square" lIns="0" tIns="0" rIns="0" bIns="0" rtlCol="0" anchor="ctr"/>
+          <a:lstStyle/>
+          <a:p>
+            <a:pPr indent="0" marL="0">
+              <a:buNone/>
+            </a:pPr>
+            <a:r>
+              <a:rPr lang="en-US" sz="1100" b="1" dirty="0">
+                <a:solidFill>
+                  <a:srgbClr val="075985"/>
+                </a:solidFill>
+                <a:latin typeface="Calibri" pitchFamily="34" charset="0"/>
+                <a:ea typeface="Calibri" pitchFamily="34" charset="-122"/>
+                <a:cs typeface="Calibri" pitchFamily="34" charset="-120"/>
+              </a:rPr>
+              <a:t>UNDERSTAND NOW</a:t>
+            </a:r>
+            <a:pPr indent="0" marL="0">
+              <a:buNone/>
+            </a:pPr>
+            <a:r>
+              <a:rPr lang="en-US" sz="1100" dirty="0">
+                <a:solidFill>
+                  <a:srgbClr val="075985"/>
+                </a:solidFill>
+                <a:latin typeface="Calibri" pitchFamily="34" charset="0"/>
+                <a:ea typeface="Calibri" pitchFamily="34" charset="-122"/>
+                <a:cs typeface="Calibri" pitchFamily="34" charset="-120"/>
+              </a:rPr>
+              <a:t> · latches and flip-flops</a:t>
+            </a:r>
+            <a:endParaRPr lang="en-US" sz="1100" dirty="0"/>
+          </a:p>
+        </p:txBody>
+      </p:sp>
+      <p:pic>
+        <p:nvPicPr>
+          <p:cNvPr id="9" name="Image 1" descr="preencoded.png">    </p:cNvPr>
+          <p:cNvPicPr>
+            <a:picLocks noChangeAspect="1"/>
+          </p:cNvPicPr>
+          <p:nvPr/>
+        </p:nvPicPr>
+        <p:blipFill>
+          <a:blip r:embed="rId2"/>
+          <a:stretch>
+            <a:fillRect/>
+          </a:stretch>
+        </p:blipFill>
+        <p:spPr>
+          <a:xfrm>
             <a:off x="822960" y="1509613"/>
             <a:ext cx="10545775" cy="2741494"/>
           </a:xfrm>
@@ -3570,7 +4128,7 @@
       </p:pic>
       <p:sp>
         <p:nvSpPr>
-          <p:cNvPr id="6" name="Shape 2"/>
+          <p:cNvPr id="10" name="Shape 5"/>
           <p:cNvSpPr/>
           <p:nvPr/>
         </p:nvSpPr>
@@ -3595,7 +4153,7 @@
       </p:sp>
       <p:sp>
         <p:nvSpPr>
-          <p:cNvPr id="7" name="Text 3"/>
+          <p:cNvPr id="11" name="Text 6"/>
           <p:cNvSpPr txBox="1"/>
           <p:nvPr/>
         </p:nvSpPr>
@@ -3637,7 +4195,7 @@
       </p:sp>
       <p:sp>
         <p:nvSpPr>
-          <p:cNvPr id="8" name="Shape 4"/>
+          <p:cNvPr id="12" name="Shape 7"/>
           <p:cNvSpPr/>
           <p:nvPr/>
         </p:nvSpPr>
@@ -3662,7 +4220,7 @@
       </p:sp>
       <p:sp>
         <p:nvSpPr>
-          <p:cNvPr id="9" name="Text 5"/>
+          <p:cNvPr id="13" name="Text 8"/>
           <p:cNvSpPr txBox="1"/>
           <p:nvPr/>
         </p:nvSpPr>
@@ -3704,7 +4262,7 @@
       </p:sp>
       <p:sp>
         <p:nvSpPr>
-          <p:cNvPr id="10" name="Shape 6"/>
+          <p:cNvPr id="14" name="Shape 9"/>
           <p:cNvSpPr/>
           <p:nvPr/>
         </p:nvSpPr>
@@ -3729,7 +4287,7 @@
       </p:sp>
       <p:sp>
         <p:nvSpPr>
-          <p:cNvPr id="11" name="Text 7"/>
+          <p:cNvPr id="15" name="Text 10"/>
           <p:cNvSpPr txBox="1"/>
           <p:nvPr/>
         </p:nvSpPr>
@@ -4325,6 +4883,133 @@
       </p:sp>
       <p:sp>
         <p:nvSpPr>
+          <p:cNvPr id="16" name="Shape 14"/>
+          <p:cNvSpPr/>
+          <p:nvPr/>
+        </p:nvSpPr>
+        <p:spPr>
+          <a:xfrm>
+            <a:off x="8222056" y="91440"/>
+            <a:ext cx="3420999" cy="274320"/>
+          </a:xfrm>
+          <a:prstGeom prst="rect">
+            <a:avLst/>
+          </a:prstGeom>
+          <a:solidFill>
+            <a:srgbClr val="E0F2FE"/>
+          </a:solidFill>
+          <a:ln w="12700">
+            <a:solidFill>
+              <a:srgbClr val="0369A1"/>
+            </a:solidFill>
+            <a:prstDash val="solid"/>
+          </a:ln>
+        </p:spPr>
+      </p:sp>
+      <p:sp>
+        <p:nvSpPr>
+          <p:cNvPr id="17" name="Shape 15"/>
+          <p:cNvSpPr/>
+          <p:nvPr/>
+        </p:nvSpPr>
+        <p:spPr>
+          <a:xfrm>
+            <a:off x="8222056" y="91440"/>
+            <a:ext cx="73152" cy="274320"/>
+          </a:xfrm>
+          <a:prstGeom prst="rect">
+            <a:avLst/>
+          </a:prstGeom>
+          <a:solidFill>
+            <a:srgbClr val="0369A1"/>
+          </a:solidFill>
+          <a:ln w="12700">
+            <a:solidFill>
+              <a:srgbClr val="0369A1"/>
+            </a:solidFill>
+            <a:prstDash val="solid"/>
+          </a:ln>
+        </p:spPr>
+      </p:sp>
+      <p:pic>
+        <p:nvPicPr>
+          <p:cNvPr id="18" name="Image 0" descr="preencoded.png">    </p:cNvPr>
+          <p:cNvPicPr>
+            <a:picLocks noChangeAspect="1"/>
+          </p:cNvPicPr>
+          <p:nvPr/>
+        </p:nvPicPr>
+        <p:blipFill>
+          <a:blip r:embed="rId1"/>
+          <a:stretch>
+            <a:fillRect/>
+          </a:stretch>
+        </p:blipFill>
+        <p:spPr>
+          <a:xfrm>
+            <a:off x="8350072" y="128016"/>
+            <a:ext cx="201168" cy="201168"/>
+          </a:xfrm>
+          <a:prstGeom prst="rect">
+            <a:avLst/>
+          </a:prstGeom>
+        </p:spPr>
+      </p:pic>
+      <p:sp>
+        <p:nvSpPr>
+          <p:cNvPr id="19" name="Text 16"/>
+          <p:cNvSpPr txBox="1"/>
+          <p:nvPr/>
+        </p:nvSpPr>
+        <p:spPr>
+          <a:xfrm>
+            <a:off x="8606104" y="91440"/>
+            <a:ext cx="3000375" cy="274320"/>
+          </a:xfrm>
+          <a:prstGeom prst="rect">
+            <a:avLst/>
+          </a:prstGeom>
+          <a:noFill/>
+          <a:ln/>
+        </p:spPr>
+        <p:txBody>
+          <a:bodyPr wrap="square" lIns="0" tIns="0" rIns="0" bIns="0" rtlCol="0" anchor="ctr"/>
+          <a:lstStyle/>
+          <a:p>
+            <a:pPr indent="0" marL="0">
+              <a:buNone/>
+            </a:pPr>
+            <a:r>
+              <a:rPr lang="en-US" sz="1100" b="1" dirty="0">
+                <a:solidFill>
+                  <a:srgbClr val="075985"/>
+                </a:solidFill>
+                <a:latin typeface="Calibri" pitchFamily="34" charset="0"/>
+                <a:ea typeface="Calibri" pitchFamily="34" charset="-122"/>
+                <a:cs typeface="Calibri" pitchFamily="34" charset="-120"/>
+              </a:rPr>
+              <a:t>UNDERSTAND NOW</a:t>
+            </a:r>
+            <a:pPr indent="0" marL="0">
+              <a:buNone/>
+            </a:pPr>
+            <a:r>
+              <a:rPr lang="en-US" sz="1100" dirty="0">
+                <a:solidFill>
+                  <a:srgbClr val="075985"/>
+                </a:solidFill>
+                <a:latin typeface="Calibri" pitchFamily="34" charset="0"/>
+                <a:ea typeface="Calibri" pitchFamily="34" charset="-122"/>
+                <a:cs typeface="Calibri" pitchFamily="34" charset="-120"/>
+              </a:rPr>
+              <a:t> · latches and flip-flops</a:t>
+            </a:r>
+            <a:endParaRPr lang="en-US" sz="1100" dirty="0"/>
+          </a:p>
+        </p:txBody>
+      </p:sp>
+      <p:sp>
+        <p:nvSpPr>
           <p:cNvPr id="25" name="Slide Number Placeholder 0"/>
           <p:cNvSpPr>
             <a:spLocks noGrp="1"/>
@@ -4464,9 +5149,59 @@
           </a:ln>
         </p:spPr>
       </p:sp>
+      <p:sp>
+        <p:nvSpPr>
+          <p:cNvPr id="4" name="Shape 2"/>
+          <p:cNvSpPr/>
+          <p:nvPr/>
+        </p:nvSpPr>
+        <p:spPr>
+          <a:xfrm>
+            <a:off x="8222056" y="91440"/>
+            <a:ext cx="3420999" cy="274320"/>
+          </a:xfrm>
+          <a:prstGeom prst="rect">
+            <a:avLst/>
+          </a:prstGeom>
+          <a:solidFill>
+            <a:srgbClr val="E0F2FE"/>
+          </a:solidFill>
+          <a:ln w="12700">
+            <a:solidFill>
+              <a:srgbClr val="0369A1"/>
+            </a:solidFill>
+            <a:prstDash val="solid"/>
+          </a:ln>
+        </p:spPr>
+      </p:sp>
+      <p:sp>
+        <p:nvSpPr>
+          <p:cNvPr id="5" name="Shape 3"/>
+          <p:cNvSpPr/>
+          <p:nvPr/>
+        </p:nvSpPr>
+        <p:spPr>
+          <a:xfrm>
+            <a:off x="8222056" y="91440"/>
+            <a:ext cx="73152" cy="274320"/>
+          </a:xfrm>
+          <a:prstGeom prst="rect">
+            <a:avLst/>
+          </a:prstGeom>
+          <a:solidFill>
+            <a:srgbClr val="0369A1"/>
+          </a:solidFill>
+          <a:ln w="12700">
+            <a:solidFill>
+              <a:srgbClr val="0369A1"/>
+            </a:solidFill>
+            <a:prstDash val="solid"/>
+          </a:ln>
+        </p:spPr>
+      </p:sp>
       <p:pic>
         <p:nvPicPr>
-          <p:cNvPr id="5" name="Image 0" descr="preencoded.png">    </p:cNvPr>
+          <p:cNvPr id="6" name="Image 0" descr="preencoded.png">    </p:cNvPr>
           <p:cNvPicPr>
             <a:picLocks noChangeAspect="1"/>
           </p:cNvPicPr>
@@ -4480,8 +5215,8 @@
         </p:blipFill>
         <p:spPr>
           <a:xfrm>
-            <a:off x="6629400" y="2370572"/>
-            <a:ext cx="4876495" cy="2208296"/>
+            <a:off x="8350072" y="128016"/>
+            <a:ext cx="201168" cy="201168"/>
           </a:xfrm>
           <a:prstGeom prst="rect">
             <a:avLst/>
@@ -4490,14 +5225,14 @@
       </p:pic>
       <p:sp>
         <p:nvSpPr>
-          <p:cNvPr id="6" name="Text 2"/>
+          <p:cNvPr id="7" name="Text 4"/>
           <p:cNvSpPr txBox="1"/>
           <p:nvPr/>
         </p:nvSpPr>
         <p:spPr>
           <a:xfrm>
-            <a:off x="6629400" y="5349240"/>
-            <a:ext cx="4876495" cy="640080"/>
+            <a:off x="8606104" y="91440"/>
+            <a:ext cx="3000375" cy="274320"/>
           </a:xfrm>
           <a:prstGeom prst="rect">
             <a:avLst/>
@@ -4509,18 +5244,95 @@
           <a:bodyPr wrap="square" lIns="0" tIns="0" rIns="0" bIns="0" rtlCol="0" anchor="ctr"/>
           <a:lstStyle/>
           <a:p>
-            <a:pPr algn="ctr" indent="0" marL="0">
+            <a:pPr indent="0" marL="0">
               <a:buNone/>
             </a:pPr>
             <a:r>
-              <a:rPr lang="en-US" sz="1350" i="1" dirty="0">
-                <a:solidFill>
-                  <a:srgbClr val="5B6B78"/>
+              <a:rPr lang="en-US" sz="1100" b="1" dirty="0">
+                <a:solidFill>
+                  <a:srgbClr val="075985"/>
                 </a:solidFill>
                 <a:latin typeface="Calibri" pitchFamily="34" charset="0"/>
                 <a:ea typeface="Calibri" pitchFamily="34" charset="-122"/>
                 <a:cs typeface="Calibri" pitchFamily="34" charset="-120"/>
               </a:rPr>
+              <a:t>UNDERSTAND NOW</a:t>
+            </a:r>
+            <a:pPr indent="0" marL="0">
+              <a:buNone/>
+            </a:pPr>
+            <a:r>
+              <a:rPr lang="en-US" sz="1100" dirty="0">
+                <a:solidFill>
+                  <a:srgbClr val="075985"/>
+                </a:solidFill>
+                <a:latin typeface="Calibri" pitchFamily="34" charset="0"/>
+                <a:ea typeface="Calibri" pitchFamily="34" charset="-122"/>
+                <a:cs typeface="Calibri" pitchFamily="34" charset="-120"/>
+              </a:rPr>
+              <a:t> · latches and flip-flops</a:t>
+            </a:r>
+            <a:endParaRPr lang="en-US" sz="1100" dirty="0"/>
+          </a:p>
+        </p:txBody>
+      </p:sp>
+      <p:pic>
+        <p:nvPicPr>
+          <p:cNvPr id="9" name="Image 1" descr="preencoded.png">    </p:cNvPr>
+          <p:cNvPicPr>
+            <a:picLocks noChangeAspect="1"/>
+          </p:cNvPicPr>
+          <p:nvPr/>
+        </p:nvPicPr>
+        <p:blipFill>
+          <a:blip r:embed="rId2"/>
+          <a:stretch>
+            <a:fillRect/>
+          </a:stretch>
+        </p:blipFill>
+        <p:spPr>
+          <a:xfrm>
+            <a:off x="6629400" y="2370572"/>
+            <a:ext cx="4876495" cy="2208296"/>
+          </a:xfrm>
+          <a:prstGeom prst="rect">
+            <a:avLst/>
+          </a:prstGeom>
+        </p:spPr>
+      </p:pic>
+      <p:sp>
+        <p:nvSpPr>
+          <p:cNvPr id="10" name="Text 5"/>
+          <p:cNvSpPr txBox="1"/>
+          <p:nvPr/>
+        </p:nvSpPr>
+        <p:spPr>
+          <a:xfrm>
+            <a:off x="6629400" y="5349240"/>
+            <a:ext cx="4876495" cy="640080"/>
+          </a:xfrm>
+          <a:prstGeom prst="rect">
+            <a:avLst/>
+          </a:prstGeom>
+          <a:noFill/>
+          <a:ln/>
+        </p:spPr>
+        <p:txBody>
+          <a:bodyPr wrap="square" lIns="0" tIns="0" rIns="0" bIns="0" rtlCol="0" anchor="ctr"/>
+          <a:lstStyle/>
+          <a:p>
+            <a:pPr algn="ctr" indent="0" marL="0">
+              <a:buNone/>
+            </a:pPr>
+            <a:r>
+              <a:rPr lang="en-US" sz="1350" i="1" dirty="0">
+                <a:solidFill>
+                  <a:srgbClr val="5B6B78"/>
+                </a:solidFill>
+                <a:latin typeface="Calibri" pitchFamily="34" charset="0"/>
+                <a:ea typeface="Calibri" pitchFamily="34" charset="-122"/>
+                <a:cs typeface="Calibri" pitchFamily="34" charset="-120"/>
+              </a:rPr>
               <a:t>A clocked SR latch: the excitation inputs pass through two AND gates controlled by CK</a:t>
             </a:r>
             <a:endParaRPr lang="en-US" sz="1350" dirty="0"/>
@@ -4529,7 +5341,7 @@
       </p:sp>
       <p:sp>
         <p:nvSpPr>
-          <p:cNvPr id="7" name="Shape 3"/>
+          <p:cNvPr id="11" name="Shape 6"/>
           <p:cNvSpPr/>
           <p:nvPr/>
         </p:nvSpPr>
@@ -4554,7 +5366,7 @@
       </p:sp>
       <p:sp>
         <p:nvSpPr>
-          <p:cNvPr id="8" name="Text 4"/>
+          <p:cNvPr id="12" name="Text 7"/>
           <p:cNvSpPr txBox="1"/>
           <p:nvPr/>
         </p:nvSpPr>
@@ -4596,7 +5408,7 @@
       </p:sp>
       <p:sp>
         <p:nvSpPr>
-          <p:cNvPr id="9" name="Shape 5"/>
+          <p:cNvPr id="13" name="Shape 8"/>
           <p:cNvSpPr/>
           <p:nvPr/>
         </p:nvSpPr>
@@ -4621,7 +5433,7 @@
       </p:sp>
       <p:sp>
         <p:nvSpPr>
-          <p:cNvPr id="10" name="Text 6"/>
+          <p:cNvPr id="14" name="Text 9"/>
           <p:cNvSpPr txBox="1"/>
           <p:nvPr/>
         </p:nvSpPr>
@@ -4663,7 +5475,7 @@
       </p:sp>
       <p:sp>
         <p:nvSpPr>
-          <p:cNvPr id="11" name="Shape 7"/>
+          <p:cNvPr id="15" name="Shape 10"/>
           <p:cNvSpPr/>
           <p:nvPr/>
         </p:nvSpPr>
@@ -4688,7 +5500,7 @@
       </p:sp>
       <p:sp>
         <p:nvSpPr>
-          <p:cNvPr id="12" name="Text 8"/>
+          <p:cNvPr id="16" name="Text 11"/>
           <p:cNvSpPr txBox="1"/>
           <p:nvPr/>
         </p:nvSpPr>
@@ -4770,7 +5582,7 @@
       </p:sp>
       <p:sp>
         <p:nvSpPr>
-          <p:cNvPr id="13" name="Shape 9"/>
+          <p:cNvPr id="17" name="Shape 12"/>
           <p:cNvSpPr/>
           <p:nvPr/>
         </p:nvSpPr>
@@ -4795,7 +5607,7 @@
       </p:sp>
       <p:sp>
         <p:nvSpPr>
-          <p:cNvPr id="14" name="Text 10"/>
+          <p:cNvPr id="18" name="Text 13"/>
           <p:cNvSpPr txBox="1"/>
           <p:nvPr/>
         </p:nvSpPr>
@@ -6348,6 +7160,133 @@
       </p:sp>
       <p:sp>
         <p:nvSpPr>
+          <p:cNvPr id="5" name="Shape 2"/>
+          <p:cNvSpPr/>
+          <p:nvPr/>
+        </p:nvSpPr>
+        <p:spPr>
+          <a:xfrm>
+            <a:off x="8222056" y="91440"/>
+            <a:ext cx="3420999" cy="274320"/>
+          </a:xfrm>
+          <a:prstGeom prst="rect">
+            <a:avLst/>
+          </a:prstGeom>
+          <a:solidFill>
+            <a:srgbClr val="E0F2FE"/>
+          </a:solidFill>
+          <a:ln w="12700">
+            <a:solidFill>
+              <a:srgbClr val="0369A1"/>
+            </a:solidFill>
+            <a:prstDash val="solid"/>
+          </a:ln>
+        </p:spPr>
+      </p:sp>
+      <p:sp>
+        <p:nvSpPr>
+          <p:cNvPr id="6" name="Shape 3"/>
+          <p:cNvSpPr/>
+          <p:nvPr/>
+        </p:nvSpPr>
+        <p:spPr>
+          <a:xfrm>
+            <a:off x="8222056" y="91440"/>
+            <a:ext cx="73152" cy="274320"/>
+          </a:xfrm>
+          <a:prstGeom prst="rect">
+            <a:avLst/>
+          </a:prstGeom>
+          <a:solidFill>
+            <a:srgbClr val="0369A1"/>
+          </a:solidFill>
+          <a:ln w="12700">
+            <a:solidFill>
+              <a:srgbClr val="0369A1"/>
+            </a:solidFill>
+            <a:prstDash val="solid"/>
+          </a:ln>
+        </p:spPr>
+      </p:sp>
+      <p:pic>
+        <p:nvPicPr>
+          <p:cNvPr id="7" name="Image 0" descr="preencoded.png">    </p:cNvPr>
+          <p:cNvPicPr>
+            <a:picLocks noChangeAspect="1"/>
+          </p:cNvPicPr>
+          <p:nvPr/>
+        </p:nvPicPr>
+        <p:blipFill>
+          <a:blip r:embed="rId1"/>
+          <a:stretch>
+            <a:fillRect/>
+          </a:stretch>
+        </p:blipFill>
+        <p:spPr>
+          <a:xfrm>
+            <a:off x="8350072" y="128016"/>
+            <a:ext cx="201168" cy="201168"/>
+          </a:xfrm>
+          <a:prstGeom prst="rect">
+            <a:avLst/>
+          </a:prstGeom>
+        </p:spPr>
+      </p:pic>
+      <p:sp>
+        <p:nvSpPr>
+          <p:cNvPr id="8" name="Text 4"/>
+          <p:cNvSpPr txBox="1"/>
+          <p:nvPr/>
+        </p:nvSpPr>
+        <p:spPr>
+          <a:xfrm>
+            <a:off x="8606104" y="91440"/>
+            <a:ext cx="3000375" cy="274320"/>
+          </a:xfrm>
+          <a:prstGeom prst="rect">
+            <a:avLst/>
+          </a:prstGeom>
+          <a:noFill/>
+          <a:ln/>
+        </p:spPr>
+        <p:txBody>
+          <a:bodyPr wrap="square" lIns="0" tIns="0" rIns="0" bIns="0" rtlCol="0" anchor="ctr"/>
+          <a:lstStyle/>
+          <a:p>
+            <a:pPr indent="0" marL="0">
+              <a:buNone/>
+            </a:pPr>
+            <a:r>
+              <a:rPr lang="en-US" sz="1100" b="1" dirty="0">
+                <a:solidFill>
+                  <a:srgbClr val="075985"/>
+                </a:solidFill>
+                <a:latin typeface="Calibri" pitchFamily="34" charset="0"/>
+                <a:ea typeface="Calibri" pitchFamily="34" charset="-122"/>
+                <a:cs typeface="Calibri" pitchFamily="34" charset="-120"/>
+              </a:rPr>
+              <a:t>UNDERSTAND NOW</a:t>
+            </a:r>
+            <a:pPr indent="0" marL="0">
+              <a:buNone/>
+            </a:pPr>
+            <a:r>
+              <a:rPr lang="en-US" sz="1100" dirty="0">
+                <a:solidFill>
+                  <a:srgbClr val="075985"/>
+                </a:solidFill>
+                <a:latin typeface="Calibri" pitchFamily="34" charset="0"/>
+                <a:ea typeface="Calibri" pitchFamily="34" charset="-122"/>
+                <a:cs typeface="Calibri" pitchFamily="34" charset="-120"/>
+              </a:rPr>
+              <a:t> · latches and flip-flops</a:t>
+            </a:r>
+            <a:endParaRPr lang="en-US" sz="1100" dirty="0"/>
+          </a:p>
+        </p:txBody>
+      </p:sp>
+      <p:sp>
+        <p:nvSpPr>
           <p:cNvPr id="25" name="Slide Number Placeholder 0"/>
           <p:cNvSpPr>
             <a:spLocks noGrp="1"/>
@@ -7363,6 +8302,133 @@
       </p:sp>
       <p:sp>
         <p:nvSpPr>
+          <p:cNvPr id="28" name="Shape 26"/>
+          <p:cNvSpPr/>
+          <p:nvPr/>
+        </p:nvSpPr>
+        <p:spPr>
+          <a:xfrm>
+            <a:off x="8222056" y="91440"/>
+            <a:ext cx="3420999" cy="274320"/>
+          </a:xfrm>
+          <a:prstGeom prst="rect">
+            <a:avLst/>
+          </a:prstGeom>
+          <a:solidFill>
+            <a:srgbClr val="E0F2FE"/>
+          </a:solidFill>
+          <a:ln w="12700">
+            <a:solidFill>
+              <a:srgbClr val="0369A1"/>
+            </a:solidFill>
+            <a:prstDash val="solid"/>
+          </a:ln>
+        </p:spPr>
+      </p:sp>
+      <p:sp>
+        <p:nvSpPr>
+          <p:cNvPr id="29" name="Shape 27"/>
+          <p:cNvSpPr/>
+          <p:nvPr/>
+        </p:nvSpPr>
+        <p:spPr>
+          <a:xfrm>
+            <a:off x="8222056" y="91440"/>
+            <a:ext cx="73152" cy="274320"/>
+          </a:xfrm>
+          <a:prstGeom prst="rect">
+            <a:avLst/>
+          </a:prstGeom>
+          <a:solidFill>
+            <a:srgbClr val="0369A1"/>
+          </a:solidFill>
+          <a:ln w="12700">
+            <a:solidFill>
+              <a:srgbClr val="0369A1"/>
+            </a:solidFill>
+            <a:prstDash val="solid"/>
+          </a:ln>
+        </p:spPr>
+      </p:sp>
+      <p:pic>
+        <p:nvPicPr>
+          <p:cNvPr id="30" name="Image 0" descr="preencoded.png">    </p:cNvPr>
+          <p:cNvPicPr>
+            <a:picLocks noChangeAspect="1"/>
+          </p:cNvPicPr>
+          <p:nvPr/>
+        </p:nvPicPr>
+        <p:blipFill>
+          <a:blip r:embed="rId1"/>
+          <a:stretch>
+            <a:fillRect/>
+          </a:stretch>
+        </p:blipFill>
+        <p:spPr>
+          <a:xfrm>
+            <a:off x="8350072" y="128016"/>
+            <a:ext cx="201168" cy="201168"/>
+          </a:xfrm>
+          <a:prstGeom prst="rect">
+            <a:avLst/>
+          </a:prstGeom>
+        </p:spPr>
+      </p:pic>
+      <p:sp>
+        <p:nvSpPr>
+          <p:cNvPr id="31" name="Text 28"/>
+          <p:cNvSpPr txBox="1"/>
+          <p:nvPr/>
+        </p:nvSpPr>
+        <p:spPr>
+          <a:xfrm>
+            <a:off x="8606104" y="91440"/>
+            <a:ext cx="3000375" cy="274320"/>
+          </a:xfrm>
+          <a:prstGeom prst="rect">
+            <a:avLst/>
+          </a:prstGeom>
+          <a:noFill/>
+          <a:ln/>
+        </p:spPr>
+        <p:txBody>
+          <a:bodyPr wrap="square" lIns="0" tIns="0" rIns="0" bIns="0" rtlCol="0" anchor="ctr"/>
+          <a:lstStyle/>
+          <a:p>
+            <a:pPr indent="0" marL="0">
+              <a:buNone/>
+            </a:pPr>
+            <a:r>
+              <a:rPr lang="en-US" sz="1100" b="1" dirty="0">
+                <a:solidFill>
+                  <a:srgbClr val="075985"/>
+                </a:solidFill>
+                <a:latin typeface="Calibri" pitchFamily="34" charset="0"/>
+                <a:ea typeface="Calibri" pitchFamily="34" charset="-122"/>
+                <a:cs typeface="Calibri" pitchFamily="34" charset="-120"/>
+              </a:rPr>
+              <a:t>UNDERSTAND NOW</a:t>
+            </a:r>
+            <a:pPr indent="0" marL="0">
+              <a:buNone/>
+            </a:pPr>
+            <a:r>
+              <a:rPr lang="en-US" sz="1100" dirty="0">
+                <a:solidFill>
+                  <a:srgbClr val="075985"/>
+                </a:solidFill>
+                <a:latin typeface="Calibri" pitchFamily="34" charset="0"/>
+                <a:ea typeface="Calibri" pitchFamily="34" charset="-122"/>
+                <a:cs typeface="Calibri" pitchFamily="34" charset="-120"/>
+              </a:rPr>
+              <a:t> · latches and flip-flops</a:t>
+            </a:r>
+            <a:endParaRPr lang="en-US" sz="1100" dirty="0"/>
+          </a:p>
+        </p:txBody>
+      </p:sp>
+      <p:sp>
+        <p:nvSpPr>
           <p:cNvPr id="25" name="Slide Number Placeholder 0"/>
           <p:cNvSpPr>
             <a:spLocks noGrp="1"/>
@@ -7502,9 +8568,59 @@
           </a:ln>
         </p:spPr>
       </p:sp>
+      <p:sp>
+        <p:nvSpPr>
+          <p:cNvPr id="4" name="Shape 2"/>
+          <p:cNvSpPr/>
+          <p:nvPr/>
+        </p:nvSpPr>
+        <p:spPr>
+          <a:xfrm>
+            <a:off x="8222056" y="91440"/>
+            <a:ext cx="3420999" cy="274320"/>
+          </a:xfrm>
+          <a:prstGeom prst="rect">
+            <a:avLst/>
+          </a:prstGeom>
+          <a:solidFill>
+            <a:srgbClr val="E0F2FE"/>
+          </a:solidFill>
+          <a:ln w="12700">
+            <a:solidFill>
+              <a:srgbClr val="0369A1"/>
+            </a:solidFill>
+            <a:prstDash val="solid"/>
+          </a:ln>
+        </p:spPr>
+      </p:sp>
+      <p:sp>
+        <p:nvSpPr>
+          <p:cNvPr id="5" name="Shape 3"/>
+          <p:cNvSpPr/>
+          <p:nvPr/>
+        </p:nvSpPr>
+        <p:spPr>
+          <a:xfrm>
+            <a:off x="8222056" y="91440"/>
+            <a:ext cx="73152" cy="274320"/>
+          </a:xfrm>
+          <a:prstGeom prst="rect">
+            <a:avLst/>
+          </a:prstGeom>
+          <a:solidFill>
+            <a:srgbClr val="0369A1"/>
+          </a:solidFill>
+          <a:ln w="12700">
+            <a:solidFill>
+              <a:srgbClr val="0369A1"/>
+            </a:solidFill>
+            <a:prstDash val="solid"/>
+          </a:ln>
+        </p:spPr>
+      </p:sp>
       <p:pic>
         <p:nvPicPr>
-          <p:cNvPr id="5" name="Image 0" descr="preencoded.png">    </p:cNvPr>
+          <p:cNvPr id="6" name="Image 0" descr="preencoded.png">    </p:cNvPr>
           <p:cNvPicPr>
             <a:picLocks noChangeAspect="1"/>
           </p:cNvPicPr>
@@ -7518,6 +8634,83 @@
         </p:blipFill>
         <p:spPr>
           <a:xfrm>
+            <a:off x="8350072" y="128016"/>
+            <a:ext cx="201168" cy="201168"/>
+          </a:xfrm>
+          <a:prstGeom prst="rect">
+            <a:avLst/>
+          </a:prstGeom>
+        </p:spPr>
+      </p:pic>
+      <p:sp>
+        <p:nvSpPr>
+          <p:cNvPr id="7" name="Text 4"/>
+          <p:cNvSpPr txBox="1"/>
+          <p:nvPr/>
+        </p:nvSpPr>
+        <p:spPr>
+          <a:xfrm>
+            <a:off x="8606104" y="91440"/>
+            <a:ext cx="3000375" cy="274320"/>
+          </a:xfrm>
+          <a:prstGeom prst="rect">
+            <a:avLst/>
+          </a:prstGeom>
+          <a:noFill/>
+          <a:ln/>
+        </p:spPr>
+        <p:txBody>
+          <a:bodyPr wrap="square" lIns="0" tIns="0" rIns="0" bIns="0" rtlCol="0" anchor="ctr"/>
+          <a:lstStyle/>
+          <a:p>
+            <a:pPr indent="0" marL="0">
+              <a:buNone/>
+            </a:pPr>
+            <a:r>
+              <a:rPr lang="en-US" sz="1100" b="1" dirty="0">
+                <a:solidFill>
+                  <a:srgbClr val="075985"/>
+                </a:solidFill>
+                <a:latin typeface="Calibri" pitchFamily="34" charset="0"/>
+                <a:ea typeface="Calibri" pitchFamily="34" charset="-122"/>
+                <a:cs typeface="Calibri" pitchFamily="34" charset="-120"/>
+              </a:rPr>
+              <a:t>UNDERSTAND NOW</a:t>
+            </a:r>
+            <a:pPr indent="0" marL="0">
+              <a:buNone/>
+            </a:pPr>
+            <a:r>
+              <a:rPr lang="en-US" sz="1100" dirty="0">
+                <a:solidFill>
+                  <a:srgbClr val="075985"/>
+                </a:solidFill>
+                <a:latin typeface="Calibri" pitchFamily="34" charset="0"/>
+                <a:ea typeface="Calibri" pitchFamily="34" charset="-122"/>
+                <a:cs typeface="Calibri" pitchFamily="34" charset="-120"/>
+              </a:rPr>
+              <a:t> · latches and flip-flops</a:t>
+            </a:r>
+            <a:endParaRPr lang="en-US" sz="1100" dirty="0"/>
+          </a:p>
+        </p:txBody>
+      </p:sp>
+      <p:pic>
+        <p:nvPicPr>
+          <p:cNvPr id="9" name="Image 1" descr="preencoded.png">    </p:cNvPr>
+          <p:cNvPicPr>
+            <a:picLocks noChangeAspect="1"/>
+          </p:cNvPicPr>
+          <p:nvPr/>
+        </p:nvPicPr>
+        <p:blipFill>
+          <a:blip r:embed="rId2"/>
+          <a:stretch>
+            <a:fillRect/>
+          </a:stretch>
+        </p:blipFill>
+        <p:spPr>
+          <a:xfrm>
             <a:off x="775328" y="1463040"/>
             <a:ext cx="10641040" cy="3154680"/>
           </a:xfrm>
@@ -7528,7 +8721,7 @@
       </p:pic>
       <p:sp>
         <p:nvSpPr>
-          <p:cNvPr id="6" name="Shape 2"/>
+          <p:cNvPr id="10" name="Shape 5"/>
           <p:cNvSpPr/>
           <p:nvPr/>
         </p:nvSpPr>
@@ -7553,7 +8746,7 @@
       </p:sp>
       <p:sp>
         <p:nvSpPr>
-          <p:cNvPr id="7" name="Text 3"/>
+          <p:cNvPr id="11" name="Text 6"/>
           <p:cNvSpPr txBox="1"/>
           <p:nvPr/>
         </p:nvSpPr>
@@ -7595,7 +8788,7 @@
       </p:sp>
       <p:sp>
         <p:nvSpPr>
-          <p:cNvPr id="8" name="Shape 4"/>
+          <p:cNvPr id="12" name="Shape 7"/>
           <p:cNvSpPr/>
           <p:nvPr/>
         </p:nvSpPr>
@@ -7620,7 +8813,7 @@
       </p:sp>
       <p:sp>
         <p:nvSpPr>
-          <p:cNvPr id="9" name="Text 5"/>
+          <p:cNvPr id="13" name="Text 8"/>
           <p:cNvSpPr txBox="1"/>
           <p:nvPr/>
         </p:nvSpPr>
@@ -7662,7 +8855,7 @@
       </p:sp>
       <p:sp>
         <p:nvSpPr>
-          <p:cNvPr id="10" name="Shape 6"/>
+          <p:cNvPr id="14" name="Shape 9"/>
           <p:cNvSpPr/>
           <p:nvPr/>
         </p:nvSpPr>
@@ -7687,7 +8880,7 @@
       </p:sp>
       <p:sp>
         <p:nvSpPr>
-          <p:cNvPr id="11" name="Text 7"/>
+          <p:cNvPr id="15" name="Text 10"/>
           <p:cNvSpPr txBox="1"/>
           <p:nvPr/>
         </p:nvSpPr>
@@ -9082,6 +10275,133 @@
               <a:t>The multiplexers of Lecture 11 select which registers are read</a:t>
             </a:r>
             <a:endParaRPr lang="en-US" sz="1600" dirty="0"/>
+          </a:p>
+        </p:txBody>
+      </p:sp>
+      <p:sp>
+        <p:nvSpPr>
+          <p:cNvPr id="40" name="Shape 38"/>
+          <p:cNvSpPr/>
+          <p:nvPr/>
+        </p:nvSpPr>
+        <p:spPr>
+          <a:xfrm>
+            <a:off x="8156397" y="91440"/>
+            <a:ext cx="3486658" cy="274320"/>
+          </a:xfrm>
+          <a:prstGeom prst="rect">
+            <a:avLst/>
+          </a:prstGeom>
+          <a:solidFill>
+            <a:srgbClr val="E0F2FE"/>
+          </a:solidFill>
+          <a:ln w="12700">
+            <a:solidFill>
+              <a:srgbClr val="0369A1"/>
+            </a:solidFill>
+            <a:prstDash val="solid"/>
+          </a:ln>
+        </p:spPr>
+      </p:sp>
+      <p:sp>
+        <p:nvSpPr>
+          <p:cNvPr id="41" name="Shape 39"/>
+          <p:cNvSpPr/>
+          <p:nvPr/>
+        </p:nvSpPr>
+        <p:spPr>
+          <a:xfrm>
+            <a:off x="8156397" y="91440"/>
+            <a:ext cx="73152" cy="274320"/>
+          </a:xfrm>
+          <a:prstGeom prst="rect">
+            <a:avLst/>
+          </a:prstGeom>
+          <a:solidFill>
+            <a:srgbClr val="0369A1"/>
+          </a:solidFill>
+          <a:ln w="12700">
+            <a:solidFill>
+              <a:srgbClr val="0369A1"/>
+            </a:solidFill>
+            <a:prstDash val="solid"/>
+          </a:ln>
+        </p:spPr>
+      </p:sp>
+      <p:pic>
+        <p:nvPicPr>
+          <p:cNvPr id="42" name="Image 0" descr="preencoded.png">    </p:cNvPr>
+          <p:cNvPicPr>
+            <a:picLocks noChangeAspect="1"/>
+          </p:cNvPicPr>
+          <p:nvPr/>
+        </p:nvPicPr>
+        <p:blipFill>
+          <a:blip r:embed="rId1"/>
+          <a:stretch>
+            <a:fillRect/>
+          </a:stretch>
+        </p:blipFill>
+        <p:spPr>
+          <a:xfrm>
+            <a:off x="8284413" y="128016"/>
+            <a:ext cx="201168" cy="201168"/>
+          </a:xfrm>
+          <a:prstGeom prst="rect">
+            <a:avLst/>
+          </a:prstGeom>
+        </p:spPr>
+      </p:pic>
+      <p:sp>
+        <p:nvSpPr>
+          <p:cNvPr id="43" name="Text 40"/>
+          <p:cNvSpPr txBox="1"/>
+          <p:nvPr/>
+        </p:nvSpPr>
+        <p:spPr>
+          <a:xfrm>
+            <a:off x="8540445" y="91440"/>
+            <a:ext cx="3066034" cy="274320"/>
+          </a:xfrm>
+          <a:prstGeom prst="rect">
+            <a:avLst/>
+          </a:prstGeom>
+          <a:noFill/>
+          <a:ln/>
+        </p:spPr>
+        <p:txBody>
+          <a:bodyPr wrap="square" lIns="0" tIns="0" rIns="0" bIns="0" rtlCol="0" anchor="ctr"/>
+          <a:lstStyle/>
+          <a:p>
+            <a:pPr indent="0" marL="0">
+              <a:buNone/>
+            </a:pPr>
+            <a:r>
+              <a:rPr lang="en-US" sz="1100" b="1" dirty="0">
+                <a:solidFill>
+                  <a:srgbClr val="075985"/>
+                </a:solidFill>
+                <a:latin typeface="Calibri" pitchFamily="34" charset="0"/>
+                <a:ea typeface="Calibri" pitchFamily="34" charset="-122"/>
+                <a:cs typeface="Calibri" pitchFamily="34" charset="-120"/>
+              </a:rPr>
+              <a:t>UNDERSTAND NOW</a:t>
+            </a:r>
+            <a:pPr indent="0" marL="0">
+              <a:buNone/>
+            </a:pPr>
+            <a:r>
+              <a:rPr lang="en-US" sz="1100" dirty="0">
+                <a:solidFill>
+                  <a:srgbClr val="075985"/>
+                </a:solidFill>
+                <a:latin typeface="Calibri" pitchFamily="34" charset="0"/>
+                <a:ea typeface="Calibri" pitchFamily="34" charset="-122"/>
+                <a:cs typeface="Calibri" pitchFamily="34" charset="-120"/>
+              </a:rPr>
+              <a:t> · registers as flip-flops</a:t>
+            </a:r>
+            <a:endParaRPr lang="en-US" sz="1100" dirty="0"/>
           </a:p>
         </p:txBody>
       </p:sp>
@@ -14894,9 +16214,59 @@
           </a:ln>
         </p:spPr>
       </p:sp>
+      <p:sp>
+        <p:nvSpPr>
+          <p:cNvPr id="4" name="Shape 2"/>
+          <p:cNvSpPr/>
+          <p:nvPr/>
+        </p:nvSpPr>
+        <p:spPr>
+          <a:xfrm>
+            <a:off x="9075623" y="91440"/>
+            <a:ext cx="2567432" cy="274320"/>
+          </a:xfrm>
+          <a:prstGeom prst="rect">
+            <a:avLst/>
+          </a:prstGeom>
+          <a:solidFill>
+            <a:srgbClr val="E0F2FE"/>
+          </a:solidFill>
+          <a:ln w="12700">
+            <a:solidFill>
+              <a:srgbClr val="0369A1"/>
+            </a:solidFill>
+            <a:prstDash val="solid"/>
+          </a:ln>
+        </p:spPr>
+      </p:sp>
+      <p:sp>
+        <p:nvSpPr>
+          <p:cNvPr id="5" name="Shape 3"/>
+          <p:cNvSpPr/>
+          <p:nvPr/>
+        </p:nvSpPr>
+        <p:spPr>
+          <a:xfrm>
+            <a:off x="9075623" y="91440"/>
+            <a:ext cx="73152" cy="274320"/>
+          </a:xfrm>
+          <a:prstGeom prst="rect">
+            <a:avLst/>
+          </a:prstGeom>
+          <a:solidFill>
+            <a:srgbClr val="0369A1"/>
+          </a:solidFill>
+          <a:ln w="12700">
+            <a:solidFill>
+              <a:srgbClr val="0369A1"/>
+            </a:solidFill>
+            <a:prstDash val="solid"/>
+          </a:ln>
+        </p:spPr>
+      </p:sp>
       <p:pic>
         <p:nvPicPr>
-          <p:cNvPr id="5" name="Image 0" descr="preencoded.png">    </p:cNvPr>
+          <p:cNvPr id="6" name="Image 0" descr="preencoded.png">    </p:cNvPr>
           <p:cNvPicPr>
             <a:picLocks noChangeAspect="1"/>
           </p:cNvPicPr>
@@ -14910,6 +16280,83 @@
         </p:blipFill>
         <p:spPr>
           <a:xfrm>
+            <a:off x="9203639" y="128016"/>
+            <a:ext cx="201168" cy="201168"/>
+          </a:xfrm>
+          <a:prstGeom prst="rect">
+            <a:avLst/>
+          </a:prstGeom>
+        </p:spPr>
+      </p:pic>
+      <p:sp>
+        <p:nvSpPr>
+          <p:cNvPr id="7" name="Text 4"/>
+          <p:cNvSpPr txBox="1"/>
+          <p:nvPr/>
+        </p:nvSpPr>
+        <p:spPr>
+          <a:xfrm>
+            <a:off x="9459671" y="91440"/>
+            <a:ext cx="2146808" cy="274320"/>
+          </a:xfrm>
+          <a:prstGeom prst="rect">
+            <a:avLst/>
+          </a:prstGeom>
+          <a:noFill/>
+          <a:ln/>
+        </p:spPr>
+        <p:txBody>
+          <a:bodyPr wrap="square" lIns="0" tIns="0" rIns="0" bIns="0" rtlCol="0" anchor="ctr"/>
+          <a:lstStyle/>
+          <a:p>
+            <a:pPr indent="0" marL="0">
+              <a:buNone/>
+            </a:pPr>
+            <a:r>
+              <a:rPr lang="en-US" sz="1100" b="1" dirty="0">
+                <a:solidFill>
+                  <a:srgbClr val="075985"/>
+                </a:solidFill>
+                <a:latin typeface="Calibri" pitchFamily="34" charset="0"/>
+                <a:ea typeface="Calibri" pitchFamily="34" charset="-122"/>
+                <a:cs typeface="Calibri" pitchFamily="34" charset="-120"/>
+              </a:rPr>
+              <a:t>UNDERSTAND NOW</a:t>
+            </a:r>
+            <a:pPr indent="0" marL="0">
+              <a:buNone/>
+            </a:pPr>
+            <a:r>
+              <a:rPr lang="en-US" sz="1100" dirty="0">
+                <a:solidFill>
+                  <a:srgbClr val="075985"/>
+                </a:solidFill>
+                <a:latin typeface="Calibri" pitchFamily="34" charset="0"/>
+                <a:ea typeface="Calibri" pitchFamily="34" charset="-122"/>
+                <a:cs typeface="Calibri" pitchFamily="34" charset="-120"/>
+              </a:rPr>
+              <a:t> · the clock</a:t>
+            </a:r>
+            <a:endParaRPr lang="en-US" sz="1100" dirty="0"/>
+          </a:p>
+        </p:txBody>
+      </p:sp>
+      <p:pic>
+        <p:nvPicPr>
+          <p:cNvPr id="9" name="Image 1" descr="preencoded.png">    </p:cNvPr>
+          <p:cNvPicPr>
+            <a:picLocks noChangeAspect="1"/>
+          </p:cNvPicPr>
+          <p:nvPr/>
+        </p:nvPicPr>
+        <p:blipFill>
+          <a:blip r:embed="rId2"/>
+          <a:stretch>
+            <a:fillRect/>
+          </a:stretch>
+        </p:blipFill>
+        <p:spPr>
+          <a:xfrm>
             <a:off x="685800" y="1851799"/>
             <a:ext cx="6400800" cy="2148562"/>
           </a:xfrm>
@@ -14920,7 +16367,7 @@
       </p:pic>
       <p:sp>
         <p:nvSpPr>
-          <p:cNvPr id="6" name="Shape 2"/>
+          <p:cNvPr id="10" name="Shape 5"/>
           <p:cNvSpPr/>
           <p:nvPr/>
         </p:nvSpPr>
@@ -14945,7 +16392,7 @@
       </p:sp>
       <p:sp>
         <p:nvSpPr>
-          <p:cNvPr id="7" name="Text 3"/>
+          <p:cNvPr id="11" name="Text 6"/>
           <p:cNvSpPr txBox="1"/>
           <p:nvPr/>
         </p:nvSpPr>
@@ -14987,7 +16434,7 @@
       </p:sp>
       <p:sp>
         <p:nvSpPr>
-          <p:cNvPr id="8" name="Shape 4"/>
+          <p:cNvPr id="12" name="Shape 7"/>
           <p:cNvSpPr/>
           <p:nvPr/>
         </p:nvSpPr>
@@ -15012,7 +16459,7 @@
       </p:sp>
       <p:sp>
         <p:nvSpPr>
-          <p:cNvPr id="9" name="Text 5"/>
+          <p:cNvPr id="13" name="Text 8"/>
           <p:cNvSpPr txBox="1"/>
           <p:nvPr/>
         </p:nvSpPr>
@@ -15054,7 +16501,7 @@
       </p:sp>
       <p:sp>
         <p:nvSpPr>
-          <p:cNvPr id="10" name="Shape 6"/>
+          <p:cNvPr id="14" name="Shape 9"/>
           <p:cNvSpPr/>
           <p:nvPr/>
         </p:nvSpPr>
@@ -15079,7 +16526,7 @@
       </p:sp>
       <p:sp>
         <p:nvSpPr>
-          <p:cNvPr id="11" name="Text 7"/>
+          <p:cNvPr id="15" name="Text 10"/>
           <p:cNvSpPr txBox="1"/>
           <p:nvPr/>
         </p:nvSpPr>
@@ -15121,7 +16568,7 @@
       </p:sp>
       <p:sp>
         <p:nvSpPr>
-          <p:cNvPr id="12" name="Shape 8"/>
+          <p:cNvPr id="16" name="Shape 11"/>
           <p:cNvSpPr/>
           <p:nvPr/>
         </p:nvSpPr>
@@ -15146,7 +16593,7 @@
       </p:sp>
       <p:sp>
         <p:nvSpPr>
-          <p:cNvPr id="13" name="Text 9"/>
+          <p:cNvPr id="17" name="Text 12"/>
           <p:cNvSpPr txBox="1"/>
           <p:nvPr/>
         </p:nvSpPr>
@@ -15188,7 +16635,7 @@
       </p:sp>
       <p:sp>
         <p:nvSpPr>
-          <p:cNvPr id="14" name="Shape 10"/>
+          <p:cNvPr id="18" name="Shape 13"/>
           <p:cNvSpPr/>
           <p:nvPr/>
         </p:nvSpPr>
@@ -15213,7 +16660,7 @@
       </p:sp>
       <p:sp>
         <p:nvSpPr>
-          <p:cNvPr id="15" name="Text 11"/>
+          <p:cNvPr id="19" name="Text 14"/>
           <p:cNvSpPr txBox="1"/>
           <p:nvPr/>
         </p:nvSpPr>
@@ -15255,7 +16702,7 @@
       </p:sp>
       <p:sp>
         <p:nvSpPr>
-          <p:cNvPr id="16" name="Shape 12"/>
+          <p:cNvPr id="20" name="Shape 15"/>
           <p:cNvSpPr/>
           <p:nvPr/>
         </p:nvSpPr>
@@ -15280,7 +16727,7 @@
       </p:sp>
       <p:sp>
         <p:nvSpPr>
-          <p:cNvPr id="17" name="Text 13"/>
+          <p:cNvPr id="21" name="Text 16"/>
           <p:cNvSpPr txBox="1"/>
           <p:nvPr/>
         </p:nvSpPr>
@@ -15896,6 +17343,133 @@
       </p:sp>
       <p:sp>
         <p:nvSpPr>
+          <p:cNvPr id="16" name="Shape 14"/>
+          <p:cNvSpPr/>
+          <p:nvPr/>
+        </p:nvSpPr>
+        <p:spPr>
+          <a:xfrm>
+            <a:off x="8287715" y="91440"/>
+            <a:ext cx="3355340" cy="274320"/>
+          </a:xfrm>
+          <a:prstGeom prst="rect">
+            <a:avLst/>
+          </a:prstGeom>
+          <a:solidFill>
+            <a:srgbClr val="E0F2FE"/>
+          </a:solidFill>
+          <a:ln w="12700">
+            <a:solidFill>
+              <a:srgbClr val="0369A1"/>
+            </a:solidFill>
+            <a:prstDash val="solid"/>
+          </a:ln>
+        </p:spPr>
+      </p:sp>
+      <p:sp>
+        <p:nvSpPr>
+          <p:cNvPr id="17" name="Shape 15"/>
+          <p:cNvSpPr/>
+          <p:nvPr/>
+        </p:nvSpPr>
+        <p:spPr>
+          <a:xfrm>
+            <a:off x="8287715" y="91440"/>
+            <a:ext cx="73152" cy="274320"/>
+          </a:xfrm>
+          <a:prstGeom prst="rect">
+            <a:avLst/>
+          </a:prstGeom>
+          <a:solidFill>
+            <a:srgbClr val="0369A1"/>
+          </a:solidFill>
+          <a:ln w="12700">
+            <a:solidFill>
+              <a:srgbClr val="0369A1"/>
+            </a:solidFill>
+            <a:prstDash val="solid"/>
+          </a:ln>
+        </p:spPr>
+      </p:sp>
+      <p:pic>
+        <p:nvPicPr>
+          <p:cNvPr id="18" name="Image 0" descr="preencoded.png">    </p:cNvPr>
+          <p:cNvPicPr>
+            <a:picLocks noChangeAspect="1"/>
+          </p:cNvPicPr>
+          <p:nvPr/>
+        </p:nvPicPr>
+        <p:blipFill>
+          <a:blip r:embed="rId1"/>
+          <a:stretch>
+            <a:fillRect/>
+          </a:stretch>
+        </p:blipFill>
+        <p:spPr>
+          <a:xfrm>
+            <a:off x="8415731" y="128016"/>
+            <a:ext cx="201168" cy="201168"/>
+          </a:xfrm>
+          <a:prstGeom prst="rect">
+            <a:avLst/>
+          </a:prstGeom>
+        </p:spPr>
+      </p:pic>
+      <p:sp>
+        <p:nvSpPr>
+          <p:cNvPr id="19" name="Text 16"/>
+          <p:cNvSpPr txBox="1"/>
+          <p:nvPr/>
+        </p:nvSpPr>
+        <p:spPr>
+          <a:xfrm>
+            <a:off x="8671763" y="91440"/>
+            <a:ext cx="2934716" cy="274320"/>
+          </a:xfrm>
+          <a:prstGeom prst="rect">
+            <a:avLst/>
+          </a:prstGeom>
+          <a:noFill/>
+          <a:ln/>
+        </p:spPr>
+        <p:txBody>
+          <a:bodyPr wrap="square" lIns="0" tIns="0" rIns="0" bIns="0" rtlCol="0" anchor="ctr"/>
+          <a:lstStyle/>
+          <a:p>
+            <a:pPr indent="0" marL="0">
+              <a:buNone/>
+            </a:pPr>
+            <a:r>
+              <a:rPr lang="en-US" sz="1100" b="1" dirty="0">
+                <a:solidFill>
+                  <a:srgbClr val="075985"/>
+                </a:solidFill>
+                <a:latin typeface="Calibri" pitchFamily="34" charset="0"/>
+                <a:ea typeface="Calibri" pitchFamily="34" charset="-122"/>
+                <a:cs typeface="Calibri" pitchFamily="34" charset="-120"/>
+              </a:rPr>
+              <a:t>UNDERSTAND NOW</a:t>
+            </a:r>
+            <a:pPr indent="0" marL="0">
+              <a:buNone/>
+            </a:pPr>
+            <a:r>
+              <a:rPr lang="en-US" sz="1100" dirty="0">
+                <a:solidFill>
+                  <a:srgbClr val="075985"/>
+                </a:solidFill>
+                <a:latin typeface="Calibri" pitchFamily="34" charset="0"/>
+                <a:ea typeface="Calibri" pitchFamily="34" charset="-122"/>
+                <a:cs typeface="Calibri" pitchFamily="34" charset="-120"/>
+              </a:rPr>
+              <a:t> · finite-state machines</a:t>
+            </a:r>
+            <a:endParaRPr lang="en-US" sz="1100" dirty="0"/>
+          </a:p>
+        </p:txBody>
+      </p:sp>
+      <p:sp>
+        <p:nvSpPr>
           <p:cNvPr id="25" name="Slide Number Placeholder 0"/>
           <p:cNvSpPr>
             <a:spLocks noGrp="1"/>
@@ -16450,6 +18024,133 @@
       </p:sp>
       <p:sp>
         <p:nvSpPr>
+          <p:cNvPr id="16" name="Shape 14"/>
+          <p:cNvSpPr/>
+          <p:nvPr/>
+        </p:nvSpPr>
+        <p:spPr>
+          <a:xfrm>
+            <a:off x="8287715" y="91440"/>
+            <a:ext cx="3355340" cy="274320"/>
+          </a:xfrm>
+          <a:prstGeom prst="rect">
+            <a:avLst/>
+          </a:prstGeom>
+          <a:solidFill>
+            <a:srgbClr val="E0F2FE"/>
+          </a:solidFill>
+          <a:ln w="12700">
+            <a:solidFill>
+              <a:srgbClr val="0369A1"/>
+            </a:solidFill>
+            <a:prstDash val="solid"/>
+          </a:ln>
+        </p:spPr>
+      </p:sp>
+      <p:sp>
+        <p:nvSpPr>
+          <p:cNvPr id="17" name="Shape 15"/>
+          <p:cNvSpPr/>
+          <p:nvPr/>
+        </p:nvSpPr>
+        <p:spPr>
+          <a:xfrm>
+            <a:off x="8287715" y="91440"/>
+            <a:ext cx="73152" cy="274320"/>
+          </a:xfrm>
+          <a:prstGeom prst="rect">
+            <a:avLst/>
+          </a:prstGeom>
+          <a:solidFill>
+            <a:srgbClr val="0369A1"/>
+          </a:solidFill>
+          <a:ln w="12700">
+            <a:solidFill>
+              <a:srgbClr val="0369A1"/>
+            </a:solidFill>
+            <a:prstDash val="solid"/>
+          </a:ln>
+        </p:spPr>
+      </p:sp>
+      <p:pic>
+        <p:nvPicPr>
+          <p:cNvPr id="18" name="Image 0" descr="preencoded.png">    </p:cNvPr>
+          <p:cNvPicPr>
+            <a:picLocks noChangeAspect="1"/>
+          </p:cNvPicPr>
+          <p:nvPr/>
+        </p:nvPicPr>
+        <p:blipFill>
+          <a:blip r:embed="rId1"/>
+          <a:stretch>
+            <a:fillRect/>
+          </a:stretch>
+        </p:blipFill>
+        <p:spPr>
+          <a:xfrm>
+            <a:off x="8415731" y="128016"/>
+            <a:ext cx="201168" cy="201168"/>
+          </a:xfrm>
+          <a:prstGeom prst="rect">
+            <a:avLst/>
+          </a:prstGeom>
+        </p:spPr>
+      </p:pic>
+      <p:sp>
+        <p:nvSpPr>
+          <p:cNvPr id="19" name="Text 16"/>
+          <p:cNvSpPr txBox="1"/>
+          <p:nvPr/>
+        </p:nvSpPr>
+        <p:spPr>
+          <a:xfrm>
+            <a:off x="8671763" y="91440"/>
+            <a:ext cx="2934716" cy="274320"/>
+          </a:xfrm>
+          <a:prstGeom prst="rect">
+            <a:avLst/>
+          </a:prstGeom>
+          <a:noFill/>
+          <a:ln/>
+        </p:spPr>
+        <p:txBody>
+          <a:bodyPr wrap="square" lIns="0" tIns="0" rIns="0" bIns="0" rtlCol="0" anchor="ctr"/>
+          <a:lstStyle/>
+          <a:p>
+            <a:pPr indent="0" marL="0">
+              <a:buNone/>
+            </a:pPr>
+            <a:r>
+              <a:rPr lang="en-US" sz="1100" b="1" dirty="0">
+                <a:solidFill>
+                  <a:srgbClr val="075985"/>
+                </a:solidFill>
+                <a:latin typeface="Calibri" pitchFamily="34" charset="0"/>
+                <a:ea typeface="Calibri" pitchFamily="34" charset="-122"/>
+                <a:cs typeface="Calibri" pitchFamily="34" charset="-120"/>
+              </a:rPr>
+              <a:t>UNDERSTAND NOW</a:t>
+            </a:r>
+            <a:pPr indent="0" marL="0">
+              <a:buNone/>
+            </a:pPr>
+            <a:r>
+              <a:rPr lang="en-US" sz="1100" dirty="0">
+                <a:solidFill>
+                  <a:srgbClr val="075985"/>
+                </a:solidFill>
+                <a:latin typeface="Calibri" pitchFamily="34" charset="0"/>
+                <a:ea typeface="Calibri" pitchFamily="34" charset="-122"/>
+                <a:cs typeface="Calibri" pitchFamily="34" charset="-120"/>
+              </a:rPr>
+              <a:t> · finite-state machines</a:t>
+            </a:r>
+            <a:endParaRPr lang="en-US" sz="1100" dirty="0"/>
+          </a:p>
+        </p:txBody>
+      </p:sp>
+      <p:sp>
+        <p:nvSpPr>
           <p:cNvPr id="25" name="Slide Number Placeholder 0"/>
           <p:cNvSpPr>
             <a:spLocks noGrp="1"/>
@@ -16966,6 +18667,133 @@
       </p:sp>
       <p:sp>
         <p:nvSpPr>
+          <p:cNvPr id="9" name="Shape 7"/>
+          <p:cNvSpPr/>
+          <p:nvPr/>
+        </p:nvSpPr>
+        <p:spPr>
+          <a:xfrm>
+            <a:off x="8287715" y="91440"/>
+            <a:ext cx="3355340" cy="274320"/>
+          </a:xfrm>
+          <a:prstGeom prst="rect">
+            <a:avLst/>
+          </a:prstGeom>
+          <a:solidFill>
+            <a:srgbClr val="E0F2FE"/>
+          </a:solidFill>
+          <a:ln w="12700">
+            <a:solidFill>
+              <a:srgbClr val="0369A1"/>
+            </a:solidFill>
+            <a:prstDash val="solid"/>
+          </a:ln>
+        </p:spPr>
+      </p:sp>
+      <p:sp>
+        <p:nvSpPr>
+          <p:cNvPr id="10" name="Shape 8"/>
+          <p:cNvSpPr/>
+          <p:nvPr/>
+        </p:nvSpPr>
+        <p:spPr>
+          <a:xfrm>
+            <a:off x="8287715" y="91440"/>
+            <a:ext cx="73152" cy="274320"/>
+          </a:xfrm>
+          <a:prstGeom prst="rect">
+            <a:avLst/>
+          </a:prstGeom>
+          <a:solidFill>
+            <a:srgbClr val="0369A1"/>
+          </a:solidFill>
+          <a:ln w="12700">
+            <a:solidFill>
+              <a:srgbClr val="0369A1"/>
+            </a:solidFill>
+            <a:prstDash val="solid"/>
+          </a:ln>
+        </p:spPr>
+      </p:sp>
+      <p:pic>
+        <p:nvPicPr>
+          <p:cNvPr id="11" name="Image 0" descr="preencoded.png">    </p:cNvPr>
+          <p:cNvPicPr>
+            <a:picLocks noChangeAspect="1"/>
+          </p:cNvPicPr>
+          <p:nvPr/>
+        </p:nvPicPr>
+        <p:blipFill>
+          <a:blip r:embed="rId1"/>
+          <a:stretch>
+            <a:fillRect/>
+          </a:stretch>
+        </p:blipFill>
+        <p:spPr>
+          <a:xfrm>
+            <a:off x="8415731" y="128016"/>
+            <a:ext cx="201168" cy="201168"/>
+          </a:xfrm>
+          <a:prstGeom prst="rect">
+            <a:avLst/>
+          </a:prstGeom>
+        </p:spPr>
+      </p:pic>
+      <p:sp>
+        <p:nvSpPr>
+          <p:cNvPr id="12" name="Text 9"/>
+          <p:cNvSpPr txBox="1"/>
+          <p:nvPr/>
+        </p:nvSpPr>
+        <p:spPr>
+          <a:xfrm>
+            <a:off x="8671763" y="91440"/>
+            <a:ext cx="2934716" cy="274320"/>
+          </a:xfrm>
+          <a:prstGeom prst="rect">
+            <a:avLst/>
+          </a:prstGeom>
+          <a:noFill/>
+          <a:ln/>
+        </p:spPr>
+        <p:txBody>
+          <a:bodyPr wrap="square" lIns="0" tIns="0" rIns="0" bIns="0" rtlCol="0" anchor="ctr"/>
+          <a:lstStyle/>
+          <a:p>
+            <a:pPr indent="0" marL="0">
+              <a:buNone/>
+            </a:pPr>
+            <a:r>
+              <a:rPr lang="en-US" sz="1100" b="1" dirty="0">
+                <a:solidFill>
+                  <a:srgbClr val="075985"/>
+                </a:solidFill>
+                <a:latin typeface="Calibri" pitchFamily="34" charset="0"/>
+                <a:ea typeface="Calibri" pitchFamily="34" charset="-122"/>
+                <a:cs typeface="Calibri" pitchFamily="34" charset="-120"/>
+              </a:rPr>
+              <a:t>UNDERSTAND NOW</a:t>
+            </a:r>
+            <a:pPr indent="0" marL="0">
+              <a:buNone/>
+            </a:pPr>
+            <a:r>
+              <a:rPr lang="en-US" sz="1100" dirty="0">
+                <a:solidFill>
+                  <a:srgbClr val="075985"/>
+                </a:solidFill>
+                <a:latin typeface="Calibri" pitchFamily="34" charset="0"/>
+                <a:ea typeface="Calibri" pitchFamily="34" charset="-122"/>
+                <a:cs typeface="Calibri" pitchFamily="34" charset="-120"/>
+              </a:rPr>
+              <a:t> · finite-state machines</a:t>
+            </a:r>
+            <a:endParaRPr lang="en-US" sz="1100" dirty="0"/>
+          </a:p>
+        </p:txBody>
+      </p:sp>
+      <p:sp>
+        <p:nvSpPr>
           <p:cNvPr id="25" name="Slide Number Placeholder 0"/>
           <p:cNvSpPr>
             <a:spLocks noGrp="1"/>
@@ -17966,6 +19794,133 @@
       </p:sp>
       <p:sp>
         <p:nvSpPr>
+          <p:cNvPr id="26" name="Shape 24"/>
+          <p:cNvSpPr/>
+          <p:nvPr/>
+        </p:nvSpPr>
+        <p:spPr>
+          <a:xfrm>
+            <a:off x="8287715" y="91440"/>
+            <a:ext cx="3355340" cy="274320"/>
+          </a:xfrm>
+          <a:prstGeom prst="rect">
+            <a:avLst/>
+          </a:prstGeom>
+          <a:solidFill>
+            <a:srgbClr val="E0F2FE"/>
+          </a:solidFill>
+          <a:ln w="12700">
+            <a:solidFill>
+              <a:srgbClr val="0369A1"/>
+            </a:solidFill>
+            <a:prstDash val="solid"/>
+          </a:ln>
+        </p:spPr>
+      </p:sp>
+      <p:sp>
+        <p:nvSpPr>
+          <p:cNvPr id="27" name="Shape 25"/>
+          <p:cNvSpPr/>
+          <p:nvPr/>
+        </p:nvSpPr>
+        <p:spPr>
+          <a:xfrm>
+            <a:off x="8287715" y="91440"/>
+            <a:ext cx="73152" cy="274320"/>
+          </a:xfrm>
+          <a:prstGeom prst="rect">
+            <a:avLst/>
+          </a:prstGeom>
+          <a:solidFill>
+            <a:srgbClr val="0369A1"/>
+          </a:solidFill>
+          <a:ln w="12700">
+            <a:solidFill>
+              <a:srgbClr val="0369A1"/>
+            </a:solidFill>
+            <a:prstDash val="solid"/>
+          </a:ln>
+        </p:spPr>
+      </p:sp>
+      <p:pic>
+        <p:nvPicPr>
+          <p:cNvPr id="28" name="Image 0" descr="preencoded.png">    </p:cNvPr>
+          <p:cNvPicPr>
+            <a:picLocks noChangeAspect="1"/>
+          </p:cNvPicPr>
+          <p:nvPr/>
+        </p:nvPicPr>
+        <p:blipFill>
+          <a:blip r:embed="rId1"/>
+          <a:stretch>
+            <a:fillRect/>
+          </a:stretch>
+        </p:blipFill>
+        <p:spPr>
+          <a:xfrm>
+            <a:off x="8415731" y="128016"/>
+            <a:ext cx="201168" cy="201168"/>
+          </a:xfrm>
+          <a:prstGeom prst="rect">
+            <a:avLst/>
+          </a:prstGeom>
+        </p:spPr>
+      </p:pic>
+      <p:sp>
+        <p:nvSpPr>
+          <p:cNvPr id="29" name="Text 26"/>
+          <p:cNvSpPr txBox="1"/>
+          <p:nvPr/>
+        </p:nvSpPr>
+        <p:spPr>
+          <a:xfrm>
+            <a:off x="8671763" y="91440"/>
+            <a:ext cx="2934716" cy="274320"/>
+          </a:xfrm>
+          <a:prstGeom prst="rect">
+            <a:avLst/>
+          </a:prstGeom>
+          <a:noFill/>
+          <a:ln/>
+        </p:spPr>
+        <p:txBody>
+          <a:bodyPr wrap="square" lIns="0" tIns="0" rIns="0" bIns="0" rtlCol="0" anchor="ctr"/>
+          <a:lstStyle/>
+          <a:p>
+            <a:pPr indent="0" marL="0">
+              <a:buNone/>
+            </a:pPr>
+            <a:r>
+              <a:rPr lang="en-US" sz="1100" b="1" dirty="0">
+                <a:solidFill>
+                  <a:srgbClr val="075985"/>
+                </a:solidFill>
+                <a:latin typeface="Calibri" pitchFamily="34" charset="0"/>
+                <a:ea typeface="Calibri" pitchFamily="34" charset="-122"/>
+                <a:cs typeface="Calibri" pitchFamily="34" charset="-120"/>
+              </a:rPr>
+              <a:t>UNDERSTAND NOW</a:t>
+            </a:r>
+            <a:pPr indent="0" marL="0">
+              <a:buNone/>
+            </a:pPr>
+            <a:r>
+              <a:rPr lang="en-US" sz="1100" dirty="0">
+                <a:solidFill>
+                  <a:srgbClr val="075985"/>
+                </a:solidFill>
+                <a:latin typeface="Calibri" pitchFamily="34" charset="0"/>
+                <a:ea typeface="Calibri" pitchFamily="34" charset="-122"/>
+                <a:cs typeface="Calibri" pitchFamily="34" charset="-120"/>
+              </a:rPr>
+              <a:t> · finite-state machines</a:t>
+            </a:r>
+            <a:endParaRPr lang="en-US" sz="1100" dirty="0"/>
+          </a:p>
+        </p:txBody>
+      </p:sp>
+      <p:sp>
+        <p:nvSpPr>
           <p:cNvPr id="25" name="Slide Number Placeholder 0"/>
           <p:cNvSpPr>
             <a:spLocks noGrp="1"/>
@@ -18105,9 +20060,59 @@
           </a:ln>
         </p:spPr>
       </p:sp>
+      <p:sp>
+        <p:nvSpPr>
+          <p:cNvPr id="4" name="Shape 2"/>
+          <p:cNvSpPr/>
+          <p:nvPr/>
+        </p:nvSpPr>
+        <p:spPr>
+          <a:xfrm>
+            <a:off x="8287715" y="91440"/>
+            <a:ext cx="3355340" cy="274320"/>
+          </a:xfrm>
+          <a:prstGeom prst="rect">
+            <a:avLst/>
+          </a:prstGeom>
+          <a:solidFill>
+            <a:srgbClr val="E0F2FE"/>
+          </a:solidFill>
+          <a:ln w="12700">
+            <a:solidFill>
+              <a:srgbClr val="0369A1"/>
+            </a:solidFill>
+            <a:prstDash val="solid"/>
+          </a:ln>
+        </p:spPr>
+      </p:sp>
+      <p:sp>
+        <p:nvSpPr>
+          <p:cNvPr id="5" name="Shape 3"/>
+          <p:cNvSpPr/>
+          <p:nvPr/>
+        </p:nvSpPr>
+        <p:spPr>
+          <a:xfrm>
+            <a:off x="8287715" y="91440"/>
+            <a:ext cx="73152" cy="274320"/>
+          </a:xfrm>
+          <a:prstGeom prst="rect">
+            <a:avLst/>
+          </a:prstGeom>
+          <a:solidFill>
+            <a:srgbClr val="0369A1"/>
+          </a:solidFill>
+          <a:ln w="12700">
+            <a:solidFill>
+              <a:srgbClr val="0369A1"/>
+            </a:solidFill>
+            <a:prstDash val="solid"/>
+          </a:ln>
+        </p:spPr>
+      </p:sp>
       <p:pic>
         <p:nvPicPr>
-          <p:cNvPr id="5" name="Image 0" descr="preencoded.png">    </p:cNvPr>
+          <p:cNvPr id="6" name="Image 0" descr="preencoded.png">    </p:cNvPr>
           <p:cNvPicPr>
             <a:picLocks noChangeAspect="1"/>
           </p:cNvPicPr>
@@ -18115,6 +20120,83 @@
         </p:nvPicPr>
         <p:blipFill>
           <a:blip r:embed="rId1"/>
+          <a:stretch>
+            <a:fillRect/>
+          </a:stretch>
+        </p:blipFill>
+        <p:spPr>
+          <a:xfrm>
+            <a:off x="8415731" y="128016"/>
+            <a:ext cx="201168" cy="201168"/>
+          </a:xfrm>
+          <a:prstGeom prst="rect">
+            <a:avLst/>
+          </a:prstGeom>
+        </p:spPr>
+      </p:pic>
+      <p:sp>
+        <p:nvSpPr>
+          <p:cNvPr id="7" name="Text 4"/>
+          <p:cNvSpPr txBox="1"/>
+          <p:nvPr/>
+        </p:nvSpPr>
+        <p:spPr>
+          <a:xfrm>
+            <a:off x="8671763" y="91440"/>
+            <a:ext cx="2934716" cy="274320"/>
+          </a:xfrm>
+          <a:prstGeom prst="rect">
+            <a:avLst/>
+          </a:prstGeom>
+          <a:noFill/>
+          <a:ln/>
+        </p:spPr>
+        <p:txBody>
+          <a:bodyPr wrap="square" lIns="0" tIns="0" rIns="0" bIns="0" rtlCol="0" anchor="ctr"/>
+          <a:lstStyle/>
+          <a:p>
+            <a:pPr indent="0" marL="0">
+              <a:buNone/>
+            </a:pPr>
+            <a:r>
+              <a:rPr lang="en-US" sz="1100" b="1" dirty="0">
+                <a:solidFill>
+                  <a:srgbClr val="075985"/>
+                </a:solidFill>
+                <a:latin typeface="Calibri" pitchFamily="34" charset="0"/>
+                <a:ea typeface="Calibri" pitchFamily="34" charset="-122"/>
+                <a:cs typeface="Calibri" pitchFamily="34" charset="-120"/>
+              </a:rPr>
+              <a:t>UNDERSTAND NOW</a:t>
+            </a:r>
+            <a:pPr indent="0" marL="0">
+              <a:buNone/>
+            </a:pPr>
+            <a:r>
+              <a:rPr lang="en-US" sz="1100" dirty="0">
+                <a:solidFill>
+                  <a:srgbClr val="075985"/>
+                </a:solidFill>
+                <a:latin typeface="Calibri" pitchFamily="34" charset="0"/>
+                <a:ea typeface="Calibri" pitchFamily="34" charset="-122"/>
+                <a:cs typeface="Calibri" pitchFamily="34" charset="-120"/>
+              </a:rPr>
+              <a:t> · finite-state machines</a:t>
+            </a:r>
+            <a:endParaRPr lang="en-US" sz="1100" dirty="0"/>
+          </a:p>
+        </p:txBody>
+      </p:sp>
+      <p:pic>
+        <p:nvPicPr>
+          <p:cNvPr id="9" name="Image 1" descr="preencoded.png">    </p:cNvPr>
+          <p:cNvPicPr>
+            <a:picLocks noChangeAspect="1"/>
+          </p:cNvPicPr>
+          <p:nvPr/>
+        </p:nvPicPr>
+        <p:blipFill>
+          <a:blip r:embed="rId2"/>
           <a:stretch>
             <a:fillRect/>
           </a:stretch>
@@ -19192,7 +21274,7 @@
       </p:graphicFrame>
       <p:sp>
         <p:nvSpPr>
-          <p:cNvPr id="7" name="Shape 2"/>
+          <p:cNvPr id="11" name="Shape 5"/>
           <p:cNvSpPr/>
           <p:nvPr/>
         </p:nvSpPr>
@@ -19217,7 +21299,7 @@
       </p:sp>
       <p:sp>
         <p:nvSpPr>
-          <p:cNvPr id="8" name="Text 3"/>
+          <p:cNvPr id="12" name="Text 6"/>
           <p:cNvSpPr txBox="1"/>
           <p:nvPr/>
         </p:nvSpPr>
@@ -19259,7 +21341,7 @@
       </p:sp>
       <p:sp>
         <p:nvSpPr>
-          <p:cNvPr id="9" name="Shape 4"/>
+          <p:cNvPr id="13" name="Shape 7"/>
           <p:cNvSpPr/>
           <p:nvPr/>
         </p:nvSpPr>
@@ -19284,7 +21366,7 @@
       </p:sp>
       <p:sp>
         <p:nvSpPr>
-          <p:cNvPr id="10" name="Text 5"/>
+          <p:cNvPr id="14" name="Text 8"/>
           <p:cNvSpPr txBox="1"/>
           <p:nvPr/>
         </p:nvSpPr>
@@ -19326,7 +21408,7 @@
       </p:sp>
       <p:sp>
         <p:nvSpPr>
-          <p:cNvPr id="11" name="Shape 6"/>
+          <p:cNvPr id="15" name="Shape 9"/>
           <p:cNvSpPr/>
           <p:nvPr/>
         </p:nvSpPr>
@@ -19351,7 +21433,7 @@
       </p:sp>
       <p:sp>
         <p:nvSpPr>
-          <p:cNvPr id="12" name="Text 7"/>
+          <p:cNvPr id="16" name="Text 10"/>
           <p:cNvSpPr txBox="1"/>
           <p:nvPr/>
         </p:nvSpPr>
@@ -19532,9 +21614,59 @@
           </a:ln>
         </p:spPr>
       </p:sp>
+      <p:sp>
+        <p:nvSpPr>
+          <p:cNvPr id="4" name="Shape 2"/>
+          <p:cNvSpPr/>
+          <p:nvPr/>
+        </p:nvSpPr>
+        <p:spPr>
+          <a:xfrm>
+            <a:off x="8222056" y="91440"/>
+            <a:ext cx="3420999" cy="274320"/>
+          </a:xfrm>
+          <a:prstGeom prst="rect">
+            <a:avLst/>
+          </a:prstGeom>
+          <a:solidFill>
+            <a:srgbClr val="E0F2FE"/>
+          </a:solidFill>
+          <a:ln w="12700">
+            <a:solidFill>
+              <a:srgbClr val="0369A1"/>
+            </a:solidFill>
+            <a:prstDash val="solid"/>
+          </a:ln>
+        </p:spPr>
+      </p:sp>
+      <p:sp>
+        <p:nvSpPr>
+          <p:cNvPr id="5" name="Shape 3"/>
+          <p:cNvSpPr/>
+          <p:nvPr/>
+        </p:nvSpPr>
+        <p:spPr>
+          <a:xfrm>
+            <a:off x="8222056" y="91440"/>
+            <a:ext cx="73152" cy="274320"/>
+          </a:xfrm>
+          <a:prstGeom prst="rect">
+            <a:avLst/>
+          </a:prstGeom>
+          <a:solidFill>
+            <a:srgbClr val="0369A1"/>
+          </a:solidFill>
+          <a:ln w="12700">
+            <a:solidFill>
+              <a:srgbClr val="0369A1"/>
+            </a:solidFill>
+            <a:prstDash val="solid"/>
+          </a:ln>
+        </p:spPr>
+      </p:sp>
       <p:pic>
         <p:nvPicPr>
-          <p:cNvPr id="5" name="Image 0" descr="preencoded.png">    </p:cNvPr>
+          <p:cNvPr id="6" name="Image 0" descr="preencoded.png">    </p:cNvPr>
           <p:cNvPicPr>
             <a:picLocks noChangeAspect="1"/>
           </p:cNvPicPr>
@@ -19542,6 +21674,83 @@
         </p:nvPicPr>
         <p:blipFill>
           <a:blip r:embed="rId1"/>
+          <a:stretch>
+            <a:fillRect/>
+          </a:stretch>
+        </p:blipFill>
+        <p:spPr>
+          <a:xfrm>
+            <a:off x="8350072" y="128016"/>
+            <a:ext cx="201168" cy="201168"/>
+          </a:xfrm>
+          <a:prstGeom prst="rect">
+            <a:avLst/>
+          </a:prstGeom>
+        </p:spPr>
+      </p:pic>
+      <p:sp>
+        <p:nvSpPr>
+          <p:cNvPr id="7" name="Text 4"/>
+          <p:cNvSpPr txBox="1"/>
+          <p:nvPr/>
+        </p:nvSpPr>
+        <p:spPr>
+          <a:xfrm>
+            <a:off x="8606104" y="91440"/>
+            <a:ext cx="3000375" cy="274320"/>
+          </a:xfrm>
+          <a:prstGeom prst="rect">
+            <a:avLst/>
+          </a:prstGeom>
+          <a:noFill/>
+          <a:ln/>
+        </p:spPr>
+        <p:txBody>
+          <a:bodyPr wrap="square" lIns="0" tIns="0" rIns="0" bIns="0" rtlCol="0" anchor="ctr"/>
+          <a:lstStyle/>
+          <a:p>
+            <a:pPr indent="0" marL="0">
+              <a:buNone/>
+            </a:pPr>
+            <a:r>
+              <a:rPr lang="en-US" sz="1100" b="1" dirty="0">
+                <a:solidFill>
+                  <a:srgbClr val="075985"/>
+                </a:solidFill>
+                <a:latin typeface="Calibri" pitchFamily="34" charset="0"/>
+                <a:ea typeface="Calibri" pitchFamily="34" charset="-122"/>
+                <a:cs typeface="Calibri" pitchFamily="34" charset="-120"/>
+              </a:rPr>
+              <a:t>UNDERSTAND NOW</a:t>
+            </a:r>
+            <a:pPr indent="0" marL="0">
+              <a:buNone/>
+            </a:pPr>
+            <a:r>
+              <a:rPr lang="en-US" sz="1100" dirty="0">
+                <a:solidFill>
+                  <a:srgbClr val="075985"/>
+                </a:solidFill>
+                <a:latin typeface="Calibri" pitchFamily="34" charset="0"/>
+                <a:ea typeface="Calibri" pitchFamily="34" charset="-122"/>
+                <a:cs typeface="Calibri" pitchFamily="34" charset="-120"/>
+              </a:rPr>
+              <a:t> · latches and flip-flops</a:t>
+            </a:r>
+            <a:endParaRPr lang="en-US" sz="1100" dirty="0"/>
+          </a:p>
+        </p:txBody>
+      </p:sp>
+      <p:pic>
+        <p:nvPicPr>
+          <p:cNvPr id="9" name="Image 1" descr="preencoded.png">    </p:cNvPr>
+          <p:cNvPicPr>
+            <a:picLocks noChangeAspect="1"/>
+          </p:cNvPicPr>
+          <p:nvPr/>
+        </p:nvPicPr>
+        <p:blipFill>
+          <a:blip r:embed="rId2"/>
           <a:stretch>
             <a:fillRect/>
           </a:stretch>
@@ -20619,7 +22828,7 @@
       </p:graphicFrame>
       <p:sp>
         <p:nvSpPr>
-          <p:cNvPr id="7" name="Shape 2"/>
+          <p:cNvPr id="11" name="Shape 5"/>
           <p:cNvSpPr/>
           <p:nvPr/>
         </p:nvSpPr>
@@ -20644,7 +22853,7 @@
       </p:sp>
       <p:sp>
         <p:nvSpPr>
-          <p:cNvPr id="8" name="Text 3"/>
+          <p:cNvPr id="12" name="Text 6"/>
           <p:cNvSpPr txBox="1"/>
           <p:nvPr/>
         </p:nvSpPr>
@@ -20686,7 +22895,7 @@
       </p:sp>
       <p:sp>
         <p:nvSpPr>
-          <p:cNvPr id="9" name="Shape 4"/>
+          <p:cNvPr id="13" name="Shape 7"/>
           <p:cNvSpPr/>
           <p:nvPr/>
         </p:nvSpPr>
@@ -20711,7 +22920,7 @@
       </p:sp>
       <p:sp>
         <p:nvSpPr>
-          <p:cNvPr id="10" name="Text 5"/>
+          <p:cNvPr id="14" name="Text 8"/>
           <p:cNvSpPr txBox="1"/>
           <p:nvPr/>
         </p:nvSpPr>
@@ -20753,7 +22962,7 @@
       </p:sp>
       <p:sp>
         <p:nvSpPr>
-          <p:cNvPr id="11" name="Shape 6"/>
+          <p:cNvPr id="15" name="Shape 9"/>
           <p:cNvSpPr/>
           <p:nvPr/>
         </p:nvSpPr>
@@ -20778,7 +22987,7 @@
       </p:sp>
       <p:sp>
         <p:nvSpPr>
-          <p:cNvPr id="12" name="Text 7"/>
+          <p:cNvPr id="16" name="Text 10"/>
           <p:cNvSpPr txBox="1"/>
           <p:nvPr/>
         </p:nvSpPr>
@@ -20820,7 +23029,7 @@
       </p:sp>
       <p:sp>
         <p:nvSpPr>
-          <p:cNvPr id="13" name="Shape 8"/>
+          <p:cNvPr id="17" name="Shape 11"/>
           <p:cNvSpPr/>
           <p:nvPr/>
         </p:nvSpPr>
@@ -20845,7 +23054,7 @@
       </p:sp>
       <p:sp>
         <p:nvSpPr>
-          <p:cNvPr id="14" name="Text 9"/>
+          <p:cNvPr id="18" name="Text 12"/>
           <p:cNvSpPr txBox="1"/>
           <p:nvPr/>
         </p:nvSpPr>
@@ -20907,7 +23116,7 @@
       </p:sp>
       <p:sp>
         <p:nvSpPr>
-          <p:cNvPr id="15" name="Shape 10"/>
+          <p:cNvPr id="19" name="Shape 13"/>
           <p:cNvSpPr/>
           <p:nvPr/>
         </p:nvSpPr>
@@ -20932,7 +23141,7 @@
       </p:sp>
       <p:sp>
         <p:nvSpPr>
-          <p:cNvPr id="16" name="Text 11"/>
+          <p:cNvPr id="20" name="Text 14"/>
           <p:cNvSpPr txBox="1"/>
           <p:nvPr/>
         </p:nvSpPr>

--- a/en/slides/13-Computer_Architecture-Sequential_Machines.pptx
+++ b/en/slides/13-Computer_Architecture-Sequential_Machines.pptx
@@ -126,19 +126,19 @@
   <p:extLst>
     <p:ext uri="{521415D9-36F7-43E2-AB2F-B90AF26B5E84}">
       <p14:sectionLst xmlns:p14="http://schemas.microsoft.com/office/powerpoint/2010/main">
-        <p14:section name="Opening" id="{5c09e7f5-f37c-2563-9c2e-891b1e1279ee}">
+        <p14:section name="Opening" id="{0d8476af-a276-28a9-2555-c574bf4d3805}">
           <p14:sldIdLst>
             <p14:sldId id="256"/>
             <p14:sldId id="257"/>
           </p14:sldIdLst>
         </p14:section>
-        <p14:section name="Time and state" id="{a5366134-142d-216a-6ef9-8328891ead2f}">
+        <p14:section name="Time and state" id="{1e5893b1-a88a-1a04-7a56-202468c5cdfc}">
           <p14:sldIdLst>
             <p14:sldId id="258"/>
             <p14:sldId id="259"/>
           </p14:sldIdLst>
         </p14:section>
-        <p14:section name="Finite-state machines" id="{0bf2711b-4d94-bf7c-73a6-6d814977bcf5}">
+        <p14:section name="Finite-state machines" id="{f40091fd-0124-ba21-70f0-3a41d323fc72}">
           <p14:sldIdLst>
             <p14:sldId id="260"/>
             <p14:sldId id="261"/>
@@ -146,7 +146,7 @@
             <p14:sldId id="263"/>
           </p14:sldIdLst>
         </p14:section>
-        <p14:section name="Latches" id="{3f78aab7-c5c7-f15b-efb3-323efd5d4602}">
+        <p14:section name="Latches" id="{86b7e2d2-d2d7-a236-7ae8-101c834978b8}">
           <p14:sldIdLst>
             <p14:sldId id="264"/>
             <p14:sldId id="265"/>
@@ -155,13 +155,13 @@
             <p14:sldId id="268"/>
           </p14:sldIdLst>
         </p14:section>
-        <p14:section name="Flip-flops" id="{7f7415f0-d982-66ff-513c-0e8c4efbe36c}">
+        <p14:section name="Flip-flops" id="{0c736746-95a1-5df7-a6f9-beae23c52187}">
           <p14:sldIdLst>
             <p14:sldId id="269"/>
             <p14:sldId id="270"/>
           </p14:sldIdLst>
         </p14:section>
-        <p14:section name="Back to the machine" id="{7a9facd9-1f92-b3b7-75fc-5297434efbef}">
+        <p14:section name="Back to the machine" id="{83702c2d-a871-caaf-d500-30a2d0c1378e}">
           <p14:sldIdLst>
             <p14:sldId id="271"/>
             <p14:sldId id="272"/>

--- a/en/slides/13-Computer_Architecture-Sequential_Machines.pptx
+++ b/en/slides/13-Computer_Architecture-Sequential_Machines.pptx
@@ -126,19 +126,19 @@
   <p:extLst>
     <p:ext uri="{521415D9-36F7-43E2-AB2F-B90AF26B5E84}">
       <p14:sectionLst xmlns:p14="http://schemas.microsoft.com/office/powerpoint/2010/main">
-        <p14:section name="Opening" id="{0d8476af-a276-28a9-2555-c574bf4d3805}">
+        <p14:section name="Opening" id="{da9f5d46-bbdd-68a5-6e25-a200fbce2ac8}">
           <p14:sldIdLst>
             <p14:sldId id="256"/>
             <p14:sldId id="257"/>
           </p14:sldIdLst>
         </p14:section>
-        <p14:section name="Time and state" id="{1e5893b1-a88a-1a04-7a56-202468c5cdfc}">
+        <p14:section name="Time and state" id="{0f9fb4cf-e844-9bfa-25ce-2b6e9cd388c4}">
           <p14:sldIdLst>
             <p14:sldId id="258"/>
             <p14:sldId id="259"/>
           </p14:sldIdLst>
         </p14:section>
-        <p14:section name="Finite-state machines" id="{f40091fd-0124-ba21-70f0-3a41d323fc72}">
+        <p14:section name="Finite-state machines" id="{34595e00-61b6-e6cd-475c-f960ac33379b}">
           <p14:sldIdLst>
             <p14:sldId id="260"/>
             <p14:sldId id="261"/>
@@ -146,7 +146,7 @@
             <p14:sldId id="263"/>
           </p14:sldIdLst>
         </p14:section>
-        <p14:section name="Latches" id="{86b7e2d2-d2d7-a236-7ae8-101c834978b8}">
+        <p14:section name="Latches" id="{f012ef29-5275-3a27-371d-3c31eeb673af}">
           <p14:sldIdLst>
             <p14:sldId id="264"/>
             <p14:sldId id="265"/>
@@ -155,13 +155,13 @@
             <p14:sldId id="268"/>
           </p14:sldIdLst>
         </p14:section>
-        <p14:section name="Flip-flops" id="{0c736746-95a1-5df7-a6f9-beae23c52187}">
+        <p14:section name="Flip-flops" id="{f4f9db32-b997-e0b0-379a-66d52857111b}">
           <p14:sldIdLst>
             <p14:sldId id="269"/>
             <p14:sldId id="270"/>
           </p14:sldIdLst>
         </p14:section>
-        <p14:section name="Back to the machine" id="{83702c2d-a871-caaf-d500-30a2d0c1378e}">
+        <p14:section name="Back to the machine" id="{dc40eaa0-e320-c8bb-96ae-f84b7de3ce29}">
           <p14:sldIdLst>
             <p14:sldId id="271"/>
             <p14:sldId id="272"/>
@@ -574,7 +574,7 @@
           <a:p>
             <a:r>
               <a:rPr lang="en-US" dirty="0"/>
-              <a:t>The third block of the course begins: state and memory. The machines of Lecture 11 had no memory: the same inputs always gave the same outputs. A computer, however, remembers: a counter survives from one frame to the next, a game knows whether it is showing the title or the playfield. This lecture introduces time and state, the model that describes every circuit with memory, and the elementary memories, latches and flip-flops, from which the registers of the processor are built.
+              <a:t>The third block of the course opens: state and memory. The machines of Lecture 11 had no memory: identical inputs always produced identical outputs. A computer, however, remembers: a counter persists from one frame to the next, and a game knows whether it is displaying the title or the playfield. This lecture introduces time and state, the model that describes every circuit with memory, and the elementary storage elements, latches and flip-flops, from which the registers of the processor are built. It is the conceptual hinge between logic and architecture.
 Learning status: UNDERSTAND NOW, by the end of this lecture you explain it, trace it and apply it on your own; USE NOW, you follow and use the recipe today; how it works inside is explained later, or is not part of the course; UNDERSTAND LATER, recognise the name and what it is for; a later lecture explains it. A slide without a badge is context: a story, an example, a question, an exercise.
 Learning status of this lecture. UNDERSTAND NOW: finite-state machines; the clock; latches and flip-flops; registers as flip-flops. USE NOW: the complete program, the PRG32 tools (used, not studied, in this course). UNDERSTAND LATER: nothing. A slide without a badge is context: a story, an example, a question, an exercise.
 For the lecturer: The quotation is translated back from the Italian version used in the original deck. Spiral: a game with a title screen is a finite-state machine written in assembly; the lecture then builds the theory (time, state, Mealy and Moore), the memory elements (latches and flip-flops), and returns to the registers and the program counter of RISC-V.</a:t>
@@ -665,7 +665,7 @@
           <a:p>
             <a:r>
               <a:rPr lang="en-US" dirty="0"/>
-              <a:t>The latch in time. S goes to 1, and after the delay of the gates Q becomes 1. Then S returns to 0 and nothing happens: the feedback keeps Q at 1. This flat stretch is the memory. Later R goes to 1, Q returns to 0, and it stays there when R returns to 0. Follow the four marked instants on the drawing with the circuit of the previous slide in front of you, working out the output of each gate.
+              <a:t>The latch observed in time. S rises to 1, and after the delay of the gates Q becomes 1. S then returns to 0 and nothing changes: the feedback holds Q at 1. This flat interval is the memory. Later R rises to 1, Q returns to 0, and remains there when R returns to 0. The four marked instants should be followed with the circuit of the previous slide at hand, determining the output of each gate at each instant.
 UNDERSTAND NOW: latches and flip-flops.
 For the lecturer: Diagramma temporale. The original deck traced each of these four steps gate by gate over a dozen slides; replay them on the board with the circuit of the previous slide. The latch is a Moore automaton: its output is its state.</a:t>
             </a:r>
@@ -755,7 +755,7 @@
           <a:p>
             <a:r>
               <a:rPr lang="en-US" dirty="0"/>
-              <a:t>With S and R both at 1, both NOR gates output 0, so Q and its complement are no longer complementary. Worse: if the two inputs then return to 0 together, the gates race against each other, and the final state depends on which is faster. The result is unpredictable, and the latch may even oscillate. Whoever uses an SR latch must guarantee that S and R are never 1 together. The JK and D elements were invented to remove this problem at the root.
+              <a:t>With S and R both at 1, both NOR gates output 0, so Q and its complement are no longer complementary. Worse, if the two inputs then return to 0 simultaneously, the gates race, and the final state depends on which is faster. The outcome is unpredictable, and the latch may even oscillate, a condition known as metastability in its general form. A designer using an SR latch must guarantee that S and R are never 1 together. The JK and D elements were devised to eliminate this hazard at its root.
 UNDERSTAND NOW: latches and flip-flops.
 For the lecturer: The conclusions of the original deck swapped set and reset on one slide: set gives Q = 1, reset gives Q = 0.</a:t>
             </a:r>
@@ -845,7 +845,7 @@
           <a:p>
             <a:r>
               <a:rPr lang="en-US" dirty="0"/>
-              <a:t>In an asynchronous circuit the outputs may change whenever an input changes. In a synchronous one the clock decides when. To make the SR latch synchronous, S and R pass through two AND gates together with the clock. When the clock is 0 both gates give 0 and the latch cannot change; when the clock is 1 it behaves like the plain latch. The clock decides when the inputs are listened to.
+              <a:t>In an asynchronous circuit the outputs may change whenever an input changes; in a synchronous one the clock determines when. To make the SR latch synchronous, S and R are passed through two AND gates together with the clock. When the clock is 0 both gates output 0 and the latch cannot change; when the clock is 1 it behaves as the plain latch. The clock thus decides when the inputs are heeded.
 UNDERSTAND NOW: latches and flip-flops.
 For the lecturer: Latch sincroni e asincroni. A simulator is suggested in the original deck: de-iitr.vlabs.ac.in/exp/truth-tables-flip-flops.</a:t>
             </a:r>
@@ -935,7 +935,7 @@
           <a:p>
             <a:r>
               <a:rPr lang="en-US" dirty="0"/>
-              <a:t>Two improvements of the latch. In the JK latch the outputs are fed back to the input gates, so that the internal set and reset can never be 1 together; the combination J = K = 1, instead of being forbidden, inverts the output: it toggles. The D latch has a single input: D goes to set and its negation to reset, so the output simply takes the value of D while the clock is active. D stands for delay, or data.
+              <a:t>Two refinements of the latch. In the JK latch the outputs are fed back to the input gates, so that the internal set and reset can never be 1 together; the combination J = K = 1, instead of being forbidden, inverts the output, which is called toggling. The D latch has a single input: D drives set and its negation drives reset, so the output simply follows D while the clock is active. D stands for delay, or data.
 UNDERSTAND NOW: latches and flip-flops.
 For the lecturer: JK: the outputs are fed back to the input gates, S = J . Q' and R = K . Q; since Q and Q' are complementary, S and R can never both be 1. D: a single input goes to S and, through an inverter, to R, so only the cases S = 0, R = 1 and S = 1, R = 0 are possible.</a:t>
             </a:r>
@@ -1025,7 +1025,7 @@
           <a:p>
             <a:r>
               <a:rPr lang="en-US" dirty="0"/>
-              <a:t>The master-slave flip-flop is made of two latches in series, controlled by opposite levels of the clock. When the clock is 0 the master is open and follows the input, while the slave is closed. When the clock passes to 1 the master closes, keeping what it had, and the slave opens and shows it. The two are never transparent together, so the input can never run straight through to the output. The effect is that the output changes only at the rising edge: the flip-flop is edge-triggered.
+              <a:t>The master-slave flip-flop consists of two latches in series, enabled by opposite levels of the clock. When the clock is 0 the master is transparent and follows the input, while the slave is opaque. When the clock rises to 1 the master closes, retaining its content, and the slave opens and presents it. The two are never transparent simultaneously, so the input can never propagate directly to the output. The effect is that the output changes only at the rising edge: the flip-flop is edge-triggered.
 UNDERSTAND NOW: latches and flip-flops.
 For the lecturer: Flip-flop master-slave. The original deck showed the JK version, built from two clocked JK latches; the D version is the one used in the registers of a processor.</a:t>
             </a:r>
@@ -1115,7 +1115,7 @@
           <a:p>
             <a:r>
               <a:rPr lang="en-US" dirty="0"/>
-              <a:t>The difference, seen on the waveforms. The clock and the input D are the same for both. The output of the latch follows D for the whole high phase of the clock: it changes in the middle of a phase. The output of the flip-flop changes only at the rising edges, taking the value that D has at that instant; short pulses of D between two edges are ignored. The flip-flop's output is steady for a whole period, which is exactly what a state register needs.
+              <a:t>The difference made visible on the waveforms. The clock and the input D are identical for both elements. The output of the latch follows D throughout the high phase of the clock, and may therefore change in the middle of a phase. The output of the flip-flop changes only at rising edges, taking the value D has at that instant; short pulses of D between edges are ignored. The flip-flop's output is stable for a whole period, which is precisely the property a state register requires.
 UNDERSTAND NOW: latches and flip-flops.
 For the lecturer: Level-triggered versus edge-triggered. The waveforms are computed, not drawn by hand: the latch output changes in the middle of a high phase, the flip-flop output only at rising edges.</a:t>
             </a:r>
@@ -1205,7 +1205,7 @@
           <a:p>
             <a:r>
               <a:rPr lang="en-US" dirty="0"/>
-              <a:t>A register is a row of flip-flops with a common clock: one flip-flop per bit. With a load-enable signal it takes a new value only when asked, and otherwise keeps the old one. RISC-V has thirty-two registers of thirty-two bits: 1,024 flip-flops. Now the two machines of Lecture 11 find their place: the decoder driven by the field rd activates the load enable of one register only, and the multiplexers select which registers are read.
+              <a:t>A register is a row of flip-flops sharing a clock, one flip-flop per bit. With a load-enable signal it accepts a new value only on request and otherwise retains the old one. RISC-V has thirty-two registers of thirty-two bits, hence 1,024 flip-flops. The two machines of Lecture 11 now find their place: the decoder driven by the rd field asserts the load enable of a single register, and the multiplexers select which registers are read. The register file is thus a synthesis of the combinational and the sequential.
 UNDERSTAND NOW: registers as flip-flops.
 For the lecturer: Registro. The original deck used the 74273 (eight D flip-flops, one clock and a clear) as its example. Registers, shift registers, buses and three-state buffers are the subject of the next lecture.</a:t>
             </a:r>
@@ -1295,8 +1295,8 @@
           <a:p>
             <a:r>
               <a:rPr lang="en-US" dirty="0"/>
-              <a:t>Recall where the output is written in the two kinds of diagram. In a Moore machine it is inside the nodes: it belongs to the state, and the input does not enter into it.
-Look at the table of the SR latch: which row has both inputs at 0? It is the row of memory. The feedback keeps the stored value, whatever it was.
+              <a:t>For the first question one recalls where the output is written in each kind of diagram. In a Moore machine it lies inside the nodes: it belongs to the state, and the input does not enter into it.
+For the second, the table of the SR latch is consulted for the row with both inputs at 0. It is the row of memory: the feedback retains the stored value, whatever it was.
 For the lecturer: 1. Answer: B. Moore: w maps S to U. In a Mealy machine the output depends on the state and on the input.
 2. Answer: C. S = R = 0 is the hold condition: the feedback keeps the stored value.</a:t>
             </a:r>
@@ -1386,8 +1386,8 @@
           <a:p>
             <a:r>
               <a:rPr lang="en-US" dirty="0"/>
-              <a:t>Both elements store one bit and both have a clock. The difference is when they listen: the latch for the whole active level, the flip-flop only at the instant of an edge.
-A machine with N states needs enough state variables to give each state a different code: the smallest k such that 2 to the k is at least N. It is the formula of the fixed-length codes of Lecture 11.
+              <a:t>For the first question: both elements store one bit and both have a clock. The difference lies in when they respond: the latch throughout the active level, the flip-flop only at the instant of an edge.
+For the second, a machine with N states requires enough state variables to give each state a distinct code: the smallest k such that 2^k is at least N. This is the fixed-length code formula of Lecture 11.
 For the lecturer: 1. Answer: C. The latch is transparent for the whole active level of the clock; the flip-flop samples D only on the edge.
 2. Answer: B. ceil(log2 10) = 4 state variables, with the minimum-length binary code of Lecture 11. Ten would be needed with a one-hot code.</a:t>
             </a:r>
@@ -1477,7 +1477,7 @@
           <a:p>
             <a:r>
               <a:rPr lang="en-US" dirty="0"/>
-              <a:t>Twelve terms. Feedback is retroazione. The rising and falling edge are the fronte di salita and di discesa. Level-triggered and edge-triggered say when a memory element listens. Present state and next state are the two values around a clock edge. Latch and flip-flop are not translated; the general Italian word is bistabile.</a:t>
+              <a:t>Twelve terms. Feedback is retroazione. The rising and falling edge are the fronte di salita and fronte di discesa. Level-triggered and edge-triggered specify when a storage element responds. Present state and next state are the two values on either side of a clock edge. Latch and flip-flop are not translated; the general Italian term is bistabile.</a:t>
             </a:r>
             <a:endParaRPr lang="en-US" dirty="0"/>
           </a:p>
@@ -1565,7 +1565,7 @@
           <a:p>
             <a:r>
               <a:rPr lang="en-US" dirty="0"/>
-              <a:t>Six objectives. Explain why a sequential circuit needs the concepts of time and of state. Define a finite-state machine and distinguish Mealy from Moore. Describe a machine with a state table and with a state diagram. Explain how an SR latch remembers one bit and why one combination of its inputs is forbidden. Distinguish latches from flip-flops, level from edge. And recognise registers, counters and the program counter as sequential machines.</a:t>
+              <a:t>Six learning outcomes. Explaining why a sequential circuit requires the concepts of time and state. Defining a finite-state machine and distinguishing the Mealy and Moore models. Describing a machine by a state table and by a state diagram, and translating between them. Explaining how an SR latch stores a bit and why one input combination is forbidden. Distinguishing latches from flip-flops, level-triggering from edge-triggering. And recognising registers, counters and the program counter as sequential machines.</a:t>
             </a:r>
             <a:endParaRPr lang="en-US" dirty="0"/>
           </a:p>
@@ -1653,7 +1653,7 @@
           <a:p>
             <a:r>
               <a:rPr lang="en-US" dirty="0"/>
-              <a:t>Five conclusions. Digital circuits are combinational or sequential, and for the second kind time and state matter. A sequential machine implements a finite-state automaton, of the Mealy or the Moore type. Latches and flip-flops are the elementary memories, and feedback is what makes a circuit remember. The clock decides when: latches listen during a level, flip-flops on an edge. Registers, counters, the program counter and the processor are sequential machines built around combinational networks.
+              <a:t>Five conclusions. Digital circuits are combinational or sequential, and for the latter time and state are essential. A sequential machine realises a finite-state automaton, of Mealy or Moore type. Latches and flip-flops are the elementary memories, and feedback is what enables a circuit to remember. The clock determines when: latches respond during a level, flip-flops at an edge. Registers, counters, the program counter and the processor itself are sequential machines built around combinational networks. The next lecture assembles registers into the elementary machines of the datapath.
 Learning status, recap. UNDERSTAND NOW: finite-state machines; the clock; latches and flip-flops; registers as flip-flops. USE NOW: the complete program, the PRG32 tools (used, not studied, in this course). UNDERSTAND LATER: nothing. A slide without a badge is context: a story, an example, a question, an exercise.
 For the lecturer: Next lecture: the elementary machines for the architecture: registers, shift registers, buses and three-state buffers.</a:t>
             </a:r>
@@ -1743,7 +1743,7 @@
           <a:p>
             <a:r>
               <a:rPr lang="en-US" dirty="0"/>
-              <a:t>The clock is a signal that alternates regularly between 0 and 1. The drawing names its parts: the period T, the high time and the low time, the rising edge, where it passes from 0 to 1, and the falling edge. The frequency is the number of periods per second, one divided by T. Synchronous circuits change state on one of the two edges. For the kit: 160 MHz means a period of 6.25 nanoseconds, and every combinational network in the chip must settle within that time.
+              <a:t>The clock is a signal that alternates regularly between 0 and 1. The drawing labels its features: the period T, the high and low times, the rising edge, where it passes from 0 to 1, and the falling edge. The frequency is the number of periods per second, 1/T. Synchronous circuits change state on one of the two edges. For the kit, 160 MHz corresponds to a period of 6.25 nanoseconds, and every combinational network on the chip must settle within that interval: the critical path of Lecture 11 thus sets an upper bound on the clock frequency.
 UNDERSTAND NOW: the clock.
 For the lecturer: Fronte di salita, fronte di discesa, periodo TCK, TH and TL in the original slide. The link with Lecture 11: the period must exceed the critical path. In a PRG32 game the frame plays the role of a much slower clock.</a:t>
             </a:r>
@@ -1833,7 +1833,7 @@
           <a:p>
             <a:r>
               <a:rPr lang="en-US" dirty="0"/>
-              <a:t>The state is a summary of the whole previous history of the inputs: everything the circuit needs to know about the past in order to behave correctly from now on. It is held by state variables. A transition function computes the next state from the present state and the present inputs, and the state is updated once per clock cycle. The formula on the right says it compactly. To store the state we need elements with two stable conditions: latches and flip-flops.
+              <a:t>The state is a summary of the entire past history of the inputs: whatever the circuit needs to know about the past in order to behave correctly from now on. It is held in state variables. A transition function computes the next state from the present state and the present inputs, and the state is updated once per clock cycle, as the formula on the right states compactly. The notion of state is a powerful abstraction: an unbounded history is replaced by a finite amount of information. Storing it requires elements with two stable conditions, latches and flip-flops.
 UNDERSTAND NOW: finite-state machines.
 For the lecturer: In the warm-up: one state variable (the word state), the transition function is game_update, the clock is the frame.</a:t>
             </a:r>
@@ -1923,7 +1923,7 @@
           <a:p>
             <a:r>
               <a:rPr lang="en-US" dirty="0"/>
-              <a:t>The formal definition. A sequential machine is made of five things: an input alphabet I and an output alphabet U, which are finite sets of symbols; a finite set of states S; a next-state function, which for each pair of state and input gives one next state; and an output function. Compare it with the warm-up: the input is "A pressed or not", the states are TITLE, PLAY and OVER, the next-state function is the code of game_update, and the output is the screen.
+              <a:t>The formal definition. A sequential machine is specified by five components: an input alphabet I and an output alphabet U, both finite sets of symbols; a finite set of states S; a next-state function, which assigns a next state to each pair of state and input; and an output function. The warm-up instantiates the definition: the input is "A pressed or not", the states are TITLE, PLAY and OVER, the next-state function is the code of game_update, and the output is the screen.
 UNDERSTAND NOW: finite-state machines.
 For the lecturer: Automa a stati finiti; macchina sequenziale. With k state variables there are at most 2^k states. The source slide wrote the functions with 'belongs to' signs: the correct arrows are used here.</a:t>
             </a:r>
@@ -2013,7 +2013,7 @@
           <a:p>
             <a:r>
               <a:rPr lang="en-US" dirty="0"/>
-              <a:t>There are two ways of defining the output. In a Mealy machine the output depends on the state and on the input: it is written on the transitions, and it can react to an input in the same cycle. In a Moore machine the output depends on the state alone: it is written inside the states and changes only when the state changes. The game of the warm-up is a Moore machine: each state has its screen. The two models are equivalent, though the number of states may differ.
+              <a:t>There are two ways of defining the output. In a Mealy machine the output depends on both the state and the input; it is written on the transitions and can respond to an input within the same cycle. In a Moore machine the output depends on the state alone; it is written inside the states and changes only when the state changes. The game of the warm-up is a Moore machine, since each state has its own screen. The two models have equal expressive power, although the number of states required may differ.
 UNDERSTAND NOW: finite-state machines.
 For the lecturer: Every Mealy machine has an equivalent Moore machine and vice versa, possibly with a different number of states.</a:t>
             </a:r>
@@ -2103,7 +2103,7 @@
           <a:p>
             <a:r>
               <a:rPr lang="en-US" dirty="0"/>
-              <a:t>The general architecture of every sequential machine. A combinational network computes the next state and the outputs from the inputs and the present state. A register of flip-flops holds the present state. At each clock edge the next state becomes the present state. The loop from the network to the register and back is what makes memory possible, and the register is what keeps the loop under control: values go round once per cycle, never faster. Everything in Lecture 11 lives in the upper box.
+              <a:t>The general architecture of every sequential machine. A combinational network computes the next state and the outputs from the inputs and the present state; a register of flip-flops holds the present state; at each clock edge the next state becomes the present state. The loop from the network to the register and back is what makes memory possible, and the register is what disciplines the loop: values circulate once per cycle, never faster. Every machine of Lecture 11 belongs to the upper block. This diagram, with suitable contents, describes the processor itself.
 UNDERSTAND NOW: finite-state machines.
 For the lecturer: Rete combinatoria and registri di stato. The warm-up has exactly this shape: game_update is the upper box, the word state is the register, the frame is the clock.</a:t>
             </a:r>
@@ -2193,7 +2193,7 @@
           <a:p>
             <a:r>
               <a:rPr lang="en-US" dirty="0"/>
-              <a:t>The two equivalent descriptions of a machine, for a Mealy example with four states. In the state table each row is a present state and each column an input symbol; the cell gives the next state and, after the slash, the output. In the state diagram each state is a node and each transition an arrow labelled input slash output. Practise going from one to the other: take the row of s0 and find its two arrows in the drawing.
+              <a:t>Two equivalent descriptions of a machine, illustrated by a four-state Mealy example. In the state table each row is a present state and each column an input symbol; each cell gives the next state and, after the slash, the output. In the state diagram each state is a node and each transition an arrow labelled input/output. Translating between the two should be practised: the row of s0 is taken and its two arrows located in the drawing.
 UNDERSTAND NOW: finite-state machines.
 For the lecturer: Tabella degli stati and diagramma degli stati: G(V, E, L) with V the nodes (states), E the arcs (transitions) and L the labels. The example is the one of the original deck.</a:t>
             </a:r>
@@ -2283,7 +2283,7 @@
           <a:p>
             <a:r>
               <a:rPr lang="en-US" dirty="0"/>
-              <a:t>The SR latch: two NOR gates, each with its output connected to an input of the other. S, for set, brings Q to 1; R, for reset, brings Q to 0. With both at 0 the latch keeps its last value: it remembers which input was 1 most recently. The table summarises the four cases, and the last one is forbidden. Because of the feedback Q depends on itself: in a circuit with a loop, a signal is a waveform in time and not a single value.
+              <a:t>The SR latch consists of two NOR gates, each with its output connected to an input of the other. S, for set, drives Q to 1; R, for reset, drives Q to 0. With both at 0 the latch retains its last value: it remembers which input was most recently 1. The table summarises the four cases, the last of which is forbidden. Because of the feedback, Q depends on itself: in a circuit with a loop a signal must be understood as a waveform in time, not as a single value.
 UNDERSTAND NOW: latches and flip-flops.
 For the lecturer: Q = (R + Q')' and Q' = (S + Q)'. Breaking the feedback wire turns the latch into a plain combinational network of two NORs: that is how the original deck analysed it, case by case. The same latch can be built with two NAND gates and active-low inputs.</a:t>
             </a:r>
@@ -3363,7 +3363,7 @@
                 <a:ea typeface="Calibri" pitchFamily="34" charset="-122"/>
                 <a:cs typeface="Calibri" pitchFamily="34" charset="-120"/>
               </a:rPr>
-              <a:t>13-Computer_Architecture-Sequential_Machines-Code.pptx</a:t>
+              <a:t>13-Computer_Architecture-Sequential_Machines-Lab.pptx</a:t>
             </a:r>
             <a:endParaRPr lang="en-US" sz="1300" dirty="0"/>
           </a:p>

--- a/en/slides/13-Computer_Architecture-Sequential_Machines.pptx
+++ b/en/slides/13-Computer_Architecture-Sequential_Machines.pptx
@@ -126,19 +126,19 @@
   <p:extLst>
     <p:ext uri="{521415D9-36F7-43E2-AB2F-B90AF26B5E84}">
       <p14:sectionLst xmlns:p14="http://schemas.microsoft.com/office/powerpoint/2010/main">
-        <p14:section name="Opening" id="{da9f5d46-bbdd-68a5-6e25-a200fbce2ac8}">
+        <p14:section name="Opening" id="{eeb25d55-e784-d7ca-79cf-597c65e182dd}">
           <p14:sldIdLst>
             <p14:sldId id="256"/>
             <p14:sldId id="257"/>
           </p14:sldIdLst>
         </p14:section>
-        <p14:section name="Time and state" id="{0f9fb4cf-e844-9bfa-25ce-2b6e9cd388c4}">
+        <p14:section name="Time and state" id="{d3f90b77-8791-067a-b7f5-d6b84b11bd02}">
           <p14:sldIdLst>
             <p14:sldId id="258"/>
             <p14:sldId id="259"/>
           </p14:sldIdLst>
         </p14:section>
-        <p14:section name="Finite-state machines" id="{34595e00-61b6-e6cd-475c-f960ac33379b}">
+        <p14:section name="Finite-state machines" id="{5eb58037-64fc-6ab1-ef54-b4212d5a4197}">
           <p14:sldIdLst>
             <p14:sldId id="260"/>
             <p14:sldId id="261"/>
@@ -146,7 +146,7 @@
             <p14:sldId id="263"/>
           </p14:sldIdLst>
         </p14:section>
-        <p14:section name="Latches" id="{f012ef29-5275-3a27-371d-3c31eeb673af}">
+        <p14:section name="Latches" id="{5083d3a8-bb7d-0e31-a359-4b3858080de4}">
           <p14:sldIdLst>
             <p14:sldId id="264"/>
             <p14:sldId id="265"/>
@@ -155,13 +155,13 @@
             <p14:sldId id="268"/>
           </p14:sldIdLst>
         </p14:section>
-        <p14:section name="Flip-flops" id="{f4f9db32-b997-e0b0-379a-66d52857111b}">
+        <p14:section name="Flip-flops" id="{4af58478-6561-5361-4738-5c6866b5a5bc}">
           <p14:sldIdLst>
             <p14:sldId id="269"/>
             <p14:sldId id="270"/>
           </p14:sldIdLst>
         </p14:section>
-        <p14:section name="Back to the machine" id="{dc40eaa0-e320-c8bb-96ae-f84b7de3ce29}">
+        <p14:section name="Back to the machine" id="{ca3ab1b0-43b1-7109-c1ec-6dee7a01881d}">
           <p14:sldIdLst>
             <p14:sldId id="271"/>
             <p14:sldId id="272"/>

--- a/en/slides/13-Computer_Architecture-Sequential_Machines.pptx
+++ b/en/slides/13-Computer_Architecture-Sequential_Machines.pptx
@@ -126,19 +126,19 @@
   <p:extLst>
     <p:ext uri="{521415D9-36F7-43E2-AB2F-B90AF26B5E84}">
       <p14:sectionLst xmlns:p14="http://schemas.microsoft.com/office/powerpoint/2010/main">
-        <p14:section name="Opening" id="{eeb25d55-e784-d7ca-79cf-597c65e182dd}">
+        <p14:section name="Opening" id="{f431e381-12bd-9c51-9179-686a4bae70c7}">
           <p14:sldIdLst>
             <p14:sldId id="256"/>
             <p14:sldId id="257"/>
           </p14:sldIdLst>
         </p14:section>
-        <p14:section name="Time and state" id="{d3f90b77-8791-067a-b7f5-d6b84b11bd02}">
+        <p14:section name="Time and state" id="{7fd71cec-4d48-f3bb-dbec-5d760c54cc48}">
           <p14:sldIdLst>
             <p14:sldId id="258"/>
             <p14:sldId id="259"/>
           </p14:sldIdLst>
         </p14:section>
-        <p14:section name="Finite-state machines" id="{5eb58037-64fc-6ab1-ef54-b4212d5a4197}">
+        <p14:section name="Finite-state machines" id="{3ab02725-fba5-a884-ead3-2354ec47a752}">
           <p14:sldIdLst>
             <p14:sldId id="260"/>
             <p14:sldId id="261"/>
@@ -146,7 +146,7 @@
             <p14:sldId id="263"/>
           </p14:sldIdLst>
         </p14:section>
-        <p14:section name="Latches" id="{5083d3a8-bb7d-0e31-a359-4b3858080de4}">
+        <p14:section name="Latches" id="{77b3a4a5-7613-3ed4-5346-1a533bfca806}">
           <p14:sldIdLst>
             <p14:sldId id="264"/>
             <p14:sldId id="265"/>
@@ -155,13 +155,13 @@
             <p14:sldId id="268"/>
           </p14:sldIdLst>
         </p14:section>
-        <p14:section name="Flip-flops" id="{4af58478-6561-5361-4738-5c6866b5a5bc}">
+        <p14:section name="Flip-flops" id="{cf88f3d8-b518-c4da-a8e1-c87fc91691dd}">
           <p14:sldIdLst>
             <p14:sldId id="269"/>
             <p14:sldId id="270"/>
           </p14:sldIdLst>
         </p14:section>
-        <p14:section name="Back to the machine" id="{ca3ab1b0-43b1-7109-c1ec-6dee7a01881d}">
+        <p14:section name="Back to the machine" id="{1d03a4cf-fa07-963a-d56a-4338c9dcd0cc}">
           <p14:sldIdLst>
             <p14:sldId id="271"/>
             <p14:sldId id="272"/>
@@ -577,6 +577,7 @@
               <a:t>The third block of the course opens: state and memory. The machines of Lecture 11 had no memory: identical inputs always produced identical outputs. A computer, however, remembers: a counter persists from one frame to the next, and a game knows whether it is displaying the title or the playfield. This lecture introduces time and state, the model that describes every circuit with memory, and the elementary storage elements, latches and flip-flops, from which the registers of the processor are built. It is the conceptual hinge between logic and architecture.
 Learning status: UNDERSTAND NOW, by the end of this lecture you explain it, trace it and apply it on your own; USE NOW, you follow and use the recipe today; how it works inside is explained later, or is not part of the course; UNDERSTAND LATER, recognise the name and what it is for; a later lecture explains it. A slide without a badge is context: a story, an example, a question, an exercise.
 Learning status of this lecture. UNDERSTAND NOW: finite-state machines; the clock; latches and flip-flops; registers as flip-flops. USE NOW: the complete program, the PRG32 tools (used, not studied, in this course). UNDERSTAND LATER: nothing. A slide without a badge is context: a story, an example, a question, an exercise.
+Roadmap. Today's outcomes: (1) describe a finite-state machine with a state diagram; (2) explain the clock and why a circuit must settle within one period; (3) tell a latch from a flip-flop and build a register. Builds on: only what Lecture 01 set up. Next: Lecture 14, Elementary Machines: Registers and Buses.
 For the lecturer: The quotation is translated back from the Italian version used in the original deck. Spiral: a game with a title screen is a finite-state machine written in assembly; the lecture then builds the theory (time, state, Mealy and Moore), the memory elements (latches and flip-flops), and returns to the registers and the program counter of RISC-V.</a:t>
             </a:r>
             <a:endParaRPr lang="en-US" dirty="0"/>
@@ -1654,7 +1655,7 @@
             <a:r>
               <a:rPr lang="en-US" dirty="0"/>
               <a:t>Five conclusions. Digital circuits are combinational or sequential, and for the latter time and state are essential. A sequential machine realises a finite-state automaton, of Mealy or Moore type. Latches and flip-flops are the elementary memories, and feedback is what enables a circuit to remember. The clock determines when: latches respond during a level, flip-flops at an edge. Registers, counters, the program counter and the processor itself are sequential machines built around combinational networks. The next lecture assembles registers into the elementary machines of the datapath.
-Learning status, recap. UNDERSTAND NOW: finite-state machines; the clock; latches and flip-flops; registers as flip-flops. USE NOW: the complete program, the PRG32 tools (used, not studied, in this course). UNDERSTAND LATER: nothing. A slide without a badge is context: a story, an example, a question, an exercise.
+Learning status, recap. UNDERSTAND NOW: finite-state machines; the clock; latches and flip-flops; registers as flip-flops. USE NOW: the complete program, the PRG32 tools (used, not studied, in this course). UNDERSTAND LATER: nothing. A slide without a badge is context: a story, an example, a question, an exercise. Closing thread: A register is flip-flops that sample on a clock edge: this is how the counter of Lecture 02 survived from one frame to the next, in hardware. Next: how registers exchange data. Exit ticket (two to four minutes, alone, on paper): 1. The kit's clock runs at 160 MHz. What is its period, and why must every combinational network between two registers settle within it? 2. What is the difference between a D latch and a D flip-flop, and which one lets a register be read and written in the same clock cycle safely?
 For the lecturer: Next lecture: the elementary machines for the architecture: registers, shift registers, buses and three-state buffers.</a:t>
             </a:r>
             <a:endParaRPr lang="en-US" dirty="0"/>
